--- a/public/assets/Prototype_Expo_Track_Template.pptx
+++ b/public/assets/Prototype_Expo_Track_Template.pptx
@@ -6,29 +6,36 @@
   </p:sldMasterIdLst>
   <p:sldIdLst>
     <p:sldId id="256" r:id="rId6"/>
+    <p:sldId id="257" r:id="rId7"/>
+    <p:sldId id="258" r:id="rId8"/>
+    <p:sldId id="259" r:id="rId9"/>
+    <p:sldId id="260" r:id="rId10"/>
+    <p:sldId id="261" r:id="rId11"/>
+    <p:sldId id="262" r:id="rId12"/>
+    <p:sldId id="263" r:id="rId13"/>
   </p:sldIdLst>
   <p:sldSz cx="18288000" cy="10287000"/>
   <p:notesSz cx="6858000" cy="9144000"/>
   <p:embeddedFontLst>
     <p:embeddedFont>
       <p:font typeface="Helvetica World Bold" charset="1" panose="020B0800040000020004"/>
-      <p:regular r:id="rId7"/>
+      <p:regular r:id="rId14"/>
     </p:embeddedFont>
     <p:embeddedFont>
       <p:font typeface="Instrument Serif Italics" charset="1" panose="00000000000000000000"/>
-      <p:regular r:id="rId8"/>
+      <p:regular r:id="rId15"/>
     </p:embeddedFont>
     <p:embeddedFont>
       <p:font typeface="League Spartan" charset="1" panose="00000800000000000000"/>
-      <p:regular r:id="rId9"/>
+      <p:regular r:id="rId16"/>
     </p:embeddedFont>
     <p:embeddedFont>
       <p:font typeface="Calibri (MS) Bold Italics" charset="1" panose="020F07020304040A0204"/>
-      <p:regular r:id="rId10"/>
+      <p:regular r:id="rId17"/>
     </p:embeddedFont>
     <p:embeddedFont>
       <p:font typeface="Helvetica World" charset="1" panose="020B0500040000020004"/>
-      <p:regular r:id="rId11"/>
+      <p:regular r:id="rId18"/>
     </p:embeddedFont>
   </p:embeddedFontLst>
   <p:defaultTextStyle>
@@ -3338,8 +3345,8 @@
             </p:nvSpPr>
             <p:spPr>
               <a:xfrm>
-                <a:off x="0" y="-47625"/>
-                <a:ext cx="213671" cy="106660"/>
+                <a:off x="0" y="-57150"/>
+                <a:ext cx="213671" cy="116185"/>
               </a:xfrm>
               <a:prstGeom prst="rect">
                 <a:avLst/>
@@ -3733,8 +3740,8 @@
             </p:nvSpPr>
             <p:spPr>
               <a:xfrm>
-                <a:off x="0" y="-47625"/>
-                <a:ext cx="213671" cy="77143"/>
+                <a:off x="0" y="-57150"/>
+                <a:ext cx="213671" cy="86668"/>
               </a:xfrm>
               <a:prstGeom prst="rect">
                 <a:avLst/>
@@ -3853,8 +3860,8 @@
             </p:nvSpPr>
             <p:spPr>
               <a:xfrm>
-                <a:off x="0" y="-47625"/>
-                <a:ext cx="213671" cy="77143"/>
+                <a:off x="0" y="-57150"/>
+                <a:ext cx="213671" cy="86668"/>
               </a:xfrm>
               <a:prstGeom prst="rect">
                 <a:avLst/>
@@ -3973,8 +3980,8 @@
             </p:nvSpPr>
             <p:spPr>
               <a:xfrm>
-                <a:off x="0" y="-47625"/>
-                <a:ext cx="213671" cy="77143"/>
+                <a:off x="0" y="-57150"/>
+                <a:ext cx="213671" cy="86668"/>
               </a:xfrm>
               <a:prstGeom prst="rect">
                 <a:avLst/>
@@ -4093,8 +4100,8 @@
             </p:nvSpPr>
             <p:spPr>
               <a:xfrm>
-                <a:off x="0" y="-47625"/>
-                <a:ext cx="213671" cy="77143"/>
+                <a:off x="0" y="-57150"/>
+                <a:ext cx="213671" cy="86668"/>
               </a:xfrm>
               <a:prstGeom prst="rect">
                 <a:avLst/>
@@ -4476,9 +4483,683 @@
           </p:spPr>
         </p:sp>
       </p:grpSp>
-      <p:sp>
-        <p:nvSpPr>
-          <p:cNvPr name="TextBox 39" id="39"/>
+      <p:grpSp>
+        <p:nvGrpSpPr>
+          <p:cNvPr name="Group 39" id="39"/>
+          <p:cNvGrpSpPr/>
+          <p:nvPr/>
+        </p:nvGrpSpPr>
+        <p:grpSpPr>
+          <a:xfrm rot="0">
+            <a:off x="1161726" y="8538370"/>
+            <a:ext cx="16011849" cy="1741589"/>
+            <a:chOff x="0" y="0"/>
+            <a:chExt cx="21349132" cy="2322119"/>
+          </a:xfrm>
+        </p:grpSpPr>
+        <p:sp>
+          <p:nvSpPr>
+            <p:cNvPr name="Freeform 40" id="40"/>
+            <p:cNvSpPr/>
+            <p:nvPr/>
+          </p:nvSpPr>
+          <p:spPr>
+            <a:xfrm flipH="false" flipV="false" rot="0">
+              <a:off x="5874065" y="458896"/>
+              <a:ext cx="2720777" cy="1510640"/>
+            </a:xfrm>
+            <a:custGeom>
+              <a:avLst/>
+              <a:gdLst/>
+              <a:ahLst/>
+              <a:cxnLst/>
+              <a:rect r="r" b="b" t="t" l="l"/>
+              <a:pathLst>
+                <a:path h="1510640" w="2720777">
+                  <a:moveTo>
+                    <a:pt x="0" y="0"/>
+                  </a:moveTo>
+                  <a:lnTo>
+                    <a:pt x="2720777" y="0"/>
+                  </a:lnTo>
+                  <a:lnTo>
+                    <a:pt x="2720777" y="1510640"/>
+                  </a:lnTo>
+                  <a:lnTo>
+                    <a:pt x="0" y="1510640"/>
+                  </a:lnTo>
+                  <a:lnTo>
+                    <a:pt x="0" y="0"/>
+                  </a:lnTo>
+                  <a:close/>
+                </a:path>
+              </a:pathLst>
+            </a:custGeom>
+            <a:blipFill>
+              <a:blip r:embed="rId9"/>
+              <a:stretch>
+                <a:fillRect l="0" t="0" r="0" b="0"/>
+              </a:stretch>
+            </a:blipFill>
+          </p:spPr>
+        </p:sp>
+        <p:sp>
+          <p:nvSpPr>
+            <p:cNvPr name="Freeform 41" id="41"/>
+            <p:cNvSpPr/>
+            <p:nvPr/>
+          </p:nvSpPr>
+          <p:spPr>
+            <a:xfrm flipH="false" flipV="false" rot="0">
+              <a:off x="2974120" y="800398"/>
+              <a:ext cx="1917690" cy="827635"/>
+            </a:xfrm>
+            <a:custGeom>
+              <a:avLst/>
+              <a:gdLst/>
+              <a:ahLst/>
+              <a:cxnLst/>
+              <a:rect r="r" b="b" t="t" l="l"/>
+              <a:pathLst>
+                <a:path h="827635" w="1917690">
+                  <a:moveTo>
+                    <a:pt x="0" y="0"/>
+                  </a:moveTo>
+                  <a:lnTo>
+                    <a:pt x="1917691" y="0"/>
+                  </a:lnTo>
+                  <a:lnTo>
+                    <a:pt x="1917691" y="827635"/>
+                  </a:lnTo>
+                  <a:lnTo>
+                    <a:pt x="0" y="827635"/>
+                  </a:lnTo>
+                  <a:lnTo>
+                    <a:pt x="0" y="0"/>
+                  </a:lnTo>
+                  <a:close/>
+                </a:path>
+              </a:pathLst>
+            </a:custGeom>
+            <a:blipFill>
+              <a:blip r:embed="rId10"/>
+              <a:stretch>
+                <a:fillRect l="0" t="0" r="0" b="0"/>
+              </a:stretch>
+            </a:blipFill>
+          </p:spPr>
+        </p:sp>
+        <p:sp>
+          <p:nvSpPr>
+            <p:cNvPr name="Freeform 42" id="42"/>
+            <p:cNvSpPr/>
+            <p:nvPr/>
+          </p:nvSpPr>
+          <p:spPr>
+            <a:xfrm flipH="false" flipV="false" rot="0">
+              <a:off x="15457558" y="751869"/>
+              <a:ext cx="958787" cy="829512"/>
+            </a:xfrm>
+            <a:custGeom>
+              <a:avLst/>
+              <a:gdLst/>
+              <a:ahLst/>
+              <a:cxnLst/>
+              <a:rect r="r" b="b" t="t" l="l"/>
+              <a:pathLst>
+                <a:path h="829512" w="958787">
+                  <a:moveTo>
+                    <a:pt x="0" y="0"/>
+                  </a:moveTo>
+                  <a:lnTo>
+                    <a:pt x="958787" y="0"/>
+                  </a:lnTo>
+                  <a:lnTo>
+                    <a:pt x="958787" y="829512"/>
+                  </a:lnTo>
+                  <a:lnTo>
+                    <a:pt x="0" y="829512"/>
+                  </a:lnTo>
+                  <a:lnTo>
+                    <a:pt x="0" y="0"/>
+                  </a:lnTo>
+                  <a:close/>
+                </a:path>
+              </a:pathLst>
+            </a:custGeom>
+            <a:blipFill>
+              <a:blip r:embed="rId11"/>
+              <a:stretch>
+                <a:fillRect l="0" t="0" r="0" b="0"/>
+              </a:stretch>
+            </a:blipFill>
+          </p:spPr>
+        </p:sp>
+        <p:sp>
+          <p:nvSpPr>
+            <p:cNvPr name="Freeform 43" id="43"/>
+            <p:cNvSpPr/>
+            <p:nvPr/>
+          </p:nvSpPr>
+          <p:spPr>
+            <a:xfrm flipH="false" flipV="false" rot="0">
+              <a:off x="10368290" y="702921"/>
+              <a:ext cx="2260785" cy="962483"/>
+            </a:xfrm>
+            <a:custGeom>
+              <a:avLst/>
+              <a:gdLst/>
+              <a:ahLst/>
+              <a:cxnLst/>
+              <a:rect r="r" b="b" t="t" l="l"/>
+              <a:pathLst>
+                <a:path h="962483" w="2260785">
+                  <a:moveTo>
+                    <a:pt x="0" y="0"/>
+                  </a:moveTo>
+                  <a:lnTo>
+                    <a:pt x="2260785" y="0"/>
+                  </a:lnTo>
+                  <a:lnTo>
+                    <a:pt x="2260785" y="962483"/>
+                  </a:lnTo>
+                  <a:lnTo>
+                    <a:pt x="0" y="962483"/>
+                  </a:lnTo>
+                  <a:lnTo>
+                    <a:pt x="0" y="0"/>
+                  </a:lnTo>
+                  <a:close/>
+                </a:path>
+              </a:pathLst>
+            </a:custGeom>
+            <a:blipFill>
+              <a:blip r:embed="rId12"/>
+              <a:stretch>
+                <a:fillRect l="0" t="-33158" r="0" b="-43061"/>
+              </a:stretch>
+            </a:blipFill>
+          </p:spPr>
+        </p:sp>
+        <p:sp>
+          <p:nvSpPr>
+            <p:cNvPr name="Freeform 44" id="44"/>
+            <p:cNvSpPr/>
+            <p:nvPr/>
+          </p:nvSpPr>
+          <p:spPr>
+            <a:xfrm flipH="false" flipV="false" rot="0">
+              <a:off x="0" y="0"/>
+              <a:ext cx="2322119" cy="2322119"/>
+            </a:xfrm>
+            <a:custGeom>
+              <a:avLst/>
+              <a:gdLst/>
+              <a:ahLst/>
+              <a:cxnLst/>
+              <a:rect r="r" b="b" t="t" l="l"/>
+              <a:pathLst>
+                <a:path h="2322119" w="2322119">
+                  <a:moveTo>
+                    <a:pt x="0" y="0"/>
+                  </a:moveTo>
+                  <a:lnTo>
+                    <a:pt x="2322119" y="0"/>
+                  </a:lnTo>
+                  <a:lnTo>
+                    <a:pt x="2322119" y="2322119"/>
+                  </a:lnTo>
+                  <a:lnTo>
+                    <a:pt x="0" y="2322119"/>
+                  </a:lnTo>
+                  <a:lnTo>
+                    <a:pt x="0" y="0"/>
+                  </a:lnTo>
+                  <a:close/>
+                </a:path>
+              </a:pathLst>
+            </a:custGeom>
+            <a:blipFill>
+              <a:blip r:embed="rId13"/>
+              <a:stretch>
+                <a:fillRect l="0" t="0" r="0" b="0"/>
+              </a:stretch>
+            </a:blipFill>
+          </p:spPr>
+        </p:sp>
+        <p:sp>
+          <p:nvSpPr>
+            <p:cNvPr name="AutoShape 45" id="45"/>
+            <p:cNvSpPr/>
+            <p:nvPr/>
+          </p:nvSpPr>
+          <p:spPr>
+            <a:xfrm flipV="true">
+              <a:off x="53951" y="702921"/>
+              <a:ext cx="0" cy="1014340"/>
+            </a:xfrm>
+            <a:prstGeom prst="line">
+              <a:avLst/>
+            </a:prstGeom>
+            <a:ln cap="flat" w="50800">
+              <a:solidFill>
+                <a:srgbClr val="B58FFF"/>
+              </a:solidFill>
+              <a:prstDash val="solid"/>
+              <a:headEnd type="none" len="sm" w="sm"/>
+              <a:tailEnd type="none" len="sm" w="sm"/>
+            </a:ln>
+          </p:spPr>
+        </p:sp>
+        <p:sp>
+          <p:nvSpPr>
+            <p:cNvPr name="AutoShape 46" id="46"/>
+            <p:cNvSpPr/>
+            <p:nvPr/>
+          </p:nvSpPr>
+          <p:spPr>
+            <a:xfrm flipV="true">
+              <a:off x="2500695" y="702921"/>
+              <a:ext cx="0" cy="1014340"/>
+            </a:xfrm>
+            <a:prstGeom prst="line">
+              <a:avLst/>
+            </a:prstGeom>
+            <a:ln cap="flat" w="50800">
+              <a:solidFill>
+                <a:srgbClr val="B58FFF"/>
+              </a:solidFill>
+              <a:prstDash val="solid"/>
+              <a:headEnd type="none" len="sm" w="sm"/>
+              <a:tailEnd type="none" len="sm" w="sm"/>
+            </a:ln>
+          </p:spPr>
+        </p:sp>
+        <p:sp>
+          <p:nvSpPr>
+            <p:cNvPr name="AutoShape 47" id="47"/>
+            <p:cNvSpPr/>
+            <p:nvPr/>
+          </p:nvSpPr>
+          <p:spPr>
+            <a:xfrm flipV="true">
+              <a:off x="5575373" y="702921"/>
+              <a:ext cx="0" cy="1014340"/>
+            </a:xfrm>
+            <a:prstGeom prst="line">
+              <a:avLst/>
+            </a:prstGeom>
+            <a:ln cap="flat" w="50800">
+              <a:solidFill>
+                <a:srgbClr val="B58FFF"/>
+              </a:solidFill>
+              <a:prstDash val="solid"/>
+              <a:headEnd type="none" len="sm" w="sm"/>
+              <a:tailEnd type="none" len="sm" w="sm"/>
+            </a:ln>
+          </p:spPr>
+        </p:sp>
+        <p:sp>
+          <p:nvSpPr>
+            <p:cNvPr name="AutoShape 48" id="48"/>
+            <p:cNvSpPr/>
+            <p:nvPr/>
+          </p:nvSpPr>
+          <p:spPr>
+            <a:xfrm flipV="true">
+              <a:off x="8676642" y="702921"/>
+              <a:ext cx="0" cy="1014340"/>
+            </a:xfrm>
+            <a:prstGeom prst="line">
+              <a:avLst/>
+            </a:prstGeom>
+            <a:ln cap="flat" w="50800">
+              <a:solidFill>
+                <a:srgbClr val="B58FFF"/>
+              </a:solidFill>
+              <a:prstDash val="solid"/>
+              <a:headEnd type="none" len="sm" w="sm"/>
+              <a:tailEnd type="none" len="sm" w="sm"/>
+            </a:ln>
+          </p:spPr>
+        </p:sp>
+        <p:sp>
+          <p:nvSpPr>
+            <p:cNvPr name="AutoShape 49" id="49"/>
+            <p:cNvSpPr/>
+            <p:nvPr/>
+          </p:nvSpPr>
+          <p:spPr>
+            <a:xfrm flipV="true">
+              <a:off x="10162290" y="702921"/>
+              <a:ext cx="0" cy="1014340"/>
+            </a:xfrm>
+            <a:prstGeom prst="line">
+              <a:avLst/>
+            </a:prstGeom>
+            <a:ln cap="flat" w="50800">
+              <a:solidFill>
+                <a:srgbClr val="B58FFF"/>
+              </a:solidFill>
+              <a:prstDash val="solid"/>
+              <a:headEnd type="none" len="sm" w="sm"/>
+              <a:tailEnd type="none" len="sm" w="sm"/>
+            </a:ln>
+          </p:spPr>
+        </p:sp>
+        <p:sp>
+          <p:nvSpPr>
+            <p:cNvPr name="Freeform 50" id="50"/>
+            <p:cNvSpPr/>
+            <p:nvPr/>
+          </p:nvSpPr>
+          <p:spPr>
+            <a:xfrm flipH="false" flipV="false" rot="0">
+              <a:off x="13431975" y="800398"/>
+              <a:ext cx="780983" cy="780983"/>
+            </a:xfrm>
+            <a:custGeom>
+              <a:avLst/>
+              <a:gdLst/>
+              <a:ahLst/>
+              <a:cxnLst/>
+              <a:rect r="r" b="b" t="t" l="l"/>
+              <a:pathLst>
+                <a:path h="780983" w="780983">
+                  <a:moveTo>
+                    <a:pt x="0" y="0"/>
+                  </a:moveTo>
+                  <a:lnTo>
+                    <a:pt x="780983" y="0"/>
+                  </a:lnTo>
+                  <a:lnTo>
+                    <a:pt x="780983" y="780983"/>
+                  </a:lnTo>
+                  <a:lnTo>
+                    <a:pt x="0" y="780983"/>
+                  </a:lnTo>
+                  <a:lnTo>
+                    <a:pt x="0" y="0"/>
+                  </a:lnTo>
+                  <a:close/>
+                </a:path>
+              </a:pathLst>
+            </a:custGeom>
+            <a:blipFill>
+              <a:blip r:embed="rId14"/>
+              <a:stretch>
+                <a:fillRect l="0" t="0" r="0" b="0"/>
+              </a:stretch>
+            </a:blipFill>
+            <a:ln cap="sq">
+              <a:noFill/>
+              <a:prstDash val="solid"/>
+              <a:miter/>
+            </a:ln>
+          </p:spPr>
+        </p:sp>
+        <p:sp>
+          <p:nvSpPr>
+            <p:cNvPr name="AutoShape 51" id="51"/>
+            <p:cNvSpPr/>
+            <p:nvPr/>
+          </p:nvSpPr>
+          <p:spPr>
+            <a:xfrm flipV="true">
+              <a:off x="12806875" y="747242"/>
+              <a:ext cx="0" cy="1014340"/>
+            </a:xfrm>
+            <a:prstGeom prst="line">
+              <a:avLst/>
+            </a:prstGeom>
+            <a:ln cap="flat" w="50800">
+              <a:solidFill>
+                <a:srgbClr val="B58FFF"/>
+              </a:solidFill>
+              <a:prstDash val="solid"/>
+              <a:headEnd type="none" len="sm" w="sm"/>
+              <a:tailEnd type="none" len="sm" w="sm"/>
+            </a:ln>
+          </p:spPr>
+        </p:sp>
+        <p:sp>
+          <p:nvSpPr>
+            <p:cNvPr name="Freeform 52" id="52"/>
+            <p:cNvSpPr/>
+            <p:nvPr/>
+          </p:nvSpPr>
+          <p:spPr>
+            <a:xfrm flipH="false" flipV="false" rot="0">
+              <a:off x="8952492" y="747242"/>
+              <a:ext cx="933948" cy="933948"/>
+            </a:xfrm>
+            <a:custGeom>
+              <a:avLst/>
+              <a:gdLst/>
+              <a:ahLst/>
+              <a:cxnLst/>
+              <a:rect r="r" b="b" t="t" l="l"/>
+              <a:pathLst>
+                <a:path h="933948" w="933948">
+                  <a:moveTo>
+                    <a:pt x="0" y="0"/>
+                  </a:moveTo>
+                  <a:lnTo>
+                    <a:pt x="933948" y="0"/>
+                  </a:lnTo>
+                  <a:lnTo>
+                    <a:pt x="933948" y="933948"/>
+                  </a:lnTo>
+                  <a:lnTo>
+                    <a:pt x="0" y="933948"/>
+                  </a:lnTo>
+                  <a:lnTo>
+                    <a:pt x="0" y="0"/>
+                  </a:lnTo>
+                  <a:close/>
+                </a:path>
+              </a:pathLst>
+            </a:custGeom>
+            <a:blipFill>
+              <a:blip r:embed="rId15"/>
+              <a:stretch>
+                <a:fillRect l="0" t="0" r="0" b="0"/>
+              </a:stretch>
+            </a:blipFill>
+          </p:spPr>
+        </p:sp>
+        <p:sp>
+          <p:nvSpPr>
+            <p:cNvPr name="AutoShape 53" id="53"/>
+            <p:cNvSpPr/>
+            <p:nvPr/>
+          </p:nvSpPr>
+          <p:spPr>
+            <a:xfrm flipV="true">
+              <a:off x="14835258" y="747242"/>
+              <a:ext cx="0" cy="1014340"/>
+            </a:xfrm>
+            <a:prstGeom prst="line">
+              <a:avLst/>
+            </a:prstGeom>
+            <a:ln cap="flat" w="50800">
+              <a:solidFill>
+                <a:srgbClr val="B58FFF"/>
+              </a:solidFill>
+              <a:prstDash val="solid"/>
+              <a:headEnd type="none" len="sm" w="sm"/>
+              <a:tailEnd type="none" len="sm" w="sm"/>
+            </a:ln>
+          </p:spPr>
+        </p:sp>
+        <p:sp>
+          <p:nvSpPr>
+            <p:cNvPr name="AutoShape 54" id="54"/>
+            <p:cNvSpPr/>
+            <p:nvPr/>
+          </p:nvSpPr>
+          <p:spPr>
+            <a:xfrm flipV="true">
+              <a:off x="16863640" y="702921"/>
+              <a:ext cx="0" cy="1014340"/>
+            </a:xfrm>
+            <a:prstGeom prst="line">
+              <a:avLst/>
+            </a:prstGeom>
+            <a:ln cap="flat" w="50800">
+              <a:solidFill>
+                <a:srgbClr val="B58FFF"/>
+              </a:solidFill>
+              <a:prstDash val="solid"/>
+              <a:headEnd type="none" len="sm" w="sm"/>
+              <a:tailEnd type="none" len="sm" w="sm"/>
+            </a:ln>
+          </p:spPr>
+        </p:sp>
+        <p:sp>
+          <p:nvSpPr>
+            <p:cNvPr name="Freeform 55" id="55"/>
+            <p:cNvSpPr/>
+            <p:nvPr/>
+          </p:nvSpPr>
+          <p:spPr>
+            <a:xfrm flipH="false" flipV="false" rot="0">
+              <a:off x="17106464" y="519332"/>
+              <a:ext cx="1207255" cy="1207255"/>
+            </a:xfrm>
+            <a:custGeom>
+              <a:avLst/>
+              <a:gdLst/>
+              <a:ahLst/>
+              <a:cxnLst/>
+              <a:rect r="r" b="b" t="t" l="l"/>
+              <a:pathLst>
+                <a:path h="1207255" w="1207255">
+                  <a:moveTo>
+                    <a:pt x="0" y="0"/>
+                  </a:moveTo>
+                  <a:lnTo>
+                    <a:pt x="1207255" y="0"/>
+                  </a:lnTo>
+                  <a:lnTo>
+                    <a:pt x="1207255" y="1207255"/>
+                  </a:lnTo>
+                  <a:lnTo>
+                    <a:pt x="0" y="1207255"/>
+                  </a:lnTo>
+                  <a:lnTo>
+                    <a:pt x="0" y="0"/>
+                  </a:lnTo>
+                  <a:close/>
+                </a:path>
+              </a:pathLst>
+            </a:custGeom>
+            <a:blipFill>
+              <a:blip r:embed="rId16"/>
+              <a:stretch>
+                <a:fillRect l="0" t="0" r="0" b="0"/>
+              </a:stretch>
+            </a:blipFill>
+          </p:spPr>
+        </p:sp>
+        <p:sp>
+          <p:nvSpPr>
+            <p:cNvPr name="AutoShape 56" id="56"/>
+            <p:cNvSpPr/>
+            <p:nvPr/>
+          </p:nvSpPr>
+          <p:spPr>
+            <a:xfrm flipV="true">
+              <a:off x="18618519" y="676993"/>
+              <a:ext cx="0" cy="1014340"/>
+            </a:xfrm>
+            <a:prstGeom prst="line">
+              <a:avLst/>
+            </a:prstGeom>
+            <a:ln cap="flat" w="50800">
+              <a:solidFill>
+                <a:srgbClr val="B58FFF"/>
+              </a:solidFill>
+              <a:prstDash val="solid"/>
+              <a:headEnd type="none" len="sm" w="sm"/>
+              <a:tailEnd type="none" len="sm" w="sm"/>
+            </a:ln>
+          </p:spPr>
+        </p:sp>
+        <p:sp>
+          <p:nvSpPr>
+            <p:cNvPr name="Freeform 57" id="57"/>
+            <p:cNvSpPr/>
+            <p:nvPr/>
+          </p:nvSpPr>
+          <p:spPr>
+            <a:xfrm flipH="false" flipV="false" rot="0">
+              <a:off x="19142496" y="972606"/>
+              <a:ext cx="1801531" cy="529035"/>
+            </a:xfrm>
+            <a:custGeom>
+              <a:avLst/>
+              <a:gdLst/>
+              <a:ahLst/>
+              <a:cxnLst/>
+              <a:rect r="r" b="b" t="t" l="l"/>
+              <a:pathLst>
+                <a:path h="529035" w="1801531">
+                  <a:moveTo>
+                    <a:pt x="0" y="0"/>
+                  </a:moveTo>
+                  <a:lnTo>
+                    <a:pt x="1801531" y="0"/>
+                  </a:lnTo>
+                  <a:lnTo>
+                    <a:pt x="1801531" y="529035"/>
+                  </a:lnTo>
+                  <a:lnTo>
+                    <a:pt x="0" y="529035"/>
+                  </a:lnTo>
+                  <a:lnTo>
+                    <a:pt x="0" y="0"/>
+                  </a:lnTo>
+                  <a:close/>
+                </a:path>
+              </a:pathLst>
+            </a:custGeom>
+            <a:blipFill>
+              <a:blip r:embed="rId17"/>
+              <a:stretch>
+                <a:fillRect l="0" t="0" r="0" b="0"/>
+              </a:stretch>
+            </a:blipFill>
+          </p:spPr>
+        </p:sp>
+        <p:sp>
+          <p:nvSpPr>
+            <p:cNvPr name="AutoShape 58" id="58"/>
+            <p:cNvSpPr/>
+            <p:nvPr/>
+          </p:nvSpPr>
+          <p:spPr>
+            <a:xfrm flipV="true">
+              <a:off x="21323732" y="653889"/>
+              <a:ext cx="0" cy="1014340"/>
+            </a:xfrm>
+            <a:prstGeom prst="line">
+              <a:avLst/>
+            </a:prstGeom>
+            <a:ln cap="flat" w="50800">
+              <a:solidFill>
+                <a:srgbClr val="B58FFF"/>
+              </a:solidFill>
+              <a:prstDash val="solid"/>
+              <a:headEnd type="none" len="sm" w="sm"/>
+              <a:tailEnd type="none" len="sm" w="sm"/>
+            </a:ln>
+          </p:spPr>
+        </p:sp>
+      </p:grpSp>
+      <p:sp>
+        <p:nvSpPr>
+          <p:cNvPr name="TextBox 59" id="59"/>
           <p:cNvSpPr txBox="true"/>
           <p:nvPr/>
         </p:nvSpPr>
@@ -4543,7 +5224,7 @@
       </p:sp>
       <p:sp>
         <p:nvSpPr>
-          <p:cNvPr name="TextBox 40" id="40"/>
+          <p:cNvPr name="TextBox 60" id="60"/>
           <p:cNvSpPr txBox="true"/>
           <p:nvPr/>
         </p:nvSpPr>
@@ -4608,7 +5289,7 @@
       </p:sp>
       <p:sp>
         <p:nvSpPr>
-          <p:cNvPr name="TextBox 41" id="41"/>
+          <p:cNvPr name="TextBox 61" id="61"/>
           <p:cNvSpPr txBox="true"/>
           <p:nvPr/>
         </p:nvSpPr>
@@ -4647,267 +5328,202 @@
           </a:p>
         </p:txBody>
       </p:sp>
+    </p:spTree>
+  </p:cSld>
+  <p:clrMapOvr>
+    <a:masterClrMapping/>
+  </p:clrMapOvr>
+</p:sld>
+</file>
+
+<file path=ppt/slides/slide2.xml><?xml version="1.0" encoding="utf-8"?>
+<p:sld xmlns:p="http://schemas.openxmlformats.org/presentationml/2006/main" xmlns:a="http://schemas.openxmlformats.org/drawingml/2006/main" xmlns:r="http://schemas.openxmlformats.org/officeDocument/2006/relationships">
+  <p:cSld>
+    <p:bg>
+      <p:bgPr>
+        <a:solidFill>
+          <a:srgbClr val="F7F7FD"/>
+        </a:solidFill>
+      </p:bgPr>
+    </p:bg>
+    <p:spTree>
+      <p:nvGrpSpPr>
+        <p:cNvPr id="1" name=""/>
+        <p:cNvGrpSpPr/>
+        <p:nvPr/>
+      </p:nvGrpSpPr>
+      <p:grpSpPr>
+        <a:xfrm>
+          <a:off x="0" y="0"/>
+          <a:ext cx="0" cy="0"/>
+          <a:chOff x="0" y="0"/>
+          <a:chExt cx="0" cy="0"/>
+        </a:xfrm>
+      </p:grpSpPr>
+      <p:sp>
+        <p:nvSpPr>
+          <p:cNvPr name="Freeform 2" id="2"/>
+          <p:cNvSpPr/>
+          <p:nvPr/>
+        </p:nvSpPr>
+        <p:spPr>
+          <a:xfrm flipH="false" flipV="false" rot="0">
+            <a:off x="-393678" y="-11430"/>
+            <a:ext cx="18681678" cy="10531796"/>
+          </a:xfrm>
+          <a:custGeom>
+            <a:avLst/>
+            <a:gdLst/>
+            <a:ahLst/>
+            <a:cxnLst/>
+            <a:rect r="r" b="b" t="t" l="l"/>
+            <a:pathLst>
+              <a:path h="10531796" w="18681678">
+                <a:moveTo>
+                  <a:pt x="0" y="0"/>
+                </a:moveTo>
+                <a:lnTo>
+                  <a:pt x="18681678" y="0"/>
+                </a:lnTo>
+                <a:lnTo>
+                  <a:pt x="18681678" y="10531796"/>
+                </a:lnTo>
+                <a:lnTo>
+                  <a:pt x="0" y="10531796"/>
+                </a:lnTo>
+                <a:lnTo>
+                  <a:pt x="0" y="0"/>
+                </a:lnTo>
+                <a:close/>
+              </a:path>
+            </a:pathLst>
+          </a:custGeom>
+          <a:blipFill>
+            <a:blip r:embed="rId2"/>
+            <a:stretch>
+              <a:fillRect l="0" t="0" r="0" b="0"/>
+            </a:stretch>
+          </a:blipFill>
+        </p:spPr>
+      </p:sp>
+      <p:sp>
+        <p:nvSpPr>
+          <p:cNvPr name="TextBox 3" id="3"/>
+          <p:cNvSpPr txBox="true"/>
+          <p:nvPr/>
+        </p:nvSpPr>
+        <p:spPr>
+          <a:xfrm rot="0">
+            <a:off x="1355260" y="480122"/>
+            <a:ext cx="16619932" cy="781050"/>
+          </a:xfrm>
+          <a:prstGeom prst="rect">
+            <a:avLst/>
+          </a:prstGeom>
+        </p:spPr>
+        <p:txBody>
+          <a:bodyPr anchor="t" rtlCol="false" tIns="0" lIns="0" bIns="0" rIns="0">
+            <a:spAutoFit/>
+          </a:bodyPr>
+          <a:lstStyle/>
+          <a:p>
+            <a:pPr algn="l">
+              <a:lnSpc>
+                <a:spcPts val="6300"/>
+              </a:lnSpc>
+            </a:pPr>
+            <a:r>
+              <a:rPr lang="en-US" sz="4500">
+                <a:solidFill>
+                  <a:srgbClr val="632EC9"/>
+                </a:solidFill>
+                <a:latin typeface="League Spartan"/>
+                <a:ea typeface="League Spartan"/>
+                <a:cs typeface="League Spartan"/>
+                <a:sym typeface="League Spartan"/>
+              </a:rPr>
+              <a:t>Problem and limitations of existing solutions</a:t>
+            </a:r>
+          </a:p>
+        </p:txBody>
+      </p:sp>
+      <p:sp>
+        <p:nvSpPr>
+          <p:cNvPr name="Freeform 4" id="4"/>
+          <p:cNvSpPr/>
+          <p:nvPr/>
+        </p:nvSpPr>
+        <p:spPr>
+          <a:xfrm flipH="false" flipV="false" rot="0">
+            <a:off x="17034205" y="297395"/>
+            <a:ext cx="925524" cy="963762"/>
+          </a:xfrm>
+          <a:custGeom>
+            <a:avLst/>
+            <a:gdLst/>
+            <a:ahLst/>
+            <a:cxnLst/>
+            <a:rect r="r" b="b" t="t" l="l"/>
+            <a:pathLst>
+              <a:path h="963762" w="925524">
+                <a:moveTo>
+                  <a:pt x="0" y="0"/>
+                </a:moveTo>
+                <a:lnTo>
+                  <a:pt x="925524" y="0"/>
+                </a:lnTo>
+                <a:lnTo>
+                  <a:pt x="925524" y="963763"/>
+                </a:lnTo>
+                <a:lnTo>
+                  <a:pt x="0" y="963763"/>
+                </a:lnTo>
+                <a:lnTo>
+                  <a:pt x="0" y="0"/>
+                </a:lnTo>
+                <a:close/>
+              </a:path>
+            </a:pathLst>
+          </a:custGeom>
+          <a:blipFill>
+            <a:blip r:embed="rId3"/>
+            <a:stretch>
+              <a:fillRect l="-8247" t="-5733" r="-147202" b="0"/>
+            </a:stretch>
+          </a:blipFill>
+        </p:spPr>
+      </p:sp>
       <p:grpSp>
         <p:nvGrpSpPr>
-          <p:cNvPr name="Group 42" id="42"/>
+          <p:cNvPr name="Group 5" id="5"/>
           <p:cNvGrpSpPr/>
           <p:nvPr/>
         </p:nvGrpSpPr>
         <p:grpSpPr>
           <a:xfrm rot="0">
-            <a:off x="2291428" y="8538370"/>
-            <a:ext cx="13982939" cy="1741589"/>
+            <a:off x="1028661" y="1321157"/>
+            <a:ext cx="16903200" cy="672561"/>
             <a:chOff x="0" y="0"/>
-            <a:chExt cx="18643919" cy="2322119"/>
+            <a:chExt cx="22537600" cy="896747"/>
           </a:xfrm>
         </p:grpSpPr>
         <p:sp>
           <p:nvSpPr>
-            <p:cNvPr name="Freeform 43" id="43"/>
+            <p:cNvPr name="AutoShape 6" id="6"/>
             <p:cNvSpPr/>
             <p:nvPr/>
           </p:nvSpPr>
           <p:spPr>
-            <a:xfrm flipH="false" flipV="false" rot="0">
-              <a:off x="5874065" y="458896"/>
-              <a:ext cx="2720777" cy="1510640"/>
-            </a:xfrm>
-            <a:custGeom>
-              <a:avLst/>
-              <a:gdLst/>
-              <a:ahLst/>
-              <a:cxnLst/>
-              <a:rect r="r" b="b" t="t" l="l"/>
-              <a:pathLst>
-                <a:path h="1510640" w="2720777">
-                  <a:moveTo>
-                    <a:pt x="0" y="0"/>
-                  </a:moveTo>
-                  <a:lnTo>
-                    <a:pt x="2720777" y="0"/>
-                  </a:lnTo>
-                  <a:lnTo>
-                    <a:pt x="2720777" y="1510640"/>
-                  </a:lnTo>
-                  <a:lnTo>
-                    <a:pt x="0" y="1510640"/>
-                  </a:lnTo>
-                  <a:lnTo>
-                    <a:pt x="0" y="0"/>
-                  </a:lnTo>
-                  <a:close/>
-                </a:path>
-              </a:pathLst>
-            </a:custGeom>
-            <a:blipFill>
-              <a:blip r:embed="rId9"/>
-              <a:stretch>
-                <a:fillRect l="0" t="0" r="0" b="0"/>
-              </a:stretch>
-            </a:blipFill>
-          </p:spPr>
-        </p:sp>
-        <p:sp>
-          <p:nvSpPr>
-            <p:cNvPr name="Freeform 44" id="44"/>
-            <p:cNvSpPr/>
-            <p:nvPr/>
-          </p:nvSpPr>
-          <p:spPr>
-            <a:xfrm flipH="false" flipV="false" rot="0">
-              <a:off x="2974120" y="800398"/>
-              <a:ext cx="1917690" cy="827635"/>
-            </a:xfrm>
-            <a:custGeom>
-              <a:avLst/>
-              <a:gdLst/>
-              <a:ahLst/>
-              <a:cxnLst/>
-              <a:rect r="r" b="b" t="t" l="l"/>
-              <a:pathLst>
-                <a:path h="827635" w="1917690">
-                  <a:moveTo>
-                    <a:pt x="0" y="0"/>
-                  </a:moveTo>
-                  <a:lnTo>
-                    <a:pt x="1917691" y="0"/>
-                  </a:lnTo>
-                  <a:lnTo>
-                    <a:pt x="1917691" y="827635"/>
-                  </a:lnTo>
-                  <a:lnTo>
-                    <a:pt x="0" y="827635"/>
-                  </a:lnTo>
-                  <a:lnTo>
-                    <a:pt x="0" y="0"/>
-                  </a:lnTo>
-                  <a:close/>
-                </a:path>
-              </a:pathLst>
-            </a:custGeom>
-            <a:blipFill>
-              <a:blip r:embed="rId10"/>
-              <a:stretch>
-                <a:fillRect l="0" t="0" r="0" b="0"/>
-              </a:stretch>
-            </a:blipFill>
-          </p:spPr>
-        </p:sp>
-        <p:sp>
-          <p:nvSpPr>
-            <p:cNvPr name="Freeform 45" id="45"/>
-            <p:cNvSpPr/>
-            <p:nvPr/>
-          </p:nvSpPr>
-          <p:spPr>
-            <a:xfrm flipH="false" flipV="false" rot="0">
-              <a:off x="15457558" y="751869"/>
-              <a:ext cx="958787" cy="829512"/>
-            </a:xfrm>
-            <a:custGeom>
-              <a:avLst/>
-              <a:gdLst/>
-              <a:ahLst/>
-              <a:cxnLst/>
-              <a:rect r="r" b="b" t="t" l="l"/>
-              <a:pathLst>
-                <a:path h="829512" w="958787">
-                  <a:moveTo>
-                    <a:pt x="0" y="0"/>
-                  </a:moveTo>
-                  <a:lnTo>
-                    <a:pt x="958787" y="0"/>
-                  </a:lnTo>
-                  <a:lnTo>
-                    <a:pt x="958787" y="829512"/>
-                  </a:lnTo>
-                  <a:lnTo>
-                    <a:pt x="0" y="829512"/>
-                  </a:lnTo>
-                  <a:lnTo>
-                    <a:pt x="0" y="0"/>
-                  </a:lnTo>
-                  <a:close/>
-                </a:path>
-              </a:pathLst>
-            </a:custGeom>
-            <a:blipFill>
-              <a:blip r:embed="rId11"/>
-              <a:stretch>
-                <a:fillRect l="0" t="0" r="0" b="0"/>
-              </a:stretch>
-            </a:blipFill>
-          </p:spPr>
-        </p:sp>
-        <p:sp>
-          <p:nvSpPr>
-            <p:cNvPr name="Freeform 46" id="46"/>
-            <p:cNvSpPr/>
-            <p:nvPr/>
-          </p:nvSpPr>
-          <p:spPr>
-            <a:xfrm flipH="false" flipV="false" rot="0">
-              <a:off x="10368290" y="702921"/>
-              <a:ext cx="2260785" cy="962483"/>
-            </a:xfrm>
-            <a:custGeom>
-              <a:avLst/>
-              <a:gdLst/>
-              <a:ahLst/>
-              <a:cxnLst/>
-              <a:rect r="r" b="b" t="t" l="l"/>
-              <a:pathLst>
-                <a:path h="962483" w="2260785">
-                  <a:moveTo>
-                    <a:pt x="0" y="0"/>
-                  </a:moveTo>
-                  <a:lnTo>
-                    <a:pt x="2260785" y="0"/>
-                  </a:lnTo>
-                  <a:lnTo>
-                    <a:pt x="2260785" y="962483"/>
-                  </a:lnTo>
-                  <a:lnTo>
-                    <a:pt x="0" y="962483"/>
-                  </a:lnTo>
-                  <a:lnTo>
-                    <a:pt x="0" y="0"/>
-                  </a:lnTo>
-                  <a:close/>
-                </a:path>
-              </a:pathLst>
-            </a:custGeom>
-            <a:blipFill>
-              <a:blip r:embed="rId12"/>
-              <a:stretch>
-                <a:fillRect l="0" t="-33158" r="0" b="-43061"/>
-              </a:stretch>
-            </a:blipFill>
-          </p:spPr>
-        </p:sp>
-        <p:sp>
-          <p:nvSpPr>
-            <p:cNvPr name="Freeform 47" id="47"/>
-            <p:cNvSpPr/>
-            <p:nvPr/>
-          </p:nvSpPr>
-          <p:spPr>
-            <a:xfrm flipH="false" flipV="false" rot="0">
-              <a:off x="0" y="0"/>
-              <a:ext cx="2322119" cy="2322119"/>
-            </a:xfrm>
-            <a:custGeom>
-              <a:avLst/>
-              <a:gdLst/>
-              <a:ahLst/>
-              <a:cxnLst/>
-              <a:rect r="r" b="b" t="t" l="l"/>
-              <a:pathLst>
-                <a:path h="2322119" w="2322119">
-                  <a:moveTo>
-                    <a:pt x="0" y="0"/>
-                  </a:moveTo>
-                  <a:lnTo>
-                    <a:pt x="2322119" y="0"/>
-                  </a:lnTo>
-                  <a:lnTo>
-                    <a:pt x="2322119" y="2322119"/>
-                  </a:lnTo>
-                  <a:lnTo>
-                    <a:pt x="0" y="2322119"/>
-                  </a:lnTo>
-                  <a:lnTo>
-                    <a:pt x="0" y="0"/>
-                  </a:lnTo>
-                  <a:close/>
-                </a:path>
-              </a:pathLst>
-            </a:custGeom>
-            <a:blipFill>
-              <a:blip r:embed="rId13"/>
-              <a:stretch>
-                <a:fillRect l="0" t="0" r="0" b="0"/>
-              </a:stretch>
-            </a:blipFill>
-          </p:spPr>
-        </p:sp>
-        <p:sp>
-          <p:nvSpPr>
-            <p:cNvPr name="AutoShape 48" id="48"/>
-            <p:cNvSpPr/>
-            <p:nvPr/>
-          </p:nvSpPr>
-          <p:spPr>
-            <a:xfrm flipV="true">
-              <a:off x="53951" y="702921"/>
-              <a:ext cx="0" cy="1014340"/>
+            <a:xfrm>
+              <a:off x="49" y="411875"/>
+              <a:ext cx="22290554" cy="42849"/>
             </a:xfrm>
             <a:prstGeom prst="line">
               <a:avLst/>
             </a:prstGeom>
             <a:ln cap="flat" w="50800">
               <a:solidFill>
-                <a:srgbClr val="B58FFF"/>
+                <a:srgbClr val="6E2AF5"/>
               </a:solidFill>
               <a:prstDash val="solid"/>
               <a:headEnd type="none" len="sm" w="sm"/>
@@ -4917,21 +5533,1306 @@
         </p:sp>
         <p:sp>
           <p:nvSpPr>
-            <p:cNvPr name="AutoShape 49" id="49"/>
+            <p:cNvPr name="Freeform 7" id="7"/>
             <p:cNvSpPr/>
             <p:nvPr/>
           </p:nvSpPr>
           <p:spPr>
-            <a:xfrm flipV="true">
-              <a:off x="2500695" y="702921"/>
-              <a:ext cx="0" cy="1014340"/>
+            <a:xfrm flipH="false" flipV="false" rot="0">
+              <a:off x="21640852" y="0"/>
+              <a:ext cx="896747" cy="896747"/>
+            </a:xfrm>
+            <a:custGeom>
+              <a:avLst/>
+              <a:gdLst/>
+              <a:ahLst/>
+              <a:cxnLst/>
+              <a:rect r="r" b="b" t="t" l="l"/>
+              <a:pathLst>
+                <a:path h="896747" w="896747">
+                  <a:moveTo>
+                    <a:pt x="0" y="0"/>
+                  </a:moveTo>
+                  <a:lnTo>
+                    <a:pt x="896748" y="0"/>
+                  </a:lnTo>
+                  <a:lnTo>
+                    <a:pt x="896748" y="896747"/>
+                  </a:lnTo>
+                  <a:lnTo>
+                    <a:pt x="0" y="896747"/>
+                  </a:lnTo>
+                  <a:lnTo>
+                    <a:pt x="0" y="0"/>
+                  </a:lnTo>
+                  <a:close/>
+                </a:path>
+              </a:pathLst>
+            </a:custGeom>
+            <a:blipFill>
+              <a:blip r:embed="rId4">
+                <a:extLst>
+                  <a:ext uri="{96DAC541-7B7A-43D3-8B79-37D633B846F1}">
+                    <asvg:svgBlip xmlns:asvg="http://schemas.microsoft.com/office/drawing/2016/SVG/main" r:embed="rId5"/>
+                  </a:ext>
+                </a:extLst>
+              </a:blip>
+              <a:stretch>
+                <a:fillRect l="0" t="0" r="0" b="0"/>
+              </a:stretch>
+            </a:blipFill>
+          </p:spPr>
+        </p:sp>
+      </p:grpSp>
+      <p:sp>
+        <p:nvSpPr>
+          <p:cNvPr name="TextBox 8" id="8"/>
+          <p:cNvSpPr txBox="true"/>
+          <p:nvPr/>
+        </p:nvSpPr>
+        <p:spPr>
+          <a:xfrm rot="0">
+            <a:off x="1845052" y="2709807"/>
+            <a:ext cx="3264102" cy="496996"/>
+          </a:xfrm>
+          <a:prstGeom prst="rect">
+            <a:avLst/>
+          </a:prstGeom>
+        </p:spPr>
+        <p:txBody>
+          <a:bodyPr anchor="t" rtlCol="false" tIns="0" lIns="0" bIns="0" rIns="0">
+            <a:spAutoFit/>
+          </a:bodyPr>
+          <a:lstStyle/>
+          <a:p>
+            <a:pPr algn="ctr">
+              <a:lnSpc>
+                <a:spcPts val="3771"/>
+              </a:lnSpc>
+            </a:pPr>
+            <a:r>
+              <a:rPr lang="en-US" sz="2694" b="true">
+                <a:solidFill>
+                  <a:srgbClr val="7C7C7C"/>
+                </a:solidFill>
+                <a:latin typeface="Helvetica World Bold"/>
+                <a:ea typeface="Helvetica World Bold"/>
+                <a:cs typeface="Helvetica World Bold"/>
+                <a:sym typeface="Helvetica World Bold"/>
+              </a:rPr>
+              <a:t>Problem Statement</a:t>
+            </a:r>
+          </a:p>
+        </p:txBody>
+      </p:sp>
+      <p:sp>
+        <p:nvSpPr>
+          <p:cNvPr name="TextBox 9" id="9"/>
+          <p:cNvSpPr txBox="true"/>
+          <p:nvPr/>
+        </p:nvSpPr>
+        <p:spPr>
+          <a:xfrm rot="0">
+            <a:off x="1476605" y="4127486"/>
+            <a:ext cx="4000996" cy="382269"/>
+          </a:xfrm>
+          <a:prstGeom prst="rect">
+            <a:avLst/>
+          </a:prstGeom>
+        </p:spPr>
+        <p:txBody>
+          <a:bodyPr anchor="t" rtlCol="false" tIns="0" lIns="0" bIns="0" rIns="0">
+            <a:spAutoFit/>
+          </a:bodyPr>
+          <a:lstStyle/>
+          <a:p>
+            <a:pPr algn="ctr">
+              <a:lnSpc>
+                <a:spcPts val="3080"/>
+              </a:lnSpc>
+            </a:pPr>
+            <a:r>
+              <a:rPr lang="en-US" sz="2200">
+                <a:solidFill>
+                  <a:srgbClr val="000000"/>
+                </a:solidFill>
+                <a:latin typeface="Helvetica World"/>
+                <a:ea typeface="Helvetica World"/>
+                <a:cs typeface="Helvetica World"/>
+                <a:sym typeface="Helvetica World"/>
+              </a:rPr>
+              <a:t>Explain Your  Problem Statement</a:t>
+            </a:r>
+          </a:p>
+        </p:txBody>
+      </p:sp>
+      <p:sp>
+        <p:nvSpPr>
+          <p:cNvPr name="TextBox 10" id="10"/>
+          <p:cNvSpPr txBox="true"/>
+          <p:nvPr/>
+        </p:nvSpPr>
+        <p:spPr>
+          <a:xfrm rot="0">
+            <a:off x="7267053" y="2741823"/>
+            <a:ext cx="3753894" cy="496996"/>
+          </a:xfrm>
+          <a:prstGeom prst="rect">
+            <a:avLst/>
+          </a:prstGeom>
+        </p:spPr>
+        <p:txBody>
+          <a:bodyPr anchor="t" rtlCol="false" tIns="0" lIns="0" bIns="0" rIns="0">
+            <a:spAutoFit/>
+          </a:bodyPr>
+          <a:lstStyle/>
+          <a:p>
+            <a:pPr algn="ctr">
+              <a:lnSpc>
+                <a:spcPts val="3771"/>
+              </a:lnSpc>
+            </a:pPr>
+            <a:r>
+              <a:rPr lang="en-US" sz="2694" b="true">
+                <a:solidFill>
+                  <a:srgbClr val="7C7C7C"/>
+                </a:solidFill>
+                <a:latin typeface="Helvetica World Bold"/>
+                <a:ea typeface="Helvetica World Bold"/>
+                <a:cs typeface="Helvetica World Bold"/>
+                <a:sym typeface="Helvetica World Bold"/>
+              </a:rPr>
+              <a:t>Need and Background</a:t>
+            </a:r>
+          </a:p>
+        </p:txBody>
+      </p:sp>
+      <p:sp>
+        <p:nvSpPr>
+          <p:cNvPr name="TextBox 11" id="11"/>
+          <p:cNvSpPr txBox="true"/>
+          <p:nvPr/>
+        </p:nvSpPr>
+        <p:spPr>
+          <a:xfrm rot="0">
+            <a:off x="7265815" y="4137011"/>
+            <a:ext cx="3739654" cy="382269"/>
+          </a:xfrm>
+          <a:prstGeom prst="rect">
+            <a:avLst/>
+          </a:prstGeom>
+        </p:spPr>
+        <p:txBody>
+          <a:bodyPr anchor="t" rtlCol="false" tIns="0" lIns="0" bIns="0" rIns="0">
+            <a:spAutoFit/>
+          </a:bodyPr>
+          <a:lstStyle/>
+          <a:p>
+            <a:pPr algn="ctr">
+              <a:lnSpc>
+                <a:spcPts val="3080"/>
+              </a:lnSpc>
+            </a:pPr>
+            <a:r>
+              <a:rPr lang="en-US" sz="2200">
+                <a:solidFill>
+                  <a:srgbClr val="000000"/>
+                </a:solidFill>
+                <a:latin typeface="Helvetica World"/>
+                <a:ea typeface="Helvetica World"/>
+                <a:cs typeface="Helvetica World"/>
+                <a:sym typeface="Helvetica World"/>
+              </a:rPr>
+              <a:t>Explain Need and Background</a:t>
+            </a:r>
+          </a:p>
+        </p:txBody>
+      </p:sp>
+      <p:sp>
+        <p:nvSpPr>
+          <p:cNvPr name="TextBox 12" id="12"/>
+          <p:cNvSpPr txBox="true"/>
+          <p:nvPr/>
+        </p:nvSpPr>
+        <p:spPr>
+          <a:xfrm rot="0">
+            <a:off x="12745595" y="2487682"/>
+            <a:ext cx="5009152" cy="1019002"/>
+          </a:xfrm>
+          <a:prstGeom prst="rect">
+            <a:avLst/>
+          </a:prstGeom>
+        </p:spPr>
+        <p:txBody>
+          <a:bodyPr anchor="t" rtlCol="false" tIns="0" lIns="0" bIns="0" rIns="0">
+            <a:spAutoFit/>
+          </a:bodyPr>
+          <a:lstStyle/>
+          <a:p>
+            <a:pPr algn="ctr">
+              <a:lnSpc>
+                <a:spcPts val="3779"/>
+              </a:lnSpc>
+            </a:pPr>
+            <a:r>
+              <a:rPr lang="en-US" b="true" sz="2700">
+                <a:solidFill>
+                  <a:srgbClr val="2F0D8D"/>
+                </a:solidFill>
+                <a:latin typeface="Helvetica World Bold"/>
+                <a:ea typeface="Helvetica World Bold"/>
+                <a:cs typeface="Helvetica World Bold"/>
+                <a:sym typeface="Helvetica World Bold"/>
+              </a:rPr>
+              <a:t>Existing solutions and their limitations</a:t>
+            </a:r>
+          </a:p>
+        </p:txBody>
+      </p:sp>
+      <p:sp>
+        <p:nvSpPr>
+          <p:cNvPr name="TextBox 13" id="13"/>
+          <p:cNvSpPr txBox="true"/>
+          <p:nvPr/>
+        </p:nvSpPr>
+        <p:spPr>
+          <a:xfrm rot="0">
+            <a:off x="13346571" y="4203686"/>
+            <a:ext cx="3573102" cy="1163319"/>
+          </a:xfrm>
+          <a:prstGeom prst="rect">
+            <a:avLst/>
+          </a:prstGeom>
+        </p:spPr>
+        <p:txBody>
+          <a:bodyPr anchor="t" rtlCol="false" tIns="0" lIns="0" bIns="0" rIns="0">
+            <a:spAutoFit/>
+          </a:bodyPr>
+          <a:lstStyle/>
+          <a:p>
+            <a:pPr algn="ctr">
+              <a:lnSpc>
+                <a:spcPts val="3080"/>
+              </a:lnSpc>
+            </a:pPr>
+            <a:r>
+              <a:rPr lang="en-US" sz="2200">
+                <a:solidFill>
+                  <a:srgbClr val="000000"/>
+                </a:solidFill>
+                <a:latin typeface="Helvetica World"/>
+                <a:ea typeface="Helvetica World"/>
+                <a:cs typeface="Helvetica World"/>
+                <a:sym typeface="Helvetica World"/>
+              </a:rPr>
+              <a:t>List existence solutions and their limitations</a:t>
+            </a:r>
+          </a:p>
+          <a:p>
+            <a:pPr algn="ctr">
+              <a:lnSpc>
+                <a:spcPts val="3080"/>
+              </a:lnSpc>
+            </a:pPr>
+          </a:p>
+        </p:txBody>
+      </p:sp>
+      <p:sp>
+        <p:nvSpPr>
+          <p:cNvPr name="Freeform 14" id="14"/>
+          <p:cNvSpPr/>
+          <p:nvPr/>
+        </p:nvSpPr>
+        <p:spPr>
+          <a:xfrm flipH="false" flipV="false" rot="0">
+            <a:off x="5313446" y="3436538"/>
+            <a:ext cx="285500" cy="285500"/>
+          </a:xfrm>
+          <a:custGeom>
+            <a:avLst/>
+            <a:gdLst/>
+            <a:ahLst/>
+            <a:cxnLst/>
+            <a:rect r="r" b="b" t="t" l="l"/>
+            <a:pathLst>
+              <a:path h="285500" w="285500">
+                <a:moveTo>
+                  <a:pt x="0" y="0"/>
+                </a:moveTo>
+                <a:lnTo>
+                  <a:pt x="285500" y="0"/>
+                </a:lnTo>
+                <a:lnTo>
+                  <a:pt x="285500" y="285500"/>
+                </a:lnTo>
+                <a:lnTo>
+                  <a:pt x="0" y="285500"/>
+                </a:lnTo>
+                <a:lnTo>
+                  <a:pt x="0" y="0"/>
+                </a:lnTo>
+                <a:close/>
+              </a:path>
+            </a:pathLst>
+          </a:custGeom>
+          <a:blipFill>
+            <a:blip r:embed="rId6">
+              <a:extLst>
+                <a:ext uri="{96DAC541-7B7A-43D3-8B79-37D633B846F1}">
+                  <asvg:svgBlip xmlns:asvg="http://schemas.microsoft.com/office/drawing/2016/SVG/main" r:embed="rId7"/>
+                </a:ext>
+              </a:extLst>
+            </a:blip>
+            <a:stretch>
+              <a:fillRect l="0" t="0" r="0" b="0"/>
+            </a:stretch>
+          </a:blipFill>
+        </p:spPr>
+      </p:sp>
+      <p:sp>
+        <p:nvSpPr>
+          <p:cNvPr name="Freeform 15" id="15"/>
+          <p:cNvSpPr/>
+          <p:nvPr/>
+        </p:nvSpPr>
+        <p:spPr>
+          <a:xfrm flipH="false" flipV="false" rot="0">
+            <a:off x="10971985" y="3436538"/>
+            <a:ext cx="285500" cy="285500"/>
+          </a:xfrm>
+          <a:custGeom>
+            <a:avLst/>
+            <a:gdLst/>
+            <a:ahLst/>
+            <a:cxnLst/>
+            <a:rect r="r" b="b" t="t" l="l"/>
+            <a:pathLst>
+              <a:path h="285500" w="285500">
+                <a:moveTo>
+                  <a:pt x="0" y="0"/>
+                </a:moveTo>
+                <a:lnTo>
+                  <a:pt x="285500" y="0"/>
+                </a:lnTo>
+                <a:lnTo>
+                  <a:pt x="285500" y="285500"/>
+                </a:lnTo>
+                <a:lnTo>
+                  <a:pt x="0" y="285500"/>
+                </a:lnTo>
+                <a:lnTo>
+                  <a:pt x="0" y="0"/>
+                </a:lnTo>
+                <a:close/>
+              </a:path>
+            </a:pathLst>
+          </a:custGeom>
+          <a:blipFill>
+            <a:blip r:embed="rId6">
+              <a:extLst>
+                <a:ext uri="{96DAC541-7B7A-43D3-8B79-37D633B846F1}">
+                  <asvg:svgBlip xmlns:asvg="http://schemas.microsoft.com/office/drawing/2016/SVG/main" r:embed="rId7"/>
+                </a:ext>
+              </a:extLst>
+            </a:blip>
+            <a:stretch>
+              <a:fillRect l="0" t="0" r="0" b="0"/>
+            </a:stretch>
+          </a:blipFill>
+        </p:spPr>
+      </p:sp>
+      <p:sp>
+        <p:nvSpPr>
+          <p:cNvPr name="AutoShape 16" id="16"/>
+          <p:cNvSpPr/>
+          <p:nvPr/>
+        </p:nvSpPr>
+        <p:spPr>
+          <a:xfrm>
+            <a:off x="12728375" y="3575071"/>
+            <a:ext cx="4768592" cy="4217"/>
+          </a:xfrm>
+          <a:prstGeom prst="line">
+            <a:avLst/>
+          </a:prstGeom>
+          <a:ln cap="flat" w="28575">
+            <a:solidFill>
+              <a:srgbClr val="CABAE7"/>
+            </a:solidFill>
+            <a:prstDash val="solid"/>
+            <a:headEnd type="none" len="sm" w="sm"/>
+            <a:tailEnd type="none" len="sm" w="sm"/>
+          </a:ln>
+        </p:spPr>
+      </p:sp>
+      <p:sp>
+        <p:nvSpPr>
+          <p:cNvPr name="AutoShape 17" id="17"/>
+          <p:cNvSpPr/>
+          <p:nvPr/>
+        </p:nvSpPr>
+        <p:spPr>
+          <a:xfrm>
+            <a:off x="1411297" y="3575071"/>
+            <a:ext cx="4044899" cy="0"/>
+          </a:xfrm>
+          <a:prstGeom prst="line">
+            <a:avLst/>
+          </a:prstGeom>
+          <a:ln cap="flat" w="28575">
+            <a:solidFill>
+              <a:srgbClr val="CABAE7"/>
+            </a:solidFill>
+            <a:prstDash val="solid"/>
+            <a:headEnd type="none" len="sm" w="sm"/>
+            <a:tailEnd type="none" len="sm" w="sm"/>
+          </a:ln>
+        </p:spPr>
+      </p:sp>
+      <p:grpSp>
+        <p:nvGrpSpPr>
+          <p:cNvPr name="Group 18" id="18"/>
+          <p:cNvGrpSpPr/>
+          <p:nvPr/>
+        </p:nvGrpSpPr>
+        <p:grpSpPr>
+          <a:xfrm rot="5400000">
+            <a:off x="894069" y="3006023"/>
+            <a:ext cx="1034456" cy="112075"/>
+            <a:chOff x="0" y="0"/>
+            <a:chExt cx="272449" cy="29518"/>
+          </a:xfrm>
+        </p:grpSpPr>
+        <p:sp>
+          <p:nvSpPr>
+            <p:cNvPr name="Freeform 19" id="19"/>
+            <p:cNvSpPr/>
+            <p:nvPr/>
+          </p:nvSpPr>
+          <p:spPr>
+            <a:xfrm flipH="false" flipV="false" rot="0">
+              <a:off x="0" y="0"/>
+              <a:ext cx="272449" cy="29518"/>
+            </a:xfrm>
+            <a:custGeom>
+              <a:avLst/>
+              <a:gdLst/>
+              <a:ahLst/>
+              <a:cxnLst/>
+              <a:rect r="r" b="b" t="t" l="l"/>
+              <a:pathLst>
+                <a:path h="29518" w="272449">
+                  <a:moveTo>
+                    <a:pt x="14759" y="0"/>
+                  </a:moveTo>
+                  <a:lnTo>
+                    <a:pt x="257690" y="0"/>
+                  </a:lnTo>
+                  <a:cubicBezTo>
+                    <a:pt x="261605" y="0"/>
+                    <a:pt x="265359" y="1555"/>
+                    <a:pt x="268127" y="4323"/>
+                  </a:cubicBezTo>
+                  <a:cubicBezTo>
+                    <a:pt x="270894" y="7091"/>
+                    <a:pt x="272449" y="10845"/>
+                    <a:pt x="272449" y="14759"/>
+                  </a:cubicBezTo>
+                  <a:lnTo>
+                    <a:pt x="272449" y="14759"/>
+                  </a:lnTo>
+                  <a:cubicBezTo>
+                    <a:pt x="272449" y="18673"/>
+                    <a:pt x="270894" y="22427"/>
+                    <a:pt x="268127" y="25195"/>
+                  </a:cubicBezTo>
+                  <a:cubicBezTo>
+                    <a:pt x="265359" y="27963"/>
+                    <a:pt x="261605" y="29518"/>
+                    <a:pt x="257690" y="29518"/>
+                  </a:cubicBezTo>
+                  <a:lnTo>
+                    <a:pt x="14759" y="29518"/>
+                  </a:lnTo>
+                  <a:cubicBezTo>
+                    <a:pt x="10845" y="29518"/>
+                    <a:pt x="7091" y="27963"/>
+                    <a:pt x="4323" y="25195"/>
+                  </a:cubicBezTo>
+                  <a:cubicBezTo>
+                    <a:pt x="1555" y="22427"/>
+                    <a:pt x="0" y="18673"/>
+                    <a:pt x="0" y="14759"/>
+                  </a:cubicBezTo>
+                  <a:lnTo>
+                    <a:pt x="0" y="14759"/>
+                  </a:lnTo>
+                  <a:cubicBezTo>
+                    <a:pt x="0" y="10845"/>
+                    <a:pt x="1555" y="7091"/>
+                    <a:pt x="4323" y="4323"/>
+                  </a:cubicBezTo>
+                  <a:cubicBezTo>
+                    <a:pt x="7091" y="1555"/>
+                    <a:pt x="10845" y="0"/>
+                    <a:pt x="14759" y="0"/>
+                  </a:cubicBezTo>
+                  <a:close/>
+                </a:path>
+              </a:pathLst>
+            </a:custGeom>
+            <a:solidFill>
+              <a:srgbClr val="6E2AF5"/>
+            </a:solidFill>
+          </p:spPr>
+        </p:sp>
+        <p:sp>
+          <p:nvSpPr>
+            <p:cNvPr name="TextBox 20" id="20"/>
+            <p:cNvSpPr txBox="true"/>
+            <p:nvPr/>
+          </p:nvSpPr>
+          <p:spPr>
+            <a:xfrm>
+              <a:off x="0" y="-57150"/>
+              <a:ext cx="272449" cy="86668"/>
+            </a:xfrm>
+            <a:prstGeom prst="rect">
+              <a:avLst/>
+            </a:prstGeom>
+          </p:spPr>
+          <p:txBody>
+            <a:bodyPr anchor="ctr" rtlCol="false" tIns="50800" lIns="50800" bIns="50800" rIns="50800"/>
+            <a:lstStyle/>
+            <a:p>
+              <a:pPr algn="ctr">
+                <a:lnSpc>
+                  <a:spcPts val="3122"/>
+                </a:lnSpc>
+              </a:pPr>
+            </a:p>
+          </p:txBody>
+        </p:sp>
+      </p:grpSp>
+      <p:sp>
+        <p:nvSpPr>
+          <p:cNvPr name="AutoShape 21" id="21"/>
+          <p:cNvSpPr/>
+          <p:nvPr/>
+        </p:nvSpPr>
+        <p:spPr>
+          <a:xfrm>
+            <a:off x="7069836" y="3575071"/>
+            <a:ext cx="4044899" cy="0"/>
+          </a:xfrm>
+          <a:prstGeom prst="line">
+            <a:avLst/>
+          </a:prstGeom>
+          <a:ln cap="flat" w="28575">
+            <a:solidFill>
+              <a:srgbClr val="CABAE7"/>
+            </a:solidFill>
+            <a:prstDash val="solid"/>
+            <a:headEnd type="none" len="sm" w="sm"/>
+            <a:tailEnd type="none" len="sm" w="sm"/>
+          </a:ln>
+        </p:spPr>
+      </p:sp>
+      <p:grpSp>
+        <p:nvGrpSpPr>
+          <p:cNvPr name="Group 22" id="22"/>
+          <p:cNvGrpSpPr/>
+          <p:nvPr/>
+        </p:nvGrpSpPr>
+        <p:grpSpPr>
+          <a:xfrm rot="5400000">
+            <a:off x="6549109" y="3002524"/>
+            <a:ext cx="1034456" cy="119073"/>
+            <a:chOff x="0" y="0"/>
+            <a:chExt cx="272449" cy="31361"/>
+          </a:xfrm>
+        </p:grpSpPr>
+        <p:sp>
+          <p:nvSpPr>
+            <p:cNvPr name="Freeform 23" id="23"/>
+            <p:cNvSpPr/>
+            <p:nvPr/>
+          </p:nvSpPr>
+          <p:spPr>
+            <a:xfrm flipH="false" flipV="false" rot="0">
+              <a:off x="0" y="0"/>
+              <a:ext cx="272449" cy="31361"/>
+            </a:xfrm>
+            <a:custGeom>
+              <a:avLst/>
+              <a:gdLst/>
+              <a:ahLst/>
+              <a:cxnLst/>
+              <a:rect r="r" b="b" t="t" l="l"/>
+              <a:pathLst>
+                <a:path h="31361" w="272449">
+                  <a:moveTo>
+                    <a:pt x="15680" y="0"/>
+                  </a:moveTo>
+                  <a:lnTo>
+                    <a:pt x="256769" y="0"/>
+                  </a:lnTo>
+                  <a:cubicBezTo>
+                    <a:pt x="260928" y="0"/>
+                    <a:pt x="264916" y="1652"/>
+                    <a:pt x="267857" y="4593"/>
+                  </a:cubicBezTo>
+                  <a:cubicBezTo>
+                    <a:pt x="270797" y="7533"/>
+                    <a:pt x="272449" y="11522"/>
+                    <a:pt x="272449" y="15680"/>
+                  </a:cubicBezTo>
+                  <a:lnTo>
+                    <a:pt x="272449" y="15680"/>
+                  </a:lnTo>
+                  <a:cubicBezTo>
+                    <a:pt x="272449" y="19839"/>
+                    <a:pt x="270797" y="23827"/>
+                    <a:pt x="267857" y="26768"/>
+                  </a:cubicBezTo>
+                  <a:cubicBezTo>
+                    <a:pt x="264916" y="29709"/>
+                    <a:pt x="260928" y="31361"/>
+                    <a:pt x="256769" y="31361"/>
+                  </a:cubicBezTo>
+                  <a:lnTo>
+                    <a:pt x="15680" y="31361"/>
+                  </a:lnTo>
+                  <a:cubicBezTo>
+                    <a:pt x="11522" y="31361"/>
+                    <a:pt x="7533" y="29709"/>
+                    <a:pt x="4593" y="26768"/>
+                  </a:cubicBezTo>
+                  <a:cubicBezTo>
+                    <a:pt x="1652" y="23827"/>
+                    <a:pt x="0" y="19839"/>
+                    <a:pt x="0" y="15680"/>
+                  </a:cubicBezTo>
+                  <a:lnTo>
+                    <a:pt x="0" y="15680"/>
+                  </a:lnTo>
+                  <a:cubicBezTo>
+                    <a:pt x="0" y="11522"/>
+                    <a:pt x="1652" y="7533"/>
+                    <a:pt x="4593" y="4593"/>
+                  </a:cubicBezTo>
+                  <a:cubicBezTo>
+                    <a:pt x="7533" y="1652"/>
+                    <a:pt x="11522" y="0"/>
+                    <a:pt x="15680" y="0"/>
+                  </a:cubicBezTo>
+                  <a:close/>
+                </a:path>
+              </a:pathLst>
+            </a:custGeom>
+            <a:solidFill>
+              <a:srgbClr val="6E2AF5"/>
+            </a:solidFill>
+          </p:spPr>
+        </p:sp>
+        <p:sp>
+          <p:nvSpPr>
+            <p:cNvPr name="TextBox 24" id="24"/>
+            <p:cNvSpPr txBox="true"/>
+            <p:nvPr/>
+          </p:nvSpPr>
+          <p:spPr>
+            <a:xfrm>
+              <a:off x="0" y="-57150"/>
+              <a:ext cx="272449" cy="88511"/>
+            </a:xfrm>
+            <a:prstGeom prst="rect">
+              <a:avLst/>
+            </a:prstGeom>
+          </p:spPr>
+          <p:txBody>
+            <a:bodyPr anchor="ctr" rtlCol="false" tIns="50800" lIns="50800" bIns="50800" rIns="50800"/>
+            <a:lstStyle/>
+            <a:p>
+              <a:pPr algn="ctr">
+                <a:lnSpc>
+                  <a:spcPts val="3122"/>
+                </a:lnSpc>
+              </a:pPr>
+            </a:p>
+          </p:txBody>
+        </p:sp>
+      </p:grpSp>
+      <p:grpSp>
+        <p:nvGrpSpPr>
+          <p:cNvPr name="Group 25" id="25"/>
+          <p:cNvGrpSpPr/>
+          <p:nvPr/>
+        </p:nvGrpSpPr>
+        <p:grpSpPr>
+          <a:xfrm rot="5400000">
+            <a:off x="12215782" y="3001388"/>
+            <a:ext cx="1034456" cy="121345"/>
+            <a:chOff x="0" y="0"/>
+            <a:chExt cx="272449" cy="31959"/>
+          </a:xfrm>
+        </p:grpSpPr>
+        <p:sp>
+          <p:nvSpPr>
+            <p:cNvPr name="Freeform 26" id="26"/>
+            <p:cNvSpPr/>
+            <p:nvPr/>
+          </p:nvSpPr>
+          <p:spPr>
+            <a:xfrm flipH="false" flipV="false" rot="0">
+              <a:off x="0" y="0"/>
+              <a:ext cx="272449" cy="31959"/>
+            </a:xfrm>
+            <a:custGeom>
+              <a:avLst/>
+              <a:gdLst/>
+              <a:ahLst/>
+              <a:cxnLst/>
+              <a:rect r="r" b="b" t="t" l="l"/>
+              <a:pathLst>
+                <a:path h="31959" w="272449">
+                  <a:moveTo>
+                    <a:pt x="15980" y="0"/>
+                  </a:moveTo>
+                  <a:lnTo>
+                    <a:pt x="256470" y="0"/>
+                  </a:lnTo>
+                  <a:cubicBezTo>
+                    <a:pt x="260708" y="0"/>
+                    <a:pt x="264772" y="1684"/>
+                    <a:pt x="267769" y="4680"/>
+                  </a:cubicBezTo>
+                  <a:cubicBezTo>
+                    <a:pt x="270766" y="7677"/>
+                    <a:pt x="272449" y="11742"/>
+                    <a:pt x="272449" y="15980"/>
+                  </a:cubicBezTo>
+                  <a:lnTo>
+                    <a:pt x="272449" y="15980"/>
+                  </a:lnTo>
+                  <a:cubicBezTo>
+                    <a:pt x="272449" y="24805"/>
+                    <a:pt x="265295" y="31959"/>
+                    <a:pt x="256470" y="31959"/>
+                  </a:cubicBezTo>
+                  <a:lnTo>
+                    <a:pt x="15980" y="31959"/>
+                  </a:lnTo>
+                  <a:cubicBezTo>
+                    <a:pt x="7154" y="31959"/>
+                    <a:pt x="0" y="24805"/>
+                    <a:pt x="0" y="15980"/>
+                  </a:cubicBezTo>
+                  <a:lnTo>
+                    <a:pt x="0" y="15980"/>
+                  </a:lnTo>
+                  <a:cubicBezTo>
+                    <a:pt x="0" y="7154"/>
+                    <a:pt x="7154" y="0"/>
+                    <a:pt x="15980" y="0"/>
+                  </a:cubicBezTo>
+                  <a:close/>
+                </a:path>
+              </a:pathLst>
+            </a:custGeom>
+            <a:solidFill>
+              <a:srgbClr val="6E2AF5"/>
+            </a:solidFill>
+          </p:spPr>
+        </p:sp>
+        <p:sp>
+          <p:nvSpPr>
+            <p:cNvPr name="TextBox 27" id="27"/>
+            <p:cNvSpPr txBox="true"/>
+            <p:nvPr/>
+          </p:nvSpPr>
+          <p:spPr>
+            <a:xfrm>
+              <a:off x="0" y="-57150"/>
+              <a:ext cx="272449" cy="89109"/>
+            </a:xfrm>
+            <a:prstGeom prst="rect">
+              <a:avLst/>
+            </a:prstGeom>
+          </p:spPr>
+          <p:txBody>
+            <a:bodyPr anchor="ctr" rtlCol="false" tIns="50800" lIns="50800" bIns="50800" rIns="50800"/>
+            <a:lstStyle/>
+            <a:p>
+              <a:pPr algn="ctr">
+                <a:lnSpc>
+                  <a:spcPts val="3122"/>
+                </a:lnSpc>
+              </a:pPr>
+            </a:p>
+          </p:txBody>
+        </p:sp>
+      </p:grpSp>
+      <p:sp>
+        <p:nvSpPr>
+          <p:cNvPr name="TextBox 28" id="28"/>
+          <p:cNvSpPr txBox="true"/>
+          <p:nvPr/>
+        </p:nvSpPr>
+        <p:spPr>
+          <a:xfrm rot="0">
+            <a:off x="1845052" y="2709807"/>
+            <a:ext cx="3264102" cy="503786"/>
+          </a:xfrm>
+          <a:prstGeom prst="rect">
+            <a:avLst/>
+          </a:prstGeom>
+        </p:spPr>
+        <p:txBody>
+          <a:bodyPr anchor="t" rtlCol="false" tIns="0" lIns="0" bIns="0" rIns="0">
+            <a:spAutoFit/>
+          </a:bodyPr>
+          <a:lstStyle/>
+          <a:p>
+            <a:pPr algn="ctr">
+              <a:lnSpc>
+                <a:spcPts val="3779"/>
+              </a:lnSpc>
+            </a:pPr>
+            <a:r>
+              <a:rPr lang="en-US" b="true" sz="2700">
+                <a:solidFill>
+                  <a:srgbClr val="2F0D8D"/>
+                </a:solidFill>
+                <a:latin typeface="Helvetica World Bold"/>
+                <a:ea typeface="Helvetica World Bold"/>
+                <a:cs typeface="Helvetica World Bold"/>
+                <a:sym typeface="Helvetica World Bold"/>
+              </a:rPr>
+              <a:t>Problem Statement</a:t>
+            </a:r>
+          </a:p>
+        </p:txBody>
+      </p:sp>
+      <p:sp>
+        <p:nvSpPr>
+          <p:cNvPr name="TextBox 29" id="29"/>
+          <p:cNvSpPr txBox="true"/>
+          <p:nvPr/>
+        </p:nvSpPr>
+        <p:spPr>
+          <a:xfrm rot="0">
+            <a:off x="1476605" y="4127486"/>
+            <a:ext cx="4000996" cy="382283"/>
+          </a:xfrm>
+          <a:prstGeom prst="rect">
+            <a:avLst/>
+          </a:prstGeom>
+        </p:spPr>
+        <p:txBody>
+          <a:bodyPr anchor="t" rtlCol="false" tIns="0" lIns="0" bIns="0" rIns="0">
+            <a:spAutoFit/>
+          </a:bodyPr>
+          <a:lstStyle/>
+          <a:p>
+            <a:pPr algn="ctr">
+              <a:lnSpc>
+                <a:spcPts val="3080"/>
+              </a:lnSpc>
+            </a:pPr>
+            <a:r>
+              <a:rPr lang="en-US" sz="2200">
+                <a:solidFill>
+                  <a:srgbClr val="000000"/>
+                </a:solidFill>
+                <a:latin typeface="Helvetica World"/>
+                <a:ea typeface="Helvetica World"/>
+                <a:cs typeface="Helvetica World"/>
+                <a:sym typeface="Helvetica World"/>
+              </a:rPr>
+              <a:t>Explain Your  Problem Statement</a:t>
+            </a:r>
+          </a:p>
+        </p:txBody>
+      </p:sp>
+      <p:sp>
+        <p:nvSpPr>
+          <p:cNvPr name="TextBox 30" id="30"/>
+          <p:cNvSpPr txBox="true"/>
+          <p:nvPr/>
+        </p:nvSpPr>
+        <p:spPr>
+          <a:xfrm rot="0">
+            <a:off x="7267053" y="2741823"/>
+            <a:ext cx="3753894" cy="503786"/>
+          </a:xfrm>
+          <a:prstGeom prst="rect">
+            <a:avLst/>
+          </a:prstGeom>
+        </p:spPr>
+        <p:txBody>
+          <a:bodyPr anchor="t" rtlCol="false" tIns="0" lIns="0" bIns="0" rIns="0">
+            <a:spAutoFit/>
+          </a:bodyPr>
+          <a:lstStyle/>
+          <a:p>
+            <a:pPr algn="ctr">
+              <a:lnSpc>
+                <a:spcPts val="3779"/>
+              </a:lnSpc>
+            </a:pPr>
+            <a:r>
+              <a:rPr lang="en-US" b="true" sz="2700">
+                <a:solidFill>
+                  <a:srgbClr val="2F0D8D"/>
+                </a:solidFill>
+                <a:latin typeface="Helvetica World Bold"/>
+                <a:ea typeface="Helvetica World Bold"/>
+                <a:cs typeface="Helvetica World Bold"/>
+                <a:sym typeface="Helvetica World Bold"/>
+              </a:rPr>
+              <a:t>Need and Background</a:t>
+            </a:r>
+          </a:p>
+        </p:txBody>
+      </p:sp>
+      <p:sp>
+        <p:nvSpPr>
+          <p:cNvPr name="TextBox 31" id="31"/>
+          <p:cNvSpPr txBox="true"/>
+          <p:nvPr/>
+        </p:nvSpPr>
+        <p:spPr>
+          <a:xfrm rot="0">
+            <a:off x="7265815" y="4137011"/>
+            <a:ext cx="3739654" cy="382269"/>
+          </a:xfrm>
+          <a:prstGeom prst="rect">
+            <a:avLst/>
+          </a:prstGeom>
+        </p:spPr>
+        <p:txBody>
+          <a:bodyPr anchor="t" rtlCol="false" tIns="0" lIns="0" bIns="0" rIns="0">
+            <a:spAutoFit/>
+          </a:bodyPr>
+          <a:lstStyle/>
+          <a:p>
+            <a:pPr algn="ctr">
+              <a:lnSpc>
+                <a:spcPts val="3080"/>
+              </a:lnSpc>
+            </a:pPr>
+            <a:r>
+              <a:rPr lang="en-US" sz="2200">
+                <a:solidFill>
+                  <a:srgbClr val="000000"/>
+                </a:solidFill>
+                <a:latin typeface="Helvetica World"/>
+                <a:ea typeface="Helvetica World"/>
+                <a:cs typeface="Helvetica World"/>
+                <a:sym typeface="Helvetica World"/>
+              </a:rPr>
+              <a:t>Explain Need and Background</a:t>
+            </a:r>
+          </a:p>
+        </p:txBody>
+      </p:sp>
+      <p:sp>
+        <p:nvSpPr>
+          <p:cNvPr name="TextBox 32" id="32"/>
+          <p:cNvSpPr txBox="true"/>
+          <p:nvPr/>
+        </p:nvSpPr>
+        <p:spPr>
+          <a:xfrm rot="0">
+            <a:off x="13346571" y="4203686"/>
+            <a:ext cx="3573102" cy="1163319"/>
+          </a:xfrm>
+          <a:prstGeom prst="rect">
+            <a:avLst/>
+          </a:prstGeom>
+        </p:spPr>
+        <p:txBody>
+          <a:bodyPr anchor="t" rtlCol="false" tIns="0" lIns="0" bIns="0" rIns="0">
+            <a:spAutoFit/>
+          </a:bodyPr>
+          <a:lstStyle/>
+          <a:p>
+            <a:pPr algn="ctr">
+              <a:lnSpc>
+                <a:spcPts val="3080"/>
+              </a:lnSpc>
+            </a:pPr>
+            <a:r>
+              <a:rPr lang="en-US" sz="2200">
+                <a:solidFill>
+                  <a:srgbClr val="000000"/>
+                </a:solidFill>
+                <a:latin typeface="Helvetica World"/>
+                <a:ea typeface="Helvetica World"/>
+                <a:cs typeface="Helvetica World"/>
+                <a:sym typeface="Helvetica World"/>
+              </a:rPr>
+              <a:t>List existence solutions and their limitations</a:t>
+            </a:r>
+          </a:p>
+          <a:p>
+            <a:pPr algn="ctr">
+              <a:lnSpc>
+                <a:spcPts val="3080"/>
+              </a:lnSpc>
+            </a:pPr>
+          </a:p>
+        </p:txBody>
+      </p:sp>
+      <p:sp>
+        <p:nvSpPr>
+          <p:cNvPr name="Freeform 33" id="33"/>
+          <p:cNvSpPr/>
+          <p:nvPr/>
+        </p:nvSpPr>
+        <p:spPr>
+          <a:xfrm flipH="false" flipV="false" rot="0">
+            <a:off x="17354217" y="3432321"/>
+            <a:ext cx="285500" cy="285500"/>
+          </a:xfrm>
+          <a:custGeom>
+            <a:avLst/>
+            <a:gdLst/>
+            <a:ahLst/>
+            <a:cxnLst/>
+            <a:rect r="r" b="b" t="t" l="l"/>
+            <a:pathLst>
+              <a:path h="285500" w="285500">
+                <a:moveTo>
+                  <a:pt x="0" y="0"/>
+                </a:moveTo>
+                <a:lnTo>
+                  <a:pt x="285500" y="0"/>
+                </a:lnTo>
+                <a:lnTo>
+                  <a:pt x="285500" y="285500"/>
+                </a:lnTo>
+                <a:lnTo>
+                  <a:pt x="0" y="285500"/>
+                </a:lnTo>
+                <a:lnTo>
+                  <a:pt x="0" y="0"/>
+                </a:lnTo>
+                <a:close/>
+              </a:path>
+            </a:pathLst>
+          </a:custGeom>
+          <a:blipFill>
+            <a:blip r:embed="rId6">
+              <a:extLst>
+                <a:ext uri="{96DAC541-7B7A-43D3-8B79-37D633B846F1}">
+                  <asvg:svgBlip xmlns:asvg="http://schemas.microsoft.com/office/drawing/2016/SVG/main" r:embed="rId7"/>
+                </a:ext>
+              </a:extLst>
+            </a:blip>
+            <a:stretch>
+              <a:fillRect l="0" t="0" r="0" b="0"/>
+            </a:stretch>
+          </a:blipFill>
+        </p:spPr>
+      </p:sp>
+    </p:spTree>
+  </p:cSld>
+  <p:clrMapOvr>
+    <a:masterClrMapping/>
+  </p:clrMapOvr>
+</p:sld>
+</file>
+
+<file path=ppt/slides/slide3.xml><?xml version="1.0" encoding="utf-8"?>
+<p:sld xmlns:p="http://schemas.openxmlformats.org/presentationml/2006/main" xmlns:a="http://schemas.openxmlformats.org/drawingml/2006/main" xmlns:r="http://schemas.openxmlformats.org/officeDocument/2006/relationships">
+  <p:cSld>
+    <p:bg>
+      <p:bgPr>
+        <a:solidFill>
+          <a:srgbClr val="F7F7FD"/>
+        </a:solidFill>
+      </p:bgPr>
+    </p:bg>
+    <p:spTree>
+      <p:nvGrpSpPr>
+        <p:cNvPr id="1" name=""/>
+        <p:cNvGrpSpPr/>
+        <p:nvPr/>
+      </p:nvGrpSpPr>
+      <p:grpSpPr>
+        <a:xfrm>
+          <a:off x="0" y="0"/>
+          <a:ext cx="0" cy="0"/>
+          <a:chOff x="0" y="0"/>
+          <a:chExt cx="0" cy="0"/>
+        </a:xfrm>
+      </p:grpSpPr>
+      <p:sp>
+        <p:nvSpPr>
+          <p:cNvPr name="Freeform 2" id="2"/>
+          <p:cNvSpPr/>
+          <p:nvPr/>
+        </p:nvSpPr>
+        <p:spPr>
+          <a:xfrm flipH="false" flipV="false" rot="0">
+            <a:off x="-393678" y="-11430"/>
+            <a:ext cx="18681678" cy="10531796"/>
+          </a:xfrm>
+          <a:custGeom>
+            <a:avLst/>
+            <a:gdLst/>
+            <a:ahLst/>
+            <a:cxnLst/>
+            <a:rect r="r" b="b" t="t" l="l"/>
+            <a:pathLst>
+              <a:path h="10531796" w="18681678">
+                <a:moveTo>
+                  <a:pt x="0" y="0"/>
+                </a:moveTo>
+                <a:lnTo>
+                  <a:pt x="18681678" y="0"/>
+                </a:lnTo>
+                <a:lnTo>
+                  <a:pt x="18681678" y="10531796"/>
+                </a:lnTo>
+                <a:lnTo>
+                  <a:pt x="0" y="10531796"/>
+                </a:lnTo>
+                <a:lnTo>
+                  <a:pt x="0" y="0"/>
+                </a:lnTo>
+                <a:close/>
+              </a:path>
+            </a:pathLst>
+          </a:custGeom>
+          <a:blipFill>
+            <a:blip r:embed="rId2"/>
+            <a:stretch>
+              <a:fillRect l="0" t="0" r="0" b="0"/>
+            </a:stretch>
+          </a:blipFill>
+        </p:spPr>
+      </p:sp>
+      <p:sp>
+        <p:nvSpPr>
+          <p:cNvPr name="TextBox 3" id="3"/>
+          <p:cNvSpPr txBox="true"/>
+          <p:nvPr/>
+        </p:nvSpPr>
+        <p:spPr>
+          <a:xfrm rot="0">
+            <a:off x="1355260" y="480122"/>
+            <a:ext cx="15678945" cy="781050"/>
+          </a:xfrm>
+          <a:prstGeom prst="rect">
+            <a:avLst/>
+          </a:prstGeom>
+        </p:spPr>
+        <p:txBody>
+          <a:bodyPr anchor="t" rtlCol="false" tIns="0" lIns="0" bIns="0" rIns="0">
+            <a:spAutoFit/>
+          </a:bodyPr>
+          <a:lstStyle/>
+          <a:p>
+            <a:pPr algn="l">
+              <a:lnSpc>
+                <a:spcPts val="6300"/>
+              </a:lnSpc>
+            </a:pPr>
+            <a:r>
+              <a:rPr lang="en-US" sz="4500">
+                <a:solidFill>
+                  <a:srgbClr val="632EC9"/>
+                </a:solidFill>
+                <a:latin typeface="League Spartan"/>
+                <a:ea typeface="League Spartan"/>
+                <a:cs typeface="League Spartan"/>
+                <a:sym typeface="League Spartan"/>
+              </a:rPr>
+              <a:t>Our Solution and it’s USP</a:t>
+            </a:r>
+          </a:p>
+        </p:txBody>
+      </p:sp>
+      <p:sp>
+        <p:nvSpPr>
+          <p:cNvPr name="Freeform 4" id="4"/>
+          <p:cNvSpPr/>
+          <p:nvPr/>
+        </p:nvSpPr>
+        <p:spPr>
+          <a:xfrm flipH="false" flipV="false" rot="0">
+            <a:off x="17034205" y="297395"/>
+            <a:ext cx="925524" cy="963762"/>
+          </a:xfrm>
+          <a:custGeom>
+            <a:avLst/>
+            <a:gdLst/>
+            <a:ahLst/>
+            <a:cxnLst/>
+            <a:rect r="r" b="b" t="t" l="l"/>
+            <a:pathLst>
+              <a:path h="963762" w="925524">
+                <a:moveTo>
+                  <a:pt x="0" y="0"/>
+                </a:moveTo>
+                <a:lnTo>
+                  <a:pt x="925524" y="0"/>
+                </a:lnTo>
+                <a:lnTo>
+                  <a:pt x="925524" y="963763"/>
+                </a:lnTo>
+                <a:lnTo>
+                  <a:pt x="0" y="963763"/>
+                </a:lnTo>
+                <a:lnTo>
+                  <a:pt x="0" y="0"/>
+                </a:lnTo>
+                <a:close/>
+              </a:path>
+            </a:pathLst>
+          </a:custGeom>
+          <a:blipFill>
+            <a:blip r:embed="rId3"/>
+            <a:stretch>
+              <a:fillRect l="-8247" t="-5733" r="-147202" b="0"/>
+            </a:stretch>
+          </a:blipFill>
+        </p:spPr>
+      </p:sp>
+      <p:grpSp>
+        <p:nvGrpSpPr>
+          <p:cNvPr name="Group 5" id="5"/>
+          <p:cNvGrpSpPr/>
+          <p:nvPr/>
+        </p:nvGrpSpPr>
+        <p:grpSpPr>
+          <a:xfrm rot="0">
+            <a:off x="1028661" y="1321157"/>
+            <a:ext cx="16903200" cy="672561"/>
+            <a:chOff x="0" y="0"/>
+            <a:chExt cx="22537600" cy="896747"/>
+          </a:xfrm>
+        </p:grpSpPr>
+        <p:sp>
+          <p:nvSpPr>
+            <p:cNvPr name="AutoShape 6" id="6"/>
+            <p:cNvSpPr/>
+            <p:nvPr/>
+          </p:nvSpPr>
+          <p:spPr>
+            <a:xfrm>
+              <a:off x="49" y="411875"/>
+              <a:ext cx="22290554" cy="42849"/>
             </a:xfrm>
             <a:prstGeom prst="line">
               <a:avLst/>
             </a:prstGeom>
             <a:ln cap="flat" w="50800">
               <a:solidFill>
-                <a:srgbClr val="B58FFF"/>
+                <a:srgbClr val="6E2AF5"/>
               </a:solidFill>
               <a:prstDash val="solid"/>
               <a:headEnd type="none" len="sm" w="sm"/>
@@ -4941,21 +6842,1154 @@
         </p:sp>
         <p:sp>
           <p:nvSpPr>
-            <p:cNvPr name="AutoShape 50" id="50"/>
+            <p:cNvPr name="Freeform 7" id="7"/>
             <p:cNvSpPr/>
             <p:nvPr/>
           </p:nvSpPr>
           <p:spPr>
-            <a:xfrm flipV="true">
-              <a:off x="5575373" y="702921"/>
-              <a:ext cx="0" cy="1014340"/>
+            <a:xfrm flipH="false" flipV="false" rot="0">
+              <a:off x="21640852" y="0"/>
+              <a:ext cx="896747" cy="896747"/>
+            </a:xfrm>
+            <a:custGeom>
+              <a:avLst/>
+              <a:gdLst/>
+              <a:ahLst/>
+              <a:cxnLst/>
+              <a:rect r="r" b="b" t="t" l="l"/>
+              <a:pathLst>
+                <a:path h="896747" w="896747">
+                  <a:moveTo>
+                    <a:pt x="0" y="0"/>
+                  </a:moveTo>
+                  <a:lnTo>
+                    <a:pt x="896748" y="0"/>
+                  </a:lnTo>
+                  <a:lnTo>
+                    <a:pt x="896748" y="896747"/>
+                  </a:lnTo>
+                  <a:lnTo>
+                    <a:pt x="0" y="896747"/>
+                  </a:lnTo>
+                  <a:lnTo>
+                    <a:pt x="0" y="0"/>
+                  </a:lnTo>
+                  <a:close/>
+                </a:path>
+              </a:pathLst>
+            </a:custGeom>
+            <a:blipFill>
+              <a:blip r:embed="rId4">
+                <a:extLst>
+                  <a:ext uri="{96DAC541-7B7A-43D3-8B79-37D633B846F1}">
+                    <asvg:svgBlip xmlns:asvg="http://schemas.microsoft.com/office/drawing/2016/SVG/main" r:embed="rId5"/>
+                  </a:ext>
+                </a:extLst>
+              </a:blip>
+              <a:stretch>
+                <a:fillRect l="0" t="0" r="0" b="0"/>
+              </a:stretch>
+            </a:blipFill>
+          </p:spPr>
+        </p:sp>
+      </p:grpSp>
+      <p:sp>
+        <p:nvSpPr>
+          <p:cNvPr name="Freeform 8" id="8"/>
+          <p:cNvSpPr/>
+          <p:nvPr/>
+        </p:nvSpPr>
+        <p:spPr>
+          <a:xfrm flipH="false" flipV="false" rot="0">
+            <a:off x="14523772" y="5623701"/>
+            <a:ext cx="285500" cy="285500"/>
+          </a:xfrm>
+          <a:custGeom>
+            <a:avLst/>
+            <a:gdLst/>
+            <a:ahLst/>
+            <a:cxnLst/>
+            <a:rect r="r" b="b" t="t" l="l"/>
+            <a:pathLst>
+              <a:path h="285500" w="285500">
+                <a:moveTo>
+                  <a:pt x="0" y="0"/>
+                </a:moveTo>
+                <a:lnTo>
+                  <a:pt x="285500" y="0"/>
+                </a:lnTo>
+                <a:lnTo>
+                  <a:pt x="285500" y="285500"/>
+                </a:lnTo>
+                <a:lnTo>
+                  <a:pt x="0" y="285500"/>
+                </a:lnTo>
+                <a:lnTo>
+                  <a:pt x="0" y="0"/>
+                </a:lnTo>
+                <a:close/>
+              </a:path>
+            </a:pathLst>
+          </a:custGeom>
+          <a:blipFill>
+            <a:blip r:embed="rId6">
+              <a:extLst>
+                <a:ext uri="{96DAC541-7B7A-43D3-8B79-37D633B846F1}">
+                  <asvg:svgBlip xmlns:asvg="http://schemas.microsoft.com/office/drawing/2016/SVG/main" r:embed="rId7"/>
+                </a:ext>
+              </a:extLst>
+            </a:blip>
+            <a:stretch>
+              <a:fillRect l="0" t="0" r="0" b="0"/>
+            </a:stretch>
+          </a:blipFill>
+        </p:spPr>
+      </p:sp>
+      <p:sp>
+        <p:nvSpPr>
+          <p:cNvPr name="Freeform 9" id="9"/>
+          <p:cNvSpPr/>
+          <p:nvPr/>
+        </p:nvSpPr>
+        <p:spPr>
+          <a:xfrm flipH="false" flipV="false" rot="0">
+            <a:off x="10971985" y="3436538"/>
+            <a:ext cx="285500" cy="285500"/>
+          </a:xfrm>
+          <a:custGeom>
+            <a:avLst/>
+            <a:gdLst/>
+            <a:ahLst/>
+            <a:cxnLst/>
+            <a:rect r="r" b="b" t="t" l="l"/>
+            <a:pathLst>
+              <a:path h="285500" w="285500">
+                <a:moveTo>
+                  <a:pt x="0" y="0"/>
+                </a:moveTo>
+                <a:lnTo>
+                  <a:pt x="285500" y="0"/>
+                </a:lnTo>
+                <a:lnTo>
+                  <a:pt x="285500" y="285500"/>
+                </a:lnTo>
+                <a:lnTo>
+                  <a:pt x="0" y="285500"/>
+                </a:lnTo>
+                <a:lnTo>
+                  <a:pt x="0" y="0"/>
+                </a:lnTo>
+                <a:close/>
+              </a:path>
+            </a:pathLst>
+          </a:custGeom>
+          <a:blipFill>
+            <a:blip r:embed="rId6">
+              <a:extLst>
+                <a:ext uri="{96DAC541-7B7A-43D3-8B79-37D633B846F1}">
+                  <asvg:svgBlip xmlns:asvg="http://schemas.microsoft.com/office/drawing/2016/SVG/main" r:embed="rId7"/>
+                </a:ext>
+              </a:extLst>
+            </a:blip>
+            <a:stretch>
+              <a:fillRect l="0" t="0" r="0" b="0"/>
+            </a:stretch>
+          </a:blipFill>
+        </p:spPr>
+      </p:sp>
+      <p:sp>
+        <p:nvSpPr>
+          <p:cNvPr name="Freeform 10" id="10"/>
+          <p:cNvSpPr/>
+          <p:nvPr/>
+        </p:nvSpPr>
+        <p:spPr>
+          <a:xfrm flipH="false" flipV="false" rot="0">
+            <a:off x="17354217" y="3432321"/>
+            <a:ext cx="285500" cy="285500"/>
+          </a:xfrm>
+          <a:custGeom>
+            <a:avLst/>
+            <a:gdLst/>
+            <a:ahLst/>
+            <a:cxnLst/>
+            <a:rect r="r" b="b" t="t" l="l"/>
+            <a:pathLst>
+              <a:path h="285500" w="285500">
+                <a:moveTo>
+                  <a:pt x="0" y="0"/>
+                </a:moveTo>
+                <a:lnTo>
+                  <a:pt x="285500" y="0"/>
+                </a:lnTo>
+                <a:lnTo>
+                  <a:pt x="285500" y="285500"/>
+                </a:lnTo>
+                <a:lnTo>
+                  <a:pt x="0" y="285500"/>
+                </a:lnTo>
+                <a:lnTo>
+                  <a:pt x="0" y="0"/>
+                </a:lnTo>
+                <a:close/>
+              </a:path>
+            </a:pathLst>
+          </a:custGeom>
+          <a:blipFill>
+            <a:blip r:embed="rId6">
+              <a:extLst>
+                <a:ext uri="{96DAC541-7B7A-43D3-8B79-37D633B846F1}">
+                  <asvg:svgBlip xmlns:asvg="http://schemas.microsoft.com/office/drawing/2016/SVG/main" r:embed="rId7"/>
+                </a:ext>
+              </a:extLst>
+            </a:blip>
+            <a:stretch>
+              <a:fillRect l="0" t="0" r="0" b="0"/>
+            </a:stretch>
+          </a:blipFill>
+        </p:spPr>
+      </p:sp>
+      <p:sp>
+        <p:nvSpPr>
+          <p:cNvPr name="AutoShape 11" id="11"/>
+          <p:cNvSpPr/>
+          <p:nvPr/>
+        </p:nvSpPr>
+        <p:spPr>
+          <a:xfrm>
+            <a:off x="12728375" y="3575071"/>
+            <a:ext cx="4768592" cy="4217"/>
+          </a:xfrm>
+          <a:prstGeom prst="line">
+            <a:avLst/>
+          </a:prstGeom>
+          <a:ln cap="flat" w="28575">
+            <a:solidFill>
+              <a:srgbClr val="CABAE7"/>
+            </a:solidFill>
+            <a:prstDash val="solid"/>
+            <a:headEnd type="none" len="sm" w="sm"/>
+            <a:tailEnd type="none" len="sm" w="sm"/>
+          </a:ln>
+        </p:spPr>
+      </p:sp>
+      <p:grpSp>
+        <p:nvGrpSpPr>
+          <p:cNvPr name="Group 12" id="12"/>
+          <p:cNvGrpSpPr/>
+          <p:nvPr/>
+        </p:nvGrpSpPr>
+        <p:grpSpPr>
+          <a:xfrm rot="0">
+            <a:off x="1355260" y="2544832"/>
+            <a:ext cx="4243686" cy="1177206"/>
+            <a:chOff x="0" y="0"/>
+            <a:chExt cx="5658248" cy="1569608"/>
+          </a:xfrm>
+        </p:grpSpPr>
+        <p:sp>
+          <p:nvSpPr>
+            <p:cNvPr name="Freeform 13" id="13"/>
+            <p:cNvSpPr/>
+            <p:nvPr/>
+          </p:nvSpPr>
+          <p:spPr>
+            <a:xfrm flipH="false" flipV="false" rot="0">
+              <a:off x="5277582" y="1188941"/>
+              <a:ext cx="380667" cy="380667"/>
+            </a:xfrm>
+            <a:custGeom>
+              <a:avLst/>
+              <a:gdLst/>
+              <a:ahLst/>
+              <a:cxnLst/>
+              <a:rect r="r" b="b" t="t" l="l"/>
+              <a:pathLst>
+                <a:path h="380667" w="380667">
+                  <a:moveTo>
+                    <a:pt x="0" y="0"/>
+                  </a:moveTo>
+                  <a:lnTo>
+                    <a:pt x="380666" y="0"/>
+                  </a:lnTo>
+                  <a:lnTo>
+                    <a:pt x="380666" y="380667"/>
+                  </a:lnTo>
+                  <a:lnTo>
+                    <a:pt x="0" y="380667"/>
+                  </a:lnTo>
+                  <a:lnTo>
+                    <a:pt x="0" y="0"/>
+                  </a:lnTo>
+                  <a:close/>
+                </a:path>
+              </a:pathLst>
+            </a:custGeom>
+            <a:blipFill>
+              <a:blip r:embed="rId6">
+                <a:extLst>
+                  <a:ext uri="{96DAC541-7B7A-43D3-8B79-37D633B846F1}">
+                    <asvg:svgBlip xmlns:asvg="http://schemas.microsoft.com/office/drawing/2016/SVG/main" r:embed="rId7"/>
+                  </a:ext>
+                </a:extLst>
+              </a:blip>
+              <a:stretch>
+                <a:fillRect l="0" t="0" r="0" b="0"/>
+              </a:stretch>
+            </a:blipFill>
+          </p:spPr>
+        </p:sp>
+        <p:sp>
+          <p:nvSpPr>
+            <p:cNvPr name="AutoShape 14" id="14"/>
+            <p:cNvSpPr/>
+            <p:nvPr/>
+          </p:nvSpPr>
+          <p:spPr>
+            <a:xfrm>
+              <a:off x="74717" y="1373652"/>
+              <a:ext cx="5393198" cy="0"/>
+            </a:xfrm>
+            <a:prstGeom prst="line">
+              <a:avLst/>
+            </a:prstGeom>
+            <a:ln cap="flat" w="38100">
+              <a:solidFill>
+                <a:srgbClr val="CABAE7"/>
+              </a:solidFill>
+              <a:prstDash val="solid"/>
+              <a:headEnd type="none" len="sm" w="sm"/>
+              <a:tailEnd type="none" len="sm" w="sm"/>
+            </a:ln>
+          </p:spPr>
+        </p:sp>
+        <p:grpSp>
+          <p:nvGrpSpPr>
+            <p:cNvPr name="Group 15" id="15"/>
+            <p:cNvGrpSpPr/>
+            <p:nvPr/>
+          </p:nvGrpSpPr>
+          <p:grpSpPr>
+            <a:xfrm rot="5400000">
+              <a:off x="-614921" y="614921"/>
+              <a:ext cx="1379275" cy="149433"/>
+              <a:chOff x="0" y="0"/>
+              <a:chExt cx="272449" cy="29518"/>
+            </a:xfrm>
+          </p:grpSpPr>
+          <p:sp>
+            <p:nvSpPr>
+              <p:cNvPr name="Freeform 16" id="16"/>
+              <p:cNvSpPr/>
+              <p:nvPr/>
+            </p:nvSpPr>
+            <p:spPr>
+              <a:xfrm flipH="false" flipV="false" rot="0">
+                <a:off x="0" y="0"/>
+                <a:ext cx="272449" cy="29518"/>
+              </a:xfrm>
+              <a:custGeom>
+                <a:avLst/>
+                <a:gdLst/>
+                <a:ahLst/>
+                <a:cxnLst/>
+                <a:rect r="r" b="b" t="t" l="l"/>
+                <a:pathLst>
+                  <a:path h="29518" w="272449">
+                    <a:moveTo>
+                      <a:pt x="14759" y="0"/>
+                    </a:moveTo>
+                    <a:lnTo>
+                      <a:pt x="257690" y="0"/>
+                    </a:lnTo>
+                    <a:cubicBezTo>
+                      <a:pt x="261605" y="0"/>
+                      <a:pt x="265359" y="1555"/>
+                      <a:pt x="268127" y="4323"/>
+                    </a:cubicBezTo>
+                    <a:cubicBezTo>
+                      <a:pt x="270894" y="7091"/>
+                      <a:pt x="272449" y="10845"/>
+                      <a:pt x="272449" y="14759"/>
+                    </a:cubicBezTo>
+                    <a:lnTo>
+                      <a:pt x="272449" y="14759"/>
+                    </a:lnTo>
+                    <a:cubicBezTo>
+                      <a:pt x="272449" y="18673"/>
+                      <a:pt x="270894" y="22427"/>
+                      <a:pt x="268127" y="25195"/>
+                    </a:cubicBezTo>
+                    <a:cubicBezTo>
+                      <a:pt x="265359" y="27963"/>
+                      <a:pt x="261605" y="29518"/>
+                      <a:pt x="257690" y="29518"/>
+                    </a:cubicBezTo>
+                    <a:lnTo>
+                      <a:pt x="14759" y="29518"/>
+                    </a:lnTo>
+                    <a:cubicBezTo>
+                      <a:pt x="10845" y="29518"/>
+                      <a:pt x="7091" y="27963"/>
+                      <a:pt x="4323" y="25195"/>
+                    </a:cubicBezTo>
+                    <a:cubicBezTo>
+                      <a:pt x="1555" y="22427"/>
+                      <a:pt x="0" y="18673"/>
+                      <a:pt x="0" y="14759"/>
+                    </a:cubicBezTo>
+                    <a:lnTo>
+                      <a:pt x="0" y="14759"/>
+                    </a:lnTo>
+                    <a:cubicBezTo>
+                      <a:pt x="0" y="10845"/>
+                      <a:pt x="1555" y="7091"/>
+                      <a:pt x="4323" y="4323"/>
+                    </a:cubicBezTo>
+                    <a:cubicBezTo>
+                      <a:pt x="7091" y="1555"/>
+                      <a:pt x="10845" y="0"/>
+                      <a:pt x="14759" y="0"/>
+                    </a:cubicBezTo>
+                    <a:close/>
+                  </a:path>
+                </a:pathLst>
+              </a:custGeom>
+              <a:solidFill>
+                <a:srgbClr val="6E2AF5"/>
+              </a:solidFill>
+            </p:spPr>
+          </p:sp>
+          <p:sp>
+            <p:nvSpPr>
+              <p:cNvPr name="TextBox 17" id="17"/>
+              <p:cNvSpPr txBox="true"/>
+              <p:nvPr/>
+            </p:nvSpPr>
+            <p:spPr>
+              <a:xfrm>
+                <a:off x="0" y="-57150"/>
+                <a:ext cx="272449" cy="86668"/>
+              </a:xfrm>
+              <a:prstGeom prst="rect">
+                <a:avLst/>
+              </a:prstGeom>
+            </p:spPr>
+            <p:txBody>
+              <a:bodyPr anchor="ctr" rtlCol="false" tIns="50800" lIns="50800" bIns="50800" rIns="50800"/>
+              <a:lstStyle/>
+              <a:p>
+                <a:pPr algn="ctr">
+                  <a:lnSpc>
+                    <a:spcPts val="3122"/>
+                  </a:lnSpc>
+                </a:pPr>
+              </a:p>
+            </p:txBody>
+          </p:sp>
+        </p:grpSp>
+      </p:grpSp>
+      <p:sp>
+        <p:nvSpPr>
+          <p:cNvPr name="AutoShape 18" id="18"/>
+          <p:cNvSpPr/>
+          <p:nvPr/>
+        </p:nvSpPr>
+        <p:spPr>
+          <a:xfrm>
+            <a:off x="7069836" y="3575071"/>
+            <a:ext cx="4044899" cy="0"/>
+          </a:xfrm>
+          <a:prstGeom prst="line">
+            <a:avLst/>
+          </a:prstGeom>
+          <a:ln cap="flat" w="28575">
+            <a:solidFill>
+              <a:srgbClr val="CABAE7"/>
+            </a:solidFill>
+            <a:prstDash val="solid"/>
+            <a:headEnd type="none" len="sm" w="sm"/>
+            <a:tailEnd type="none" len="sm" w="sm"/>
+          </a:ln>
+        </p:spPr>
+      </p:sp>
+      <p:grpSp>
+        <p:nvGrpSpPr>
+          <p:cNvPr name="Group 19" id="19"/>
+          <p:cNvGrpSpPr/>
+          <p:nvPr/>
+        </p:nvGrpSpPr>
+        <p:grpSpPr>
+          <a:xfrm rot="5400000">
+            <a:off x="6549109" y="3002524"/>
+            <a:ext cx="1034456" cy="119073"/>
+            <a:chOff x="0" y="0"/>
+            <a:chExt cx="272449" cy="31361"/>
+          </a:xfrm>
+        </p:grpSpPr>
+        <p:sp>
+          <p:nvSpPr>
+            <p:cNvPr name="Freeform 20" id="20"/>
+            <p:cNvSpPr/>
+            <p:nvPr/>
+          </p:nvSpPr>
+          <p:spPr>
+            <a:xfrm flipH="false" flipV="false" rot="0">
+              <a:off x="0" y="0"/>
+              <a:ext cx="272449" cy="31361"/>
+            </a:xfrm>
+            <a:custGeom>
+              <a:avLst/>
+              <a:gdLst/>
+              <a:ahLst/>
+              <a:cxnLst/>
+              <a:rect r="r" b="b" t="t" l="l"/>
+              <a:pathLst>
+                <a:path h="31361" w="272449">
+                  <a:moveTo>
+                    <a:pt x="15680" y="0"/>
+                  </a:moveTo>
+                  <a:lnTo>
+                    <a:pt x="256769" y="0"/>
+                  </a:lnTo>
+                  <a:cubicBezTo>
+                    <a:pt x="260928" y="0"/>
+                    <a:pt x="264916" y="1652"/>
+                    <a:pt x="267857" y="4593"/>
+                  </a:cubicBezTo>
+                  <a:cubicBezTo>
+                    <a:pt x="270797" y="7533"/>
+                    <a:pt x="272449" y="11522"/>
+                    <a:pt x="272449" y="15680"/>
+                  </a:cubicBezTo>
+                  <a:lnTo>
+                    <a:pt x="272449" y="15680"/>
+                  </a:lnTo>
+                  <a:cubicBezTo>
+                    <a:pt x="272449" y="19839"/>
+                    <a:pt x="270797" y="23827"/>
+                    <a:pt x="267857" y="26768"/>
+                  </a:cubicBezTo>
+                  <a:cubicBezTo>
+                    <a:pt x="264916" y="29709"/>
+                    <a:pt x="260928" y="31361"/>
+                    <a:pt x="256769" y="31361"/>
+                  </a:cubicBezTo>
+                  <a:lnTo>
+                    <a:pt x="15680" y="31361"/>
+                  </a:lnTo>
+                  <a:cubicBezTo>
+                    <a:pt x="11522" y="31361"/>
+                    <a:pt x="7533" y="29709"/>
+                    <a:pt x="4593" y="26768"/>
+                  </a:cubicBezTo>
+                  <a:cubicBezTo>
+                    <a:pt x="1652" y="23827"/>
+                    <a:pt x="0" y="19839"/>
+                    <a:pt x="0" y="15680"/>
+                  </a:cubicBezTo>
+                  <a:lnTo>
+                    <a:pt x="0" y="15680"/>
+                  </a:lnTo>
+                  <a:cubicBezTo>
+                    <a:pt x="0" y="11522"/>
+                    <a:pt x="1652" y="7533"/>
+                    <a:pt x="4593" y="4593"/>
+                  </a:cubicBezTo>
+                  <a:cubicBezTo>
+                    <a:pt x="7533" y="1652"/>
+                    <a:pt x="11522" y="0"/>
+                    <a:pt x="15680" y="0"/>
+                  </a:cubicBezTo>
+                  <a:close/>
+                </a:path>
+              </a:pathLst>
+            </a:custGeom>
+            <a:solidFill>
+              <a:srgbClr val="6E2AF5"/>
+            </a:solidFill>
+          </p:spPr>
+        </p:sp>
+        <p:sp>
+          <p:nvSpPr>
+            <p:cNvPr name="TextBox 21" id="21"/>
+            <p:cNvSpPr txBox="true"/>
+            <p:nvPr/>
+          </p:nvSpPr>
+          <p:spPr>
+            <a:xfrm>
+              <a:off x="0" y="-57150"/>
+              <a:ext cx="272449" cy="88511"/>
+            </a:xfrm>
+            <a:prstGeom prst="rect">
+              <a:avLst/>
+            </a:prstGeom>
+          </p:spPr>
+          <p:txBody>
+            <a:bodyPr anchor="ctr" rtlCol="false" tIns="50800" lIns="50800" bIns="50800" rIns="50800"/>
+            <a:lstStyle/>
+            <a:p>
+              <a:pPr algn="ctr">
+                <a:lnSpc>
+                  <a:spcPts val="3122"/>
+                </a:lnSpc>
+              </a:pPr>
+            </a:p>
+          </p:txBody>
+        </p:sp>
+      </p:grpSp>
+      <p:grpSp>
+        <p:nvGrpSpPr>
+          <p:cNvPr name="Group 22" id="22"/>
+          <p:cNvGrpSpPr/>
+          <p:nvPr/>
+        </p:nvGrpSpPr>
+        <p:grpSpPr>
+          <a:xfrm rot="5400000">
+            <a:off x="12215782" y="3001388"/>
+            <a:ext cx="1034456" cy="121345"/>
+            <a:chOff x="0" y="0"/>
+            <a:chExt cx="272449" cy="31959"/>
+          </a:xfrm>
+        </p:grpSpPr>
+        <p:sp>
+          <p:nvSpPr>
+            <p:cNvPr name="Freeform 23" id="23"/>
+            <p:cNvSpPr/>
+            <p:nvPr/>
+          </p:nvSpPr>
+          <p:spPr>
+            <a:xfrm flipH="false" flipV="false" rot="0">
+              <a:off x="0" y="0"/>
+              <a:ext cx="272449" cy="31959"/>
+            </a:xfrm>
+            <a:custGeom>
+              <a:avLst/>
+              <a:gdLst/>
+              <a:ahLst/>
+              <a:cxnLst/>
+              <a:rect r="r" b="b" t="t" l="l"/>
+              <a:pathLst>
+                <a:path h="31959" w="272449">
+                  <a:moveTo>
+                    <a:pt x="15980" y="0"/>
+                  </a:moveTo>
+                  <a:lnTo>
+                    <a:pt x="256470" y="0"/>
+                  </a:lnTo>
+                  <a:cubicBezTo>
+                    <a:pt x="260708" y="0"/>
+                    <a:pt x="264772" y="1684"/>
+                    <a:pt x="267769" y="4680"/>
+                  </a:cubicBezTo>
+                  <a:cubicBezTo>
+                    <a:pt x="270766" y="7677"/>
+                    <a:pt x="272449" y="11742"/>
+                    <a:pt x="272449" y="15980"/>
+                  </a:cubicBezTo>
+                  <a:lnTo>
+                    <a:pt x="272449" y="15980"/>
+                  </a:lnTo>
+                  <a:cubicBezTo>
+                    <a:pt x="272449" y="24805"/>
+                    <a:pt x="265295" y="31959"/>
+                    <a:pt x="256470" y="31959"/>
+                  </a:cubicBezTo>
+                  <a:lnTo>
+                    <a:pt x="15980" y="31959"/>
+                  </a:lnTo>
+                  <a:cubicBezTo>
+                    <a:pt x="7154" y="31959"/>
+                    <a:pt x="0" y="24805"/>
+                    <a:pt x="0" y="15980"/>
+                  </a:cubicBezTo>
+                  <a:lnTo>
+                    <a:pt x="0" y="15980"/>
+                  </a:lnTo>
+                  <a:cubicBezTo>
+                    <a:pt x="0" y="7154"/>
+                    <a:pt x="7154" y="0"/>
+                    <a:pt x="15980" y="0"/>
+                  </a:cubicBezTo>
+                  <a:close/>
+                </a:path>
+              </a:pathLst>
+            </a:custGeom>
+            <a:solidFill>
+              <a:srgbClr val="6E2AF5"/>
+            </a:solidFill>
+          </p:spPr>
+        </p:sp>
+        <p:sp>
+          <p:nvSpPr>
+            <p:cNvPr name="TextBox 24" id="24"/>
+            <p:cNvSpPr txBox="true"/>
+            <p:nvPr/>
+          </p:nvSpPr>
+          <p:spPr>
+            <a:xfrm>
+              <a:off x="0" y="-57150"/>
+              <a:ext cx="272449" cy="89109"/>
+            </a:xfrm>
+            <a:prstGeom prst="rect">
+              <a:avLst/>
+            </a:prstGeom>
+          </p:spPr>
+          <p:txBody>
+            <a:bodyPr anchor="ctr" rtlCol="false" tIns="50800" lIns="50800" bIns="50800" rIns="50800"/>
+            <a:lstStyle/>
+            <a:p>
+              <a:pPr algn="ctr">
+                <a:lnSpc>
+                  <a:spcPts val="3122"/>
+                </a:lnSpc>
+              </a:pPr>
+            </a:p>
+          </p:txBody>
+        </p:sp>
+      </p:grpSp>
+      <p:sp>
+        <p:nvSpPr>
+          <p:cNvPr name="TextBox 25" id="25"/>
+          <p:cNvSpPr txBox="true"/>
+          <p:nvPr/>
+        </p:nvSpPr>
+        <p:spPr>
+          <a:xfrm rot="0">
+            <a:off x="1845052" y="2709807"/>
+            <a:ext cx="3611144" cy="503786"/>
+          </a:xfrm>
+          <a:prstGeom prst="rect">
+            <a:avLst/>
+          </a:prstGeom>
+        </p:spPr>
+        <p:txBody>
+          <a:bodyPr anchor="t" rtlCol="false" tIns="0" lIns="0" bIns="0" rIns="0">
+            <a:spAutoFit/>
+          </a:bodyPr>
+          <a:lstStyle/>
+          <a:p>
+            <a:pPr algn="ctr">
+              <a:lnSpc>
+                <a:spcPts val="3779"/>
+              </a:lnSpc>
+            </a:pPr>
+            <a:r>
+              <a:rPr lang="en-US" b="true" sz="2700">
+                <a:solidFill>
+                  <a:srgbClr val="2F0D8D"/>
+                </a:solidFill>
+                <a:latin typeface="Helvetica World Bold"/>
+                <a:ea typeface="Helvetica World Bold"/>
+                <a:cs typeface="Helvetica World Bold"/>
+                <a:sym typeface="Helvetica World Bold"/>
+              </a:rPr>
+              <a:t>Solution Description</a:t>
+            </a:r>
+          </a:p>
+        </p:txBody>
+      </p:sp>
+      <p:sp>
+        <p:nvSpPr>
+          <p:cNvPr name="TextBox 26" id="26"/>
+          <p:cNvSpPr txBox="true"/>
+          <p:nvPr/>
+        </p:nvSpPr>
+        <p:spPr>
+          <a:xfrm rot="0">
+            <a:off x="1476605" y="4127486"/>
+            <a:ext cx="4000996" cy="382269"/>
+          </a:xfrm>
+          <a:prstGeom prst="rect">
+            <a:avLst/>
+          </a:prstGeom>
+        </p:spPr>
+        <p:txBody>
+          <a:bodyPr anchor="t" rtlCol="false" tIns="0" lIns="0" bIns="0" rIns="0">
+            <a:spAutoFit/>
+          </a:bodyPr>
+          <a:lstStyle/>
+          <a:p>
+            <a:pPr algn="ctr">
+              <a:lnSpc>
+                <a:spcPts val="3080"/>
+              </a:lnSpc>
+            </a:pPr>
+            <a:r>
+              <a:rPr lang="en-US" sz="2200">
+                <a:solidFill>
+                  <a:srgbClr val="000000"/>
+                </a:solidFill>
+                <a:latin typeface="Helvetica World"/>
+                <a:ea typeface="Helvetica World"/>
+                <a:cs typeface="Helvetica World"/>
+                <a:sym typeface="Helvetica World"/>
+              </a:rPr>
+              <a:t>text</a:t>
+            </a:r>
+          </a:p>
+        </p:txBody>
+      </p:sp>
+      <p:sp>
+        <p:nvSpPr>
+          <p:cNvPr name="TextBox 27" id="27"/>
+          <p:cNvSpPr txBox="true"/>
+          <p:nvPr/>
+        </p:nvSpPr>
+        <p:spPr>
+          <a:xfrm rot="0">
+            <a:off x="7267053" y="2741823"/>
+            <a:ext cx="3753894" cy="503786"/>
+          </a:xfrm>
+          <a:prstGeom prst="rect">
+            <a:avLst/>
+          </a:prstGeom>
+        </p:spPr>
+        <p:txBody>
+          <a:bodyPr anchor="t" rtlCol="false" tIns="0" lIns="0" bIns="0" rIns="0">
+            <a:spAutoFit/>
+          </a:bodyPr>
+          <a:lstStyle/>
+          <a:p>
+            <a:pPr algn="ctr">
+              <a:lnSpc>
+                <a:spcPts val="3779"/>
+              </a:lnSpc>
+            </a:pPr>
+            <a:r>
+              <a:rPr lang="en-US" b="true" sz="2700">
+                <a:solidFill>
+                  <a:srgbClr val="2F0D8D"/>
+                </a:solidFill>
+                <a:latin typeface="Helvetica World Bold"/>
+                <a:ea typeface="Helvetica World Bold"/>
+                <a:cs typeface="Helvetica World Bold"/>
+                <a:sym typeface="Helvetica World Bold"/>
+              </a:rPr>
+              <a:t>Features &amp; USP</a:t>
+            </a:r>
+          </a:p>
+        </p:txBody>
+      </p:sp>
+      <p:sp>
+        <p:nvSpPr>
+          <p:cNvPr name="TextBox 28" id="28"/>
+          <p:cNvSpPr txBox="true"/>
+          <p:nvPr/>
+        </p:nvSpPr>
+        <p:spPr>
+          <a:xfrm rot="0">
+            <a:off x="7265815" y="4137011"/>
+            <a:ext cx="3739654" cy="382269"/>
+          </a:xfrm>
+          <a:prstGeom prst="rect">
+            <a:avLst/>
+          </a:prstGeom>
+        </p:spPr>
+        <p:txBody>
+          <a:bodyPr anchor="t" rtlCol="false" tIns="0" lIns="0" bIns="0" rIns="0">
+            <a:spAutoFit/>
+          </a:bodyPr>
+          <a:lstStyle/>
+          <a:p>
+            <a:pPr algn="ctr">
+              <a:lnSpc>
+                <a:spcPts val="3080"/>
+              </a:lnSpc>
+            </a:pPr>
+            <a:r>
+              <a:rPr lang="en-US" sz="2200">
+                <a:solidFill>
+                  <a:srgbClr val="000000"/>
+                </a:solidFill>
+                <a:latin typeface="Helvetica World"/>
+                <a:ea typeface="Helvetica World"/>
+                <a:cs typeface="Helvetica World"/>
+                <a:sym typeface="Helvetica World"/>
+              </a:rPr>
+              <a:t>text</a:t>
+            </a:r>
+          </a:p>
+        </p:txBody>
+      </p:sp>
+      <p:sp>
+        <p:nvSpPr>
+          <p:cNvPr name="TextBox 29" id="29"/>
+          <p:cNvSpPr txBox="true"/>
+          <p:nvPr/>
+        </p:nvSpPr>
+        <p:spPr>
+          <a:xfrm rot="0">
+            <a:off x="12745595" y="2487682"/>
+            <a:ext cx="5009152" cy="1019002"/>
+          </a:xfrm>
+          <a:prstGeom prst="rect">
+            <a:avLst/>
+          </a:prstGeom>
+        </p:spPr>
+        <p:txBody>
+          <a:bodyPr anchor="t" rtlCol="false" tIns="0" lIns="0" bIns="0" rIns="0">
+            <a:spAutoFit/>
+          </a:bodyPr>
+          <a:lstStyle/>
+          <a:p>
+            <a:pPr algn="ctr">
+              <a:lnSpc>
+                <a:spcPts val="3779"/>
+              </a:lnSpc>
+            </a:pPr>
+            <a:r>
+              <a:rPr lang="en-US" sz="2700" b="true">
+                <a:solidFill>
+                  <a:srgbClr val="2F0D8D"/>
+                </a:solidFill>
+                <a:latin typeface="Helvetica World Bold"/>
+                <a:ea typeface="Helvetica World Bold"/>
+                <a:cs typeface="Helvetica World Bold"/>
+                <a:sym typeface="Helvetica World Bold"/>
+              </a:rPr>
+              <a:t>How solution addresses the problem</a:t>
+            </a:r>
+          </a:p>
+        </p:txBody>
+      </p:sp>
+      <p:sp>
+        <p:nvSpPr>
+          <p:cNvPr name="TextBox 30" id="30"/>
+          <p:cNvSpPr txBox="true"/>
+          <p:nvPr/>
+        </p:nvSpPr>
+        <p:spPr>
+          <a:xfrm rot="0">
+            <a:off x="13346571" y="4203686"/>
+            <a:ext cx="3573102" cy="382269"/>
+          </a:xfrm>
+          <a:prstGeom prst="rect">
+            <a:avLst/>
+          </a:prstGeom>
+        </p:spPr>
+        <p:txBody>
+          <a:bodyPr anchor="t" rtlCol="false" tIns="0" lIns="0" bIns="0" rIns="0">
+            <a:spAutoFit/>
+          </a:bodyPr>
+          <a:lstStyle/>
+          <a:p>
+            <a:pPr algn="ctr">
+              <a:lnSpc>
+                <a:spcPts val="3080"/>
+              </a:lnSpc>
+            </a:pPr>
+            <a:r>
+              <a:rPr lang="en-US" sz="2200">
+                <a:solidFill>
+                  <a:srgbClr val="000000"/>
+                </a:solidFill>
+                <a:latin typeface="Helvetica World"/>
+                <a:ea typeface="Helvetica World"/>
+                <a:cs typeface="Helvetica World"/>
+                <a:sym typeface="Helvetica World"/>
+              </a:rPr>
+              <a:t>text</a:t>
+            </a:r>
+          </a:p>
+        </p:txBody>
+      </p:sp>
+    </p:spTree>
+  </p:cSld>
+  <p:clrMapOvr>
+    <a:masterClrMapping/>
+  </p:clrMapOvr>
+</p:sld>
+</file>
+
+<file path=ppt/slides/slide4.xml><?xml version="1.0" encoding="utf-8"?>
+<p:sld xmlns:p="http://schemas.openxmlformats.org/presentationml/2006/main" xmlns:a="http://schemas.openxmlformats.org/drawingml/2006/main" xmlns:r="http://schemas.openxmlformats.org/officeDocument/2006/relationships">
+  <p:cSld>
+    <p:bg>
+      <p:bgPr>
+        <a:solidFill>
+          <a:srgbClr val="F7F7FD"/>
+        </a:solidFill>
+      </p:bgPr>
+    </p:bg>
+    <p:spTree>
+      <p:nvGrpSpPr>
+        <p:cNvPr id="1" name=""/>
+        <p:cNvGrpSpPr/>
+        <p:nvPr/>
+      </p:nvGrpSpPr>
+      <p:grpSpPr>
+        <a:xfrm>
+          <a:off x="0" y="0"/>
+          <a:ext cx="0" cy="0"/>
+          <a:chOff x="0" y="0"/>
+          <a:chExt cx="0" cy="0"/>
+        </a:xfrm>
+      </p:grpSpPr>
+      <p:sp>
+        <p:nvSpPr>
+          <p:cNvPr name="Freeform 2" id="2"/>
+          <p:cNvSpPr/>
+          <p:nvPr/>
+        </p:nvSpPr>
+        <p:spPr>
+          <a:xfrm flipH="false" flipV="false" rot="0">
+            <a:off x="-393678" y="-11430"/>
+            <a:ext cx="18681678" cy="10531796"/>
+          </a:xfrm>
+          <a:custGeom>
+            <a:avLst/>
+            <a:gdLst/>
+            <a:ahLst/>
+            <a:cxnLst/>
+            <a:rect r="r" b="b" t="t" l="l"/>
+            <a:pathLst>
+              <a:path h="10531796" w="18681678">
+                <a:moveTo>
+                  <a:pt x="0" y="0"/>
+                </a:moveTo>
+                <a:lnTo>
+                  <a:pt x="18681678" y="0"/>
+                </a:lnTo>
+                <a:lnTo>
+                  <a:pt x="18681678" y="10531796"/>
+                </a:lnTo>
+                <a:lnTo>
+                  <a:pt x="0" y="10531796"/>
+                </a:lnTo>
+                <a:lnTo>
+                  <a:pt x="0" y="0"/>
+                </a:lnTo>
+                <a:close/>
+              </a:path>
+            </a:pathLst>
+          </a:custGeom>
+          <a:blipFill>
+            <a:blip r:embed="rId2"/>
+            <a:stretch>
+              <a:fillRect l="0" t="0" r="0" b="0"/>
+            </a:stretch>
+          </a:blipFill>
+        </p:spPr>
+      </p:sp>
+      <p:sp>
+        <p:nvSpPr>
+          <p:cNvPr name="TextBox 3" id="3"/>
+          <p:cNvSpPr txBox="true"/>
+          <p:nvPr/>
+        </p:nvSpPr>
+        <p:spPr>
+          <a:xfrm rot="0">
+            <a:off x="1350077" y="413530"/>
+            <a:ext cx="15195576" cy="771525"/>
+          </a:xfrm>
+          <a:prstGeom prst="rect">
+            <a:avLst/>
+          </a:prstGeom>
+        </p:spPr>
+        <p:txBody>
+          <a:bodyPr anchor="t" rtlCol="false" tIns="0" lIns="0" bIns="0" rIns="0">
+            <a:spAutoFit/>
+          </a:bodyPr>
+          <a:lstStyle/>
+          <a:p>
+            <a:pPr algn="l">
+              <a:lnSpc>
+                <a:spcPts val="6299"/>
+              </a:lnSpc>
+            </a:pPr>
+            <a:r>
+              <a:rPr lang="en-US" sz="4500">
+                <a:solidFill>
+                  <a:srgbClr val="632EC9"/>
+                </a:solidFill>
+                <a:latin typeface="League Spartan"/>
+                <a:ea typeface="League Spartan"/>
+                <a:cs typeface="League Spartan"/>
+                <a:sym typeface="League Spartan"/>
+              </a:rPr>
+              <a:t>Technical Architecture</a:t>
+            </a:r>
+          </a:p>
+        </p:txBody>
+      </p:sp>
+      <p:sp>
+        <p:nvSpPr>
+          <p:cNvPr name="Freeform 4" id="4"/>
+          <p:cNvSpPr/>
+          <p:nvPr/>
+        </p:nvSpPr>
+        <p:spPr>
+          <a:xfrm flipH="false" flipV="false" rot="0">
+            <a:off x="17034205" y="297395"/>
+            <a:ext cx="925524" cy="963762"/>
+          </a:xfrm>
+          <a:custGeom>
+            <a:avLst/>
+            <a:gdLst/>
+            <a:ahLst/>
+            <a:cxnLst/>
+            <a:rect r="r" b="b" t="t" l="l"/>
+            <a:pathLst>
+              <a:path h="963762" w="925524">
+                <a:moveTo>
+                  <a:pt x="0" y="0"/>
+                </a:moveTo>
+                <a:lnTo>
+                  <a:pt x="925524" y="0"/>
+                </a:lnTo>
+                <a:lnTo>
+                  <a:pt x="925524" y="963763"/>
+                </a:lnTo>
+                <a:lnTo>
+                  <a:pt x="0" y="963763"/>
+                </a:lnTo>
+                <a:lnTo>
+                  <a:pt x="0" y="0"/>
+                </a:lnTo>
+                <a:close/>
+              </a:path>
+            </a:pathLst>
+          </a:custGeom>
+          <a:blipFill>
+            <a:blip r:embed="rId3"/>
+            <a:stretch>
+              <a:fillRect l="-8247" t="-5733" r="-147202" b="0"/>
+            </a:stretch>
+          </a:blipFill>
+        </p:spPr>
+      </p:sp>
+      <p:grpSp>
+        <p:nvGrpSpPr>
+          <p:cNvPr name="Group 5" id="5"/>
+          <p:cNvGrpSpPr/>
+          <p:nvPr/>
+        </p:nvGrpSpPr>
+        <p:grpSpPr>
+          <a:xfrm rot="0">
+            <a:off x="1028661" y="1321157"/>
+            <a:ext cx="16903200" cy="672561"/>
+            <a:chOff x="0" y="0"/>
+            <a:chExt cx="22537600" cy="896747"/>
+          </a:xfrm>
+        </p:grpSpPr>
+        <p:sp>
+          <p:nvSpPr>
+            <p:cNvPr name="AutoShape 6" id="6"/>
+            <p:cNvSpPr/>
+            <p:nvPr/>
+          </p:nvSpPr>
+          <p:spPr>
+            <a:xfrm>
+              <a:off x="49" y="411875"/>
+              <a:ext cx="22290554" cy="42849"/>
             </a:xfrm>
             <a:prstGeom prst="line">
               <a:avLst/>
             </a:prstGeom>
             <a:ln cap="flat" w="50800">
               <a:solidFill>
-                <a:srgbClr val="B58FFF"/>
+                <a:srgbClr val="6E2AF5"/>
               </a:solidFill>
               <a:prstDash val="solid"/>
               <a:headEnd type="none" len="sm" w="sm"/>
@@ -4965,21 +7999,757 @@
         </p:sp>
         <p:sp>
           <p:nvSpPr>
-            <p:cNvPr name="AutoShape 51" id="51"/>
+            <p:cNvPr name="Freeform 7" id="7"/>
             <p:cNvSpPr/>
             <p:nvPr/>
           </p:nvSpPr>
           <p:spPr>
-            <a:xfrm flipV="true">
-              <a:off x="8676642" y="702921"/>
-              <a:ext cx="0" cy="1014340"/>
+            <a:xfrm flipH="false" flipV="false" rot="0">
+              <a:off x="21640852" y="0"/>
+              <a:ext cx="896747" cy="896747"/>
+            </a:xfrm>
+            <a:custGeom>
+              <a:avLst/>
+              <a:gdLst/>
+              <a:ahLst/>
+              <a:cxnLst/>
+              <a:rect r="r" b="b" t="t" l="l"/>
+              <a:pathLst>
+                <a:path h="896747" w="896747">
+                  <a:moveTo>
+                    <a:pt x="0" y="0"/>
+                  </a:moveTo>
+                  <a:lnTo>
+                    <a:pt x="896748" y="0"/>
+                  </a:lnTo>
+                  <a:lnTo>
+                    <a:pt x="896748" y="896747"/>
+                  </a:lnTo>
+                  <a:lnTo>
+                    <a:pt x="0" y="896747"/>
+                  </a:lnTo>
+                  <a:lnTo>
+                    <a:pt x="0" y="0"/>
+                  </a:lnTo>
+                  <a:close/>
+                </a:path>
+              </a:pathLst>
+            </a:custGeom>
+            <a:blipFill>
+              <a:blip r:embed="rId4">
+                <a:extLst>
+                  <a:ext uri="{96DAC541-7B7A-43D3-8B79-37D633B846F1}">
+                    <asvg:svgBlip xmlns:asvg="http://schemas.microsoft.com/office/drawing/2016/SVG/main" r:embed="rId5"/>
+                  </a:ext>
+                </a:extLst>
+              </a:blip>
+              <a:stretch>
+                <a:fillRect l="0" t="0" r="0" b="0"/>
+              </a:stretch>
+            </a:blipFill>
+          </p:spPr>
+        </p:sp>
+      </p:grpSp>
+      <p:grpSp>
+        <p:nvGrpSpPr>
+          <p:cNvPr name="Group 8" id="8"/>
+          <p:cNvGrpSpPr/>
+          <p:nvPr/>
+        </p:nvGrpSpPr>
+        <p:grpSpPr>
+          <a:xfrm rot="0">
+            <a:off x="1028700" y="1993718"/>
+            <a:ext cx="4280702" cy="789171"/>
+            <a:chOff x="0" y="0"/>
+            <a:chExt cx="5707603" cy="1052228"/>
+          </a:xfrm>
+        </p:grpSpPr>
+        <p:sp>
+          <p:nvSpPr>
+            <p:cNvPr name="Freeform 9" id="9"/>
+            <p:cNvSpPr/>
+            <p:nvPr/>
+          </p:nvSpPr>
+          <p:spPr>
+            <a:xfrm flipH="false" flipV="false" rot="0">
+              <a:off x="5326937" y="671562"/>
+              <a:ext cx="380667" cy="380667"/>
+            </a:xfrm>
+            <a:custGeom>
+              <a:avLst/>
+              <a:gdLst/>
+              <a:ahLst/>
+              <a:cxnLst/>
+              <a:rect r="r" b="b" t="t" l="l"/>
+              <a:pathLst>
+                <a:path h="380667" w="380667">
+                  <a:moveTo>
+                    <a:pt x="0" y="0"/>
+                  </a:moveTo>
+                  <a:lnTo>
+                    <a:pt x="380666" y="0"/>
+                  </a:lnTo>
+                  <a:lnTo>
+                    <a:pt x="380666" y="380666"/>
+                  </a:lnTo>
+                  <a:lnTo>
+                    <a:pt x="0" y="380666"/>
+                  </a:lnTo>
+                  <a:lnTo>
+                    <a:pt x="0" y="0"/>
+                  </a:lnTo>
+                  <a:close/>
+                </a:path>
+              </a:pathLst>
+            </a:custGeom>
+            <a:blipFill>
+              <a:blip r:embed="rId6">
+                <a:extLst>
+                  <a:ext uri="{96DAC541-7B7A-43D3-8B79-37D633B846F1}">
+                    <asvg:svgBlip xmlns:asvg="http://schemas.microsoft.com/office/drawing/2016/SVG/main" r:embed="rId7"/>
+                  </a:ext>
+                </a:extLst>
+              </a:blip>
+              <a:stretch>
+                <a:fillRect l="0" t="0" r="0" b="0"/>
+              </a:stretch>
+            </a:blipFill>
+          </p:spPr>
+        </p:sp>
+        <p:sp>
+          <p:nvSpPr>
+            <p:cNvPr name="AutoShape 10" id="10"/>
+            <p:cNvSpPr/>
+            <p:nvPr/>
+          </p:nvSpPr>
+          <p:spPr>
+            <a:xfrm>
+              <a:off x="124071" y="856272"/>
+              <a:ext cx="5393198" cy="0"/>
+            </a:xfrm>
+            <a:prstGeom prst="line">
+              <a:avLst/>
+            </a:prstGeom>
+            <a:ln cap="flat" w="38100">
+              <a:solidFill>
+                <a:srgbClr val="CABAE7"/>
+              </a:solidFill>
+              <a:prstDash val="solid"/>
+              <a:headEnd type="none" len="sm" w="sm"/>
+              <a:tailEnd type="none" len="sm" w="sm"/>
+            </a:ln>
+          </p:spPr>
+        </p:sp>
+        <p:grpSp>
+          <p:nvGrpSpPr>
+            <p:cNvPr name="Group 11" id="11"/>
+            <p:cNvGrpSpPr/>
+            <p:nvPr/>
+          </p:nvGrpSpPr>
+          <p:grpSpPr>
+            <a:xfrm rot="5400000">
+              <a:off x="-331553" y="331553"/>
+              <a:ext cx="861895" cy="198788"/>
+              <a:chOff x="0" y="0"/>
+              <a:chExt cx="170251" cy="39267"/>
+            </a:xfrm>
+          </p:grpSpPr>
+          <p:sp>
+            <p:nvSpPr>
+              <p:cNvPr name="Freeform 12" id="12"/>
+              <p:cNvSpPr/>
+              <p:nvPr/>
+            </p:nvSpPr>
+            <p:spPr>
+              <a:xfrm flipH="false" flipV="false" rot="0">
+                <a:off x="0" y="0"/>
+                <a:ext cx="170251" cy="39267"/>
+              </a:xfrm>
+              <a:custGeom>
+                <a:avLst/>
+                <a:gdLst/>
+                <a:ahLst/>
+                <a:cxnLst/>
+                <a:rect r="r" b="b" t="t" l="l"/>
+                <a:pathLst>
+                  <a:path h="39267" w="170251">
+                    <a:moveTo>
+                      <a:pt x="19633" y="0"/>
+                    </a:moveTo>
+                    <a:lnTo>
+                      <a:pt x="150617" y="0"/>
+                    </a:lnTo>
+                    <a:cubicBezTo>
+                      <a:pt x="155825" y="0"/>
+                      <a:pt x="160818" y="2069"/>
+                      <a:pt x="164500" y="5750"/>
+                    </a:cubicBezTo>
+                    <a:cubicBezTo>
+                      <a:pt x="168182" y="9432"/>
+                      <a:pt x="170251" y="14426"/>
+                      <a:pt x="170251" y="19633"/>
+                    </a:cubicBezTo>
+                    <a:lnTo>
+                      <a:pt x="170251" y="19633"/>
+                    </a:lnTo>
+                    <a:cubicBezTo>
+                      <a:pt x="170251" y="30477"/>
+                      <a:pt x="161461" y="39267"/>
+                      <a:pt x="150617" y="39267"/>
+                    </a:cubicBezTo>
+                    <a:lnTo>
+                      <a:pt x="19633" y="39267"/>
+                    </a:lnTo>
+                    <a:cubicBezTo>
+                      <a:pt x="14426" y="39267"/>
+                      <a:pt x="9432" y="37198"/>
+                      <a:pt x="5750" y="33516"/>
+                    </a:cubicBezTo>
+                    <a:cubicBezTo>
+                      <a:pt x="2069" y="29834"/>
+                      <a:pt x="0" y="24841"/>
+                      <a:pt x="0" y="19633"/>
+                    </a:cubicBezTo>
+                    <a:lnTo>
+                      <a:pt x="0" y="19633"/>
+                    </a:lnTo>
+                    <a:cubicBezTo>
+                      <a:pt x="0" y="14426"/>
+                      <a:pt x="2069" y="9432"/>
+                      <a:pt x="5750" y="5750"/>
+                    </a:cubicBezTo>
+                    <a:cubicBezTo>
+                      <a:pt x="9432" y="2069"/>
+                      <a:pt x="14426" y="0"/>
+                      <a:pt x="19633" y="0"/>
+                    </a:cubicBezTo>
+                    <a:close/>
+                  </a:path>
+                </a:pathLst>
+              </a:custGeom>
+              <a:solidFill>
+                <a:srgbClr val="6E2AF5"/>
+              </a:solidFill>
+            </p:spPr>
+          </p:sp>
+          <p:sp>
+            <p:nvSpPr>
+              <p:cNvPr name="TextBox 13" id="13"/>
+              <p:cNvSpPr txBox="true"/>
+              <p:nvPr/>
+            </p:nvSpPr>
+            <p:spPr>
+              <a:xfrm>
+                <a:off x="0" y="-57150"/>
+                <a:ext cx="170251" cy="96417"/>
+              </a:xfrm>
+              <a:prstGeom prst="rect">
+                <a:avLst/>
+              </a:prstGeom>
+            </p:spPr>
+            <p:txBody>
+              <a:bodyPr anchor="ctr" rtlCol="false" tIns="50800" lIns="50800" bIns="50800" rIns="50800"/>
+              <a:lstStyle/>
+              <a:p>
+                <a:pPr algn="ctr">
+                  <a:lnSpc>
+                    <a:spcPts val="3122"/>
+                  </a:lnSpc>
+                </a:pPr>
+              </a:p>
+            </p:txBody>
+          </p:sp>
+        </p:grpSp>
+        <p:sp>
+          <p:nvSpPr>
+            <p:cNvPr name="TextBox 14" id="14"/>
+            <p:cNvSpPr txBox="true"/>
+            <p:nvPr/>
+          </p:nvSpPr>
+          <p:spPr>
+            <a:xfrm rot="0">
+              <a:off x="0" y="24674"/>
+              <a:ext cx="5005192" cy="652665"/>
+            </a:xfrm>
+            <a:prstGeom prst="rect">
+              <a:avLst/>
+            </a:prstGeom>
+          </p:spPr>
+          <p:txBody>
+            <a:bodyPr anchor="t" rtlCol="false" tIns="0" lIns="0" bIns="0" rIns="0">
+              <a:spAutoFit/>
+            </a:bodyPr>
+            <a:lstStyle/>
+            <a:p>
+              <a:pPr algn="ctr">
+                <a:lnSpc>
+                  <a:spcPts val="3779"/>
+                </a:lnSpc>
+              </a:pPr>
+              <a:r>
+                <a:rPr lang="en-US" sz="2700" b="true">
+                  <a:solidFill>
+                    <a:srgbClr val="2F0D8D"/>
+                  </a:solidFill>
+                  <a:latin typeface="Helvetica World Bold"/>
+                  <a:ea typeface="Helvetica World Bold"/>
+                  <a:cs typeface="Helvetica World Bold"/>
+                  <a:sym typeface="Helvetica World Bold"/>
+                </a:rPr>
+                <a:t>Tech Stack</a:t>
+              </a:r>
+            </a:p>
+          </p:txBody>
+        </p:sp>
+      </p:grpSp>
+      <p:grpSp>
+        <p:nvGrpSpPr>
+          <p:cNvPr name="Group 15" id="15"/>
+          <p:cNvGrpSpPr/>
+          <p:nvPr/>
+        </p:nvGrpSpPr>
+        <p:grpSpPr>
+          <a:xfrm rot="0">
+            <a:off x="8092870" y="1993718"/>
+            <a:ext cx="4280702" cy="789171"/>
+            <a:chOff x="0" y="0"/>
+            <a:chExt cx="5707603" cy="1052228"/>
+          </a:xfrm>
+        </p:grpSpPr>
+        <p:sp>
+          <p:nvSpPr>
+            <p:cNvPr name="Freeform 16" id="16"/>
+            <p:cNvSpPr/>
+            <p:nvPr/>
+          </p:nvSpPr>
+          <p:spPr>
+            <a:xfrm flipH="false" flipV="false" rot="0">
+              <a:off x="5326937" y="671562"/>
+              <a:ext cx="380667" cy="380667"/>
+            </a:xfrm>
+            <a:custGeom>
+              <a:avLst/>
+              <a:gdLst/>
+              <a:ahLst/>
+              <a:cxnLst/>
+              <a:rect r="r" b="b" t="t" l="l"/>
+              <a:pathLst>
+                <a:path h="380667" w="380667">
+                  <a:moveTo>
+                    <a:pt x="0" y="0"/>
+                  </a:moveTo>
+                  <a:lnTo>
+                    <a:pt x="380666" y="0"/>
+                  </a:lnTo>
+                  <a:lnTo>
+                    <a:pt x="380666" y="380666"/>
+                  </a:lnTo>
+                  <a:lnTo>
+                    <a:pt x="0" y="380666"/>
+                  </a:lnTo>
+                  <a:lnTo>
+                    <a:pt x="0" y="0"/>
+                  </a:lnTo>
+                  <a:close/>
+                </a:path>
+              </a:pathLst>
+            </a:custGeom>
+            <a:blipFill>
+              <a:blip r:embed="rId6">
+                <a:extLst>
+                  <a:ext uri="{96DAC541-7B7A-43D3-8B79-37D633B846F1}">
+                    <asvg:svgBlip xmlns:asvg="http://schemas.microsoft.com/office/drawing/2016/SVG/main" r:embed="rId7"/>
+                  </a:ext>
+                </a:extLst>
+              </a:blip>
+              <a:stretch>
+                <a:fillRect l="0" t="0" r="0" b="0"/>
+              </a:stretch>
+            </a:blipFill>
+          </p:spPr>
+        </p:sp>
+        <p:sp>
+          <p:nvSpPr>
+            <p:cNvPr name="AutoShape 17" id="17"/>
+            <p:cNvSpPr/>
+            <p:nvPr/>
+          </p:nvSpPr>
+          <p:spPr>
+            <a:xfrm>
+              <a:off x="124071" y="856272"/>
+              <a:ext cx="5393198" cy="0"/>
+            </a:xfrm>
+            <a:prstGeom prst="line">
+              <a:avLst/>
+            </a:prstGeom>
+            <a:ln cap="flat" w="38100">
+              <a:solidFill>
+                <a:srgbClr val="CABAE7"/>
+              </a:solidFill>
+              <a:prstDash val="solid"/>
+              <a:headEnd type="none" len="sm" w="sm"/>
+              <a:tailEnd type="none" len="sm" w="sm"/>
+            </a:ln>
+          </p:spPr>
+        </p:sp>
+        <p:grpSp>
+          <p:nvGrpSpPr>
+            <p:cNvPr name="Group 18" id="18"/>
+            <p:cNvGrpSpPr/>
+            <p:nvPr/>
+          </p:nvGrpSpPr>
+          <p:grpSpPr>
+            <a:xfrm rot="5400000">
+              <a:off x="-331553" y="331553"/>
+              <a:ext cx="861895" cy="198788"/>
+              <a:chOff x="0" y="0"/>
+              <a:chExt cx="170251" cy="39267"/>
+            </a:xfrm>
+          </p:grpSpPr>
+          <p:sp>
+            <p:nvSpPr>
+              <p:cNvPr name="Freeform 19" id="19"/>
+              <p:cNvSpPr/>
+              <p:nvPr/>
+            </p:nvSpPr>
+            <p:spPr>
+              <a:xfrm flipH="false" flipV="false" rot="0">
+                <a:off x="0" y="0"/>
+                <a:ext cx="170251" cy="39267"/>
+              </a:xfrm>
+              <a:custGeom>
+                <a:avLst/>
+                <a:gdLst/>
+                <a:ahLst/>
+                <a:cxnLst/>
+                <a:rect r="r" b="b" t="t" l="l"/>
+                <a:pathLst>
+                  <a:path h="39267" w="170251">
+                    <a:moveTo>
+                      <a:pt x="19633" y="0"/>
+                    </a:moveTo>
+                    <a:lnTo>
+                      <a:pt x="150617" y="0"/>
+                    </a:lnTo>
+                    <a:cubicBezTo>
+                      <a:pt x="155825" y="0"/>
+                      <a:pt x="160818" y="2069"/>
+                      <a:pt x="164500" y="5750"/>
+                    </a:cubicBezTo>
+                    <a:cubicBezTo>
+                      <a:pt x="168182" y="9432"/>
+                      <a:pt x="170251" y="14426"/>
+                      <a:pt x="170251" y="19633"/>
+                    </a:cubicBezTo>
+                    <a:lnTo>
+                      <a:pt x="170251" y="19633"/>
+                    </a:lnTo>
+                    <a:cubicBezTo>
+                      <a:pt x="170251" y="30477"/>
+                      <a:pt x="161461" y="39267"/>
+                      <a:pt x="150617" y="39267"/>
+                    </a:cubicBezTo>
+                    <a:lnTo>
+                      <a:pt x="19633" y="39267"/>
+                    </a:lnTo>
+                    <a:cubicBezTo>
+                      <a:pt x="14426" y="39267"/>
+                      <a:pt x="9432" y="37198"/>
+                      <a:pt x="5750" y="33516"/>
+                    </a:cubicBezTo>
+                    <a:cubicBezTo>
+                      <a:pt x="2069" y="29834"/>
+                      <a:pt x="0" y="24841"/>
+                      <a:pt x="0" y="19633"/>
+                    </a:cubicBezTo>
+                    <a:lnTo>
+                      <a:pt x="0" y="19633"/>
+                    </a:lnTo>
+                    <a:cubicBezTo>
+                      <a:pt x="0" y="14426"/>
+                      <a:pt x="2069" y="9432"/>
+                      <a:pt x="5750" y="5750"/>
+                    </a:cubicBezTo>
+                    <a:cubicBezTo>
+                      <a:pt x="9432" y="2069"/>
+                      <a:pt x="14426" y="0"/>
+                      <a:pt x="19633" y="0"/>
+                    </a:cubicBezTo>
+                    <a:close/>
+                  </a:path>
+                </a:pathLst>
+              </a:custGeom>
+              <a:solidFill>
+                <a:srgbClr val="6E2AF5"/>
+              </a:solidFill>
+            </p:spPr>
+          </p:sp>
+          <p:sp>
+            <p:nvSpPr>
+              <p:cNvPr name="TextBox 20" id="20"/>
+              <p:cNvSpPr txBox="true"/>
+              <p:nvPr/>
+            </p:nvSpPr>
+            <p:spPr>
+              <a:xfrm>
+                <a:off x="0" y="-57150"/>
+                <a:ext cx="170251" cy="96417"/>
+              </a:xfrm>
+              <a:prstGeom prst="rect">
+                <a:avLst/>
+              </a:prstGeom>
+            </p:spPr>
+            <p:txBody>
+              <a:bodyPr anchor="ctr" rtlCol="false" tIns="50800" lIns="50800" bIns="50800" rIns="50800"/>
+              <a:lstStyle/>
+              <a:p>
+                <a:pPr algn="ctr">
+                  <a:lnSpc>
+                    <a:spcPts val="3122"/>
+                  </a:lnSpc>
+                </a:pPr>
+              </a:p>
+            </p:txBody>
+          </p:sp>
+        </p:grpSp>
+        <p:sp>
+          <p:nvSpPr>
+            <p:cNvPr name="TextBox 21" id="21"/>
+            <p:cNvSpPr txBox="true"/>
+            <p:nvPr/>
+          </p:nvSpPr>
+          <p:spPr>
+            <a:xfrm rot="0">
+              <a:off x="260266" y="78929"/>
+              <a:ext cx="5005192" cy="652665"/>
+            </a:xfrm>
+            <a:prstGeom prst="rect">
+              <a:avLst/>
+            </a:prstGeom>
+          </p:spPr>
+          <p:txBody>
+            <a:bodyPr anchor="t" rtlCol="false" tIns="0" lIns="0" bIns="0" rIns="0">
+              <a:spAutoFit/>
+            </a:bodyPr>
+            <a:lstStyle/>
+            <a:p>
+              <a:pPr algn="ctr">
+                <a:lnSpc>
+                  <a:spcPts val="3779"/>
+                </a:lnSpc>
+              </a:pPr>
+              <a:r>
+                <a:rPr lang="en-US" sz="2700" b="true">
+                  <a:solidFill>
+                    <a:srgbClr val="2F0D8D"/>
+                  </a:solidFill>
+                  <a:latin typeface="Helvetica World Bold"/>
+                  <a:ea typeface="Helvetica World Bold"/>
+                  <a:cs typeface="Helvetica World Bold"/>
+                  <a:sym typeface="Helvetica World Bold"/>
+                </a:rPr>
+                <a:t>System Architecture</a:t>
+              </a:r>
+            </a:p>
+          </p:txBody>
+        </p:sp>
+      </p:grpSp>
+    </p:spTree>
+  </p:cSld>
+  <p:clrMapOvr>
+    <a:masterClrMapping/>
+  </p:clrMapOvr>
+</p:sld>
+</file>
+
+<file path=ppt/slides/slide5.xml><?xml version="1.0" encoding="utf-8"?>
+<p:sld xmlns:p="http://schemas.openxmlformats.org/presentationml/2006/main" xmlns:a="http://schemas.openxmlformats.org/drawingml/2006/main" xmlns:r="http://schemas.openxmlformats.org/officeDocument/2006/relationships">
+  <p:cSld>
+    <p:bg>
+      <p:bgPr>
+        <a:solidFill>
+          <a:srgbClr val="F7F7FD"/>
+        </a:solidFill>
+      </p:bgPr>
+    </p:bg>
+    <p:spTree>
+      <p:nvGrpSpPr>
+        <p:cNvPr id="1" name=""/>
+        <p:cNvGrpSpPr/>
+        <p:nvPr/>
+      </p:nvGrpSpPr>
+      <p:grpSpPr>
+        <a:xfrm>
+          <a:off x="0" y="0"/>
+          <a:ext cx="0" cy="0"/>
+          <a:chOff x="0" y="0"/>
+          <a:chExt cx="0" cy="0"/>
+        </a:xfrm>
+      </p:grpSpPr>
+      <p:sp>
+        <p:nvSpPr>
+          <p:cNvPr name="Freeform 2" id="2"/>
+          <p:cNvSpPr/>
+          <p:nvPr/>
+        </p:nvSpPr>
+        <p:spPr>
+          <a:xfrm flipH="false" flipV="false" rot="0">
+            <a:off x="-393678" y="-11430"/>
+            <a:ext cx="18681678" cy="10531796"/>
+          </a:xfrm>
+          <a:custGeom>
+            <a:avLst/>
+            <a:gdLst/>
+            <a:ahLst/>
+            <a:cxnLst/>
+            <a:rect r="r" b="b" t="t" l="l"/>
+            <a:pathLst>
+              <a:path h="10531796" w="18681678">
+                <a:moveTo>
+                  <a:pt x="0" y="0"/>
+                </a:moveTo>
+                <a:lnTo>
+                  <a:pt x="18681678" y="0"/>
+                </a:lnTo>
+                <a:lnTo>
+                  <a:pt x="18681678" y="10531796"/>
+                </a:lnTo>
+                <a:lnTo>
+                  <a:pt x="0" y="10531796"/>
+                </a:lnTo>
+                <a:lnTo>
+                  <a:pt x="0" y="0"/>
+                </a:lnTo>
+                <a:close/>
+              </a:path>
+            </a:pathLst>
+          </a:custGeom>
+          <a:blipFill>
+            <a:blip r:embed="rId2"/>
+            <a:stretch>
+              <a:fillRect l="0" t="0" r="0" b="0"/>
+            </a:stretch>
+          </a:blipFill>
+        </p:spPr>
+      </p:sp>
+      <p:sp>
+        <p:nvSpPr>
+          <p:cNvPr name="TextBox 3" id="3"/>
+          <p:cNvSpPr txBox="true"/>
+          <p:nvPr/>
+        </p:nvSpPr>
+        <p:spPr>
+          <a:xfrm rot="0">
+            <a:off x="1318244" y="625366"/>
+            <a:ext cx="18098417" cy="557403"/>
+          </a:xfrm>
+          <a:prstGeom prst="rect">
+            <a:avLst/>
+          </a:prstGeom>
+        </p:spPr>
+        <p:txBody>
+          <a:bodyPr anchor="t" rtlCol="false" tIns="0" lIns="0" bIns="0" rIns="0">
+            <a:spAutoFit/>
+          </a:bodyPr>
+          <a:lstStyle/>
+          <a:p>
+            <a:pPr algn="just">
+              <a:lnSpc>
+                <a:spcPts val="4086"/>
+              </a:lnSpc>
+            </a:pPr>
+            <a:r>
+              <a:rPr lang="en-US" sz="4500">
+                <a:solidFill>
+                  <a:srgbClr val="632EC9"/>
+                </a:solidFill>
+                <a:latin typeface="League Spartan"/>
+                <a:ea typeface="League Spartan"/>
+                <a:cs typeface="League Spartan"/>
+                <a:sym typeface="League Spartan"/>
+              </a:rPr>
+              <a:t>Working of the Solution and Demonstration</a:t>
+            </a:r>
+          </a:p>
+        </p:txBody>
+      </p:sp>
+      <p:sp>
+        <p:nvSpPr>
+          <p:cNvPr name="Freeform 4" id="4"/>
+          <p:cNvSpPr/>
+          <p:nvPr/>
+        </p:nvSpPr>
+        <p:spPr>
+          <a:xfrm flipH="false" flipV="false" rot="0">
+            <a:off x="17034205" y="297395"/>
+            <a:ext cx="925524" cy="963762"/>
+          </a:xfrm>
+          <a:custGeom>
+            <a:avLst/>
+            <a:gdLst/>
+            <a:ahLst/>
+            <a:cxnLst/>
+            <a:rect r="r" b="b" t="t" l="l"/>
+            <a:pathLst>
+              <a:path h="963762" w="925524">
+                <a:moveTo>
+                  <a:pt x="0" y="0"/>
+                </a:moveTo>
+                <a:lnTo>
+                  <a:pt x="925524" y="0"/>
+                </a:lnTo>
+                <a:lnTo>
+                  <a:pt x="925524" y="963763"/>
+                </a:lnTo>
+                <a:lnTo>
+                  <a:pt x="0" y="963763"/>
+                </a:lnTo>
+                <a:lnTo>
+                  <a:pt x="0" y="0"/>
+                </a:lnTo>
+                <a:close/>
+              </a:path>
+            </a:pathLst>
+          </a:custGeom>
+          <a:blipFill>
+            <a:blip r:embed="rId3"/>
+            <a:stretch>
+              <a:fillRect l="-8247" t="-5733" r="-147202" b="0"/>
+            </a:stretch>
+          </a:blipFill>
+        </p:spPr>
+      </p:sp>
+      <p:grpSp>
+        <p:nvGrpSpPr>
+          <p:cNvPr name="Group 5" id="5"/>
+          <p:cNvGrpSpPr/>
+          <p:nvPr/>
+        </p:nvGrpSpPr>
+        <p:grpSpPr>
+          <a:xfrm rot="0">
+            <a:off x="1028661" y="1321157"/>
+            <a:ext cx="16903200" cy="672561"/>
+            <a:chOff x="0" y="0"/>
+            <a:chExt cx="22537600" cy="896747"/>
+          </a:xfrm>
+        </p:grpSpPr>
+        <p:sp>
+          <p:nvSpPr>
+            <p:cNvPr name="AutoShape 6" id="6"/>
+            <p:cNvSpPr/>
+            <p:nvPr/>
+          </p:nvSpPr>
+          <p:spPr>
+            <a:xfrm>
+              <a:off x="49" y="411875"/>
+              <a:ext cx="22290554" cy="42849"/>
             </a:xfrm>
             <a:prstGeom prst="line">
               <a:avLst/>
             </a:prstGeom>
             <a:ln cap="flat" w="50800">
               <a:solidFill>
-                <a:srgbClr val="B58FFF"/>
+                <a:srgbClr val="6E2AF5"/>
               </a:solidFill>
               <a:prstDash val="solid"/>
               <a:headEnd type="none" len="sm" w="sm"/>
@@ -4989,21 +8759,1060 @@
         </p:sp>
         <p:sp>
           <p:nvSpPr>
-            <p:cNvPr name="AutoShape 52" id="52"/>
+            <p:cNvPr name="Freeform 7" id="7"/>
             <p:cNvSpPr/>
             <p:nvPr/>
           </p:nvSpPr>
           <p:spPr>
-            <a:xfrm flipV="true">
-              <a:off x="10162290" y="702921"/>
-              <a:ext cx="0" cy="1014340"/>
+            <a:xfrm flipH="false" flipV="false" rot="0">
+              <a:off x="21640852" y="0"/>
+              <a:ext cx="896747" cy="896747"/>
+            </a:xfrm>
+            <a:custGeom>
+              <a:avLst/>
+              <a:gdLst/>
+              <a:ahLst/>
+              <a:cxnLst/>
+              <a:rect r="r" b="b" t="t" l="l"/>
+              <a:pathLst>
+                <a:path h="896747" w="896747">
+                  <a:moveTo>
+                    <a:pt x="0" y="0"/>
+                  </a:moveTo>
+                  <a:lnTo>
+                    <a:pt x="896748" y="0"/>
+                  </a:lnTo>
+                  <a:lnTo>
+                    <a:pt x="896748" y="896747"/>
+                  </a:lnTo>
+                  <a:lnTo>
+                    <a:pt x="0" y="896747"/>
+                  </a:lnTo>
+                  <a:lnTo>
+                    <a:pt x="0" y="0"/>
+                  </a:lnTo>
+                  <a:close/>
+                </a:path>
+              </a:pathLst>
+            </a:custGeom>
+            <a:blipFill>
+              <a:blip r:embed="rId4">
+                <a:extLst>
+                  <a:ext uri="{96DAC541-7B7A-43D3-8B79-37D633B846F1}">
+                    <asvg:svgBlip xmlns:asvg="http://schemas.microsoft.com/office/drawing/2016/SVG/main" r:embed="rId5"/>
+                  </a:ext>
+                </a:extLst>
+              </a:blip>
+              <a:stretch>
+                <a:fillRect l="0" t="0" r="0" b="0"/>
+              </a:stretch>
+            </a:blipFill>
+          </p:spPr>
+        </p:sp>
+      </p:grpSp>
+      <p:grpSp>
+        <p:nvGrpSpPr>
+          <p:cNvPr name="Group 8" id="8"/>
+          <p:cNvGrpSpPr/>
+          <p:nvPr/>
+        </p:nvGrpSpPr>
+        <p:grpSpPr>
+          <a:xfrm rot="0">
+            <a:off x="6054392" y="4168830"/>
+            <a:ext cx="4631669" cy="789171"/>
+            <a:chOff x="0" y="0"/>
+            <a:chExt cx="6175558" cy="1052228"/>
+          </a:xfrm>
+        </p:grpSpPr>
+        <p:sp>
+          <p:nvSpPr>
+            <p:cNvPr name="Freeform 9" id="9"/>
+            <p:cNvSpPr/>
+            <p:nvPr/>
+          </p:nvSpPr>
+          <p:spPr>
+            <a:xfrm flipH="false" flipV="false" rot="0">
+              <a:off x="5794892" y="671562"/>
+              <a:ext cx="380667" cy="380667"/>
+            </a:xfrm>
+            <a:custGeom>
+              <a:avLst/>
+              <a:gdLst/>
+              <a:ahLst/>
+              <a:cxnLst/>
+              <a:rect r="r" b="b" t="t" l="l"/>
+              <a:pathLst>
+                <a:path h="380667" w="380667">
+                  <a:moveTo>
+                    <a:pt x="0" y="0"/>
+                  </a:moveTo>
+                  <a:lnTo>
+                    <a:pt x="380666" y="0"/>
+                  </a:lnTo>
+                  <a:lnTo>
+                    <a:pt x="380666" y="380666"/>
+                  </a:lnTo>
+                  <a:lnTo>
+                    <a:pt x="0" y="380666"/>
+                  </a:lnTo>
+                  <a:lnTo>
+                    <a:pt x="0" y="0"/>
+                  </a:lnTo>
+                  <a:close/>
+                </a:path>
+              </a:pathLst>
+            </a:custGeom>
+            <a:blipFill>
+              <a:blip r:embed="rId6">
+                <a:extLst>
+                  <a:ext uri="{96DAC541-7B7A-43D3-8B79-37D633B846F1}">
+                    <asvg:svgBlip xmlns:asvg="http://schemas.microsoft.com/office/drawing/2016/SVG/main" r:embed="rId7"/>
+                  </a:ext>
+                </a:extLst>
+              </a:blip>
+              <a:stretch>
+                <a:fillRect l="0" t="0" r="0" b="0"/>
+              </a:stretch>
+            </a:blipFill>
+          </p:spPr>
+        </p:sp>
+        <p:sp>
+          <p:nvSpPr>
+            <p:cNvPr name="AutoShape 10" id="10"/>
+            <p:cNvSpPr/>
+            <p:nvPr/>
+          </p:nvSpPr>
+          <p:spPr>
+            <a:xfrm>
+              <a:off x="592027" y="856272"/>
+              <a:ext cx="5393198" cy="0"/>
+            </a:xfrm>
+            <a:prstGeom prst="line">
+              <a:avLst/>
+            </a:prstGeom>
+            <a:ln cap="flat" w="38100">
+              <a:solidFill>
+                <a:srgbClr val="CABAE7"/>
+              </a:solidFill>
+              <a:prstDash val="solid"/>
+              <a:headEnd type="none" len="sm" w="sm"/>
+              <a:tailEnd type="none" len="sm" w="sm"/>
+            </a:ln>
+          </p:spPr>
+        </p:sp>
+        <p:grpSp>
+          <p:nvGrpSpPr>
+            <p:cNvPr name="Group 11" id="11"/>
+            <p:cNvGrpSpPr/>
+            <p:nvPr/>
+          </p:nvGrpSpPr>
+          <p:grpSpPr>
+            <a:xfrm rot="5400000">
+              <a:off x="136402" y="331553"/>
+              <a:ext cx="861895" cy="198788"/>
+              <a:chOff x="0" y="0"/>
+              <a:chExt cx="170251" cy="39267"/>
+            </a:xfrm>
+          </p:grpSpPr>
+          <p:sp>
+            <p:nvSpPr>
+              <p:cNvPr name="Freeform 12" id="12"/>
+              <p:cNvSpPr/>
+              <p:nvPr/>
+            </p:nvSpPr>
+            <p:spPr>
+              <a:xfrm flipH="false" flipV="false" rot="0">
+                <a:off x="0" y="0"/>
+                <a:ext cx="170251" cy="39267"/>
+              </a:xfrm>
+              <a:custGeom>
+                <a:avLst/>
+                <a:gdLst/>
+                <a:ahLst/>
+                <a:cxnLst/>
+                <a:rect r="r" b="b" t="t" l="l"/>
+                <a:pathLst>
+                  <a:path h="39267" w="170251">
+                    <a:moveTo>
+                      <a:pt x="19633" y="0"/>
+                    </a:moveTo>
+                    <a:lnTo>
+                      <a:pt x="150617" y="0"/>
+                    </a:lnTo>
+                    <a:cubicBezTo>
+                      <a:pt x="155825" y="0"/>
+                      <a:pt x="160818" y="2069"/>
+                      <a:pt x="164500" y="5750"/>
+                    </a:cubicBezTo>
+                    <a:cubicBezTo>
+                      <a:pt x="168182" y="9432"/>
+                      <a:pt x="170251" y="14426"/>
+                      <a:pt x="170251" y="19633"/>
+                    </a:cubicBezTo>
+                    <a:lnTo>
+                      <a:pt x="170251" y="19633"/>
+                    </a:lnTo>
+                    <a:cubicBezTo>
+                      <a:pt x="170251" y="30477"/>
+                      <a:pt x="161461" y="39267"/>
+                      <a:pt x="150617" y="39267"/>
+                    </a:cubicBezTo>
+                    <a:lnTo>
+                      <a:pt x="19633" y="39267"/>
+                    </a:lnTo>
+                    <a:cubicBezTo>
+                      <a:pt x="14426" y="39267"/>
+                      <a:pt x="9432" y="37198"/>
+                      <a:pt x="5750" y="33516"/>
+                    </a:cubicBezTo>
+                    <a:cubicBezTo>
+                      <a:pt x="2069" y="29834"/>
+                      <a:pt x="0" y="24841"/>
+                      <a:pt x="0" y="19633"/>
+                    </a:cubicBezTo>
+                    <a:lnTo>
+                      <a:pt x="0" y="19633"/>
+                    </a:lnTo>
+                    <a:cubicBezTo>
+                      <a:pt x="0" y="14426"/>
+                      <a:pt x="2069" y="9432"/>
+                      <a:pt x="5750" y="5750"/>
+                    </a:cubicBezTo>
+                    <a:cubicBezTo>
+                      <a:pt x="9432" y="2069"/>
+                      <a:pt x="14426" y="0"/>
+                      <a:pt x="19633" y="0"/>
+                    </a:cubicBezTo>
+                    <a:close/>
+                  </a:path>
+                </a:pathLst>
+              </a:custGeom>
+              <a:solidFill>
+                <a:srgbClr val="6E2AF5"/>
+              </a:solidFill>
+            </p:spPr>
+          </p:sp>
+          <p:sp>
+            <p:nvSpPr>
+              <p:cNvPr name="TextBox 13" id="13"/>
+              <p:cNvSpPr txBox="true"/>
+              <p:nvPr/>
+            </p:nvSpPr>
+            <p:spPr>
+              <a:xfrm>
+                <a:off x="0" y="-57150"/>
+                <a:ext cx="170251" cy="96417"/>
+              </a:xfrm>
+              <a:prstGeom prst="rect">
+                <a:avLst/>
+              </a:prstGeom>
+            </p:spPr>
+            <p:txBody>
+              <a:bodyPr anchor="ctr" rtlCol="false" tIns="50800" lIns="50800" bIns="50800" rIns="50800"/>
+              <a:lstStyle/>
+              <a:p>
+                <a:pPr algn="ctr">
+                  <a:lnSpc>
+                    <a:spcPts val="3122"/>
+                  </a:lnSpc>
+                </a:pPr>
+              </a:p>
+            </p:txBody>
+          </p:sp>
+        </p:grpSp>
+        <p:sp>
+          <p:nvSpPr>
+            <p:cNvPr name="TextBox 14" id="14"/>
+            <p:cNvSpPr txBox="true"/>
+            <p:nvPr/>
+          </p:nvSpPr>
+          <p:spPr>
+            <a:xfrm rot="0">
+              <a:off x="0" y="-19050"/>
+              <a:ext cx="5005192" cy="652665"/>
+            </a:xfrm>
+            <a:prstGeom prst="rect">
+              <a:avLst/>
+            </a:prstGeom>
+          </p:spPr>
+          <p:txBody>
+            <a:bodyPr anchor="t" rtlCol="false" tIns="0" lIns="0" bIns="0" rIns="0">
+              <a:spAutoFit/>
+            </a:bodyPr>
+            <a:lstStyle/>
+            <a:p>
+              <a:pPr algn="ctr">
+                <a:lnSpc>
+                  <a:spcPts val="3779"/>
+                </a:lnSpc>
+              </a:pPr>
+              <a:r>
+                <a:rPr lang="en-US" sz="2700" b="true">
+                  <a:solidFill>
+                    <a:srgbClr val="2F0D8D"/>
+                  </a:solidFill>
+                  <a:latin typeface="Helvetica World Bold"/>
+                  <a:ea typeface="Helvetica World Bold"/>
+                  <a:cs typeface="Helvetica World Bold"/>
+                  <a:sym typeface="Helvetica World Bold"/>
+                </a:rPr>
+                <a:t>Images</a:t>
+              </a:r>
+            </a:p>
+          </p:txBody>
+        </p:sp>
+      </p:grpSp>
+      <p:grpSp>
+        <p:nvGrpSpPr>
+          <p:cNvPr name="Group 15" id="15"/>
+          <p:cNvGrpSpPr/>
+          <p:nvPr/>
+        </p:nvGrpSpPr>
+        <p:grpSpPr>
+          <a:xfrm rot="0">
+            <a:off x="11211119" y="4197405"/>
+            <a:ext cx="4752324" cy="789171"/>
+            <a:chOff x="0" y="0"/>
+            <a:chExt cx="6336432" cy="1052228"/>
+          </a:xfrm>
+        </p:grpSpPr>
+        <p:sp>
+          <p:nvSpPr>
+            <p:cNvPr name="Freeform 16" id="16"/>
+            <p:cNvSpPr/>
+            <p:nvPr/>
+          </p:nvSpPr>
+          <p:spPr>
+            <a:xfrm flipH="false" flipV="false" rot="0">
+              <a:off x="5955765" y="671562"/>
+              <a:ext cx="380667" cy="380667"/>
+            </a:xfrm>
+            <a:custGeom>
+              <a:avLst/>
+              <a:gdLst/>
+              <a:ahLst/>
+              <a:cxnLst/>
+              <a:rect r="r" b="b" t="t" l="l"/>
+              <a:pathLst>
+                <a:path h="380667" w="380667">
+                  <a:moveTo>
+                    <a:pt x="0" y="0"/>
+                  </a:moveTo>
+                  <a:lnTo>
+                    <a:pt x="380667" y="0"/>
+                  </a:lnTo>
+                  <a:lnTo>
+                    <a:pt x="380667" y="380666"/>
+                  </a:lnTo>
+                  <a:lnTo>
+                    <a:pt x="0" y="380666"/>
+                  </a:lnTo>
+                  <a:lnTo>
+                    <a:pt x="0" y="0"/>
+                  </a:lnTo>
+                  <a:close/>
+                </a:path>
+              </a:pathLst>
+            </a:custGeom>
+            <a:blipFill>
+              <a:blip r:embed="rId6">
+                <a:extLst>
+                  <a:ext uri="{96DAC541-7B7A-43D3-8B79-37D633B846F1}">
+                    <asvg:svgBlip xmlns:asvg="http://schemas.microsoft.com/office/drawing/2016/SVG/main" r:embed="rId7"/>
+                  </a:ext>
+                </a:extLst>
+              </a:blip>
+              <a:stretch>
+                <a:fillRect l="0" t="0" r="0" b="0"/>
+              </a:stretch>
+            </a:blipFill>
+          </p:spPr>
+        </p:sp>
+        <p:sp>
+          <p:nvSpPr>
+            <p:cNvPr name="AutoShape 17" id="17"/>
+            <p:cNvSpPr/>
+            <p:nvPr/>
+          </p:nvSpPr>
+          <p:spPr>
+            <a:xfrm>
+              <a:off x="752900" y="856272"/>
+              <a:ext cx="5393198" cy="0"/>
+            </a:xfrm>
+            <a:prstGeom prst="line">
+              <a:avLst/>
+            </a:prstGeom>
+            <a:ln cap="flat" w="38100">
+              <a:solidFill>
+                <a:srgbClr val="CABAE7"/>
+              </a:solidFill>
+              <a:prstDash val="solid"/>
+              <a:headEnd type="none" len="sm" w="sm"/>
+              <a:tailEnd type="none" len="sm" w="sm"/>
+            </a:ln>
+          </p:spPr>
+        </p:sp>
+        <p:grpSp>
+          <p:nvGrpSpPr>
+            <p:cNvPr name="Group 18" id="18"/>
+            <p:cNvGrpSpPr/>
+            <p:nvPr/>
+          </p:nvGrpSpPr>
+          <p:grpSpPr>
+            <a:xfrm rot="5400000">
+              <a:off x="297275" y="331553"/>
+              <a:ext cx="861895" cy="198788"/>
+              <a:chOff x="0" y="0"/>
+              <a:chExt cx="170251" cy="39267"/>
+            </a:xfrm>
+          </p:grpSpPr>
+          <p:sp>
+            <p:nvSpPr>
+              <p:cNvPr name="Freeform 19" id="19"/>
+              <p:cNvSpPr/>
+              <p:nvPr/>
+            </p:nvSpPr>
+            <p:spPr>
+              <a:xfrm flipH="false" flipV="false" rot="0">
+                <a:off x="0" y="0"/>
+                <a:ext cx="170251" cy="39267"/>
+              </a:xfrm>
+              <a:custGeom>
+                <a:avLst/>
+                <a:gdLst/>
+                <a:ahLst/>
+                <a:cxnLst/>
+                <a:rect r="r" b="b" t="t" l="l"/>
+                <a:pathLst>
+                  <a:path h="39267" w="170251">
+                    <a:moveTo>
+                      <a:pt x="19633" y="0"/>
+                    </a:moveTo>
+                    <a:lnTo>
+                      <a:pt x="150617" y="0"/>
+                    </a:lnTo>
+                    <a:cubicBezTo>
+                      <a:pt x="155825" y="0"/>
+                      <a:pt x="160818" y="2069"/>
+                      <a:pt x="164500" y="5750"/>
+                    </a:cubicBezTo>
+                    <a:cubicBezTo>
+                      <a:pt x="168182" y="9432"/>
+                      <a:pt x="170251" y="14426"/>
+                      <a:pt x="170251" y="19633"/>
+                    </a:cubicBezTo>
+                    <a:lnTo>
+                      <a:pt x="170251" y="19633"/>
+                    </a:lnTo>
+                    <a:cubicBezTo>
+                      <a:pt x="170251" y="30477"/>
+                      <a:pt x="161461" y="39267"/>
+                      <a:pt x="150617" y="39267"/>
+                    </a:cubicBezTo>
+                    <a:lnTo>
+                      <a:pt x="19633" y="39267"/>
+                    </a:lnTo>
+                    <a:cubicBezTo>
+                      <a:pt x="14426" y="39267"/>
+                      <a:pt x="9432" y="37198"/>
+                      <a:pt x="5750" y="33516"/>
+                    </a:cubicBezTo>
+                    <a:cubicBezTo>
+                      <a:pt x="2069" y="29834"/>
+                      <a:pt x="0" y="24841"/>
+                      <a:pt x="0" y="19633"/>
+                    </a:cubicBezTo>
+                    <a:lnTo>
+                      <a:pt x="0" y="19633"/>
+                    </a:lnTo>
+                    <a:cubicBezTo>
+                      <a:pt x="0" y="14426"/>
+                      <a:pt x="2069" y="9432"/>
+                      <a:pt x="5750" y="5750"/>
+                    </a:cubicBezTo>
+                    <a:cubicBezTo>
+                      <a:pt x="9432" y="2069"/>
+                      <a:pt x="14426" y="0"/>
+                      <a:pt x="19633" y="0"/>
+                    </a:cubicBezTo>
+                    <a:close/>
+                  </a:path>
+                </a:pathLst>
+              </a:custGeom>
+              <a:solidFill>
+                <a:srgbClr val="6E2AF5"/>
+              </a:solidFill>
+            </p:spPr>
+          </p:sp>
+          <p:sp>
+            <p:nvSpPr>
+              <p:cNvPr name="TextBox 20" id="20"/>
+              <p:cNvSpPr txBox="true"/>
+              <p:nvPr/>
+            </p:nvSpPr>
+            <p:spPr>
+              <a:xfrm>
+                <a:off x="0" y="-57150"/>
+                <a:ext cx="170251" cy="96417"/>
+              </a:xfrm>
+              <a:prstGeom prst="rect">
+                <a:avLst/>
+              </a:prstGeom>
+            </p:spPr>
+            <p:txBody>
+              <a:bodyPr anchor="ctr" rtlCol="false" tIns="50800" lIns="50800" bIns="50800" rIns="50800"/>
+              <a:lstStyle/>
+              <a:p>
+                <a:pPr algn="ctr">
+                  <a:lnSpc>
+                    <a:spcPts val="3122"/>
+                  </a:lnSpc>
+                </a:pPr>
+              </a:p>
+            </p:txBody>
+          </p:sp>
+        </p:grpSp>
+        <p:sp>
+          <p:nvSpPr>
+            <p:cNvPr name="TextBox 21" id="21"/>
+            <p:cNvSpPr txBox="true"/>
+            <p:nvPr/>
+          </p:nvSpPr>
+          <p:spPr>
+            <a:xfrm rot="0">
+              <a:off x="0" y="-19050"/>
+              <a:ext cx="5005192" cy="652665"/>
+            </a:xfrm>
+            <a:prstGeom prst="rect">
+              <a:avLst/>
+            </a:prstGeom>
+          </p:spPr>
+          <p:txBody>
+            <a:bodyPr anchor="t" rtlCol="false" tIns="0" lIns="0" bIns="0" rIns="0">
+              <a:spAutoFit/>
+            </a:bodyPr>
+            <a:lstStyle/>
+            <a:p>
+              <a:pPr algn="ctr">
+                <a:lnSpc>
+                  <a:spcPts val="3779"/>
+                </a:lnSpc>
+              </a:pPr>
+              <a:r>
+                <a:rPr lang="en-US" sz="2700" b="true">
+                  <a:solidFill>
+                    <a:srgbClr val="2F0D8D"/>
+                  </a:solidFill>
+                  <a:latin typeface="Helvetica World Bold"/>
+                  <a:ea typeface="Helvetica World Bold"/>
+                  <a:cs typeface="Helvetica World Bold"/>
+                  <a:sym typeface="Helvetica World Bold"/>
+                </a:rPr>
+                <a:t>Charts</a:t>
+              </a:r>
+            </a:p>
+          </p:txBody>
+        </p:sp>
+      </p:grpSp>
+      <p:sp>
+        <p:nvSpPr>
+          <p:cNvPr name="TextBox 22" id="22"/>
+          <p:cNvSpPr txBox="true"/>
+          <p:nvPr/>
+        </p:nvSpPr>
+        <p:spPr>
+          <a:xfrm rot="0">
+            <a:off x="1028661" y="1836079"/>
+            <a:ext cx="10918212" cy="1944369"/>
+          </a:xfrm>
+          <a:prstGeom prst="rect">
+            <a:avLst/>
+          </a:prstGeom>
+        </p:spPr>
+        <p:txBody>
+          <a:bodyPr anchor="t" rtlCol="false" tIns="0" lIns="0" bIns="0" rIns="0">
+            <a:spAutoFit/>
+          </a:bodyPr>
+          <a:lstStyle/>
+          <a:p>
+            <a:pPr algn="l">
+              <a:lnSpc>
+                <a:spcPts val="3080"/>
+              </a:lnSpc>
+            </a:pPr>
+          </a:p>
+          <a:p>
+            <a:pPr algn="l">
+              <a:lnSpc>
+                <a:spcPts val="3080"/>
+              </a:lnSpc>
+            </a:pPr>
+            <a:r>
+              <a:rPr lang="en-US" sz="2200">
+                <a:solidFill>
+                  <a:srgbClr val="483768"/>
+                </a:solidFill>
+                <a:latin typeface="Helvetica World"/>
+                <a:ea typeface="Helvetica World"/>
+                <a:cs typeface="Helvetica World"/>
+                <a:sym typeface="Helvetica World"/>
+              </a:rPr>
+              <a:t>Methodology and Flowcharts</a:t>
+            </a:r>
+          </a:p>
+          <a:p>
+            <a:pPr algn="l">
+              <a:lnSpc>
+                <a:spcPts val="3080"/>
+              </a:lnSpc>
+            </a:pPr>
+            <a:r>
+              <a:rPr lang="en-US" sz="2200">
+                <a:solidFill>
+                  <a:srgbClr val="483768"/>
+                </a:solidFill>
+                <a:latin typeface="Helvetica World"/>
+                <a:ea typeface="Helvetica World"/>
+                <a:cs typeface="Helvetica World"/>
+                <a:sym typeface="Helvetica World"/>
+              </a:rPr>
+              <a:t>Implementation Process, Technologies (languages, frameworks, devices etc.)</a:t>
+            </a:r>
+          </a:p>
+          <a:p>
+            <a:pPr algn="l">
+              <a:lnSpc>
+                <a:spcPts val="3080"/>
+              </a:lnSpc>
+            </a:pPr>
+            <a:r>
+              <a:rPr lang="en-US" sz="2200">
+                <a:solidFill>
+                  <a:srgbClr val="483768"/>
+                </a:solidFill>
+                <a:latin typeface="Helvetica World"/>
+                <a:ea typeface="Helvetica World"/>
+                <a:cs typeface="Helvetica World"/>
+                <a:sym typeface="Helvetica World"/>
+              </a:rPr>
+              <a:t>Optional: Images, Demo screenshots, Demo link</a:t>
+            </a:r>
+          </a:p>
+          <a:p>
+            <a:pPr algn="l">
+              <a:lnSpc>
+                <a:spcPts val="3080"/>
+              </a:lnSpc>
+            </a:pPr>
+          </a:p>
+        </p:txBody>
+      </p:sp>
+      <p:grpSp>
+        <p:nvGrpSpPr>
+          <p:cNvPr name="Group 23" id="23"/>
+          <p:cNvGrpSpPr/>
+          <p:nvPr/>
+        </p:nvGrpSpPr>
+        <p:grpSpPr>
+          <a:xfrm rot="0">
+            <a:off x="1028661" y="3725442"/>
+            <a:ext cx="1156034" cy="110014"/>
+            <a:chOff x="0" y="0"/>
+            <a:chExt cx="304470" cy="28975"/>
+          </a:xfrm>
+        </p:grpSpPr>
+        <p:sp>
+          <p:nvSpPr>
+            <p:cNvPr name="Freeform 24" id="24"/>
+            <p:cNvSpPr/>
+            <p:nvPr/>
+          </p:nvSpPr>
+          <p:spPr>
+            <a:xfrm flipH="false" flipV="false" rot="0">
+              <a:off x="0" y="0"/>
+              <a:ext cx="304470" cy="28975"/>
+            </a:xfrm>
+            <a:custGeom>
+              <a:avLst/>
+              <a:gdLst/>
+              <a:ahLst/>
+              <a:cxnLst/>
+              <a:rect r="r" b="b" t="t" l="l"/>
+              <a:pathLst>
+                <a:path h="28975" w="304470">
+                  <a:moveTo>
+                    <a:pt x="14487" y="0"/>
+                  </a:moveTo>
+                  <a:lnTo>
+                    <a:pt x="289982" y="0"/>
+                  </a:lnTo>
+                  <a:cubicBezTo>
+                    <a:pt x="297984" y="0"/>
+                    <a:pt x="304470" y="6486"/>
+                    <a:pt x="304470" y="14487"/>
+                  </a:cubicBezTo>
+                  <a:lnTo>
+                    <a:pt x="304470" y="14487"/>
+                  </a:lnTo>
+                  <a:cubicBezTo>
+                    <a:pt x="304470" y="22489"/>
+                    <a:pt x="297984" y="28975"/>
+                    <a:pt x="289982" y="28975"/>
+                  </a:cubicBezTo>
+                  <a:lnTo>
+                    <a:pt x="14487" y="28975"/>
+                  </a:lnTo>
+                  <a:cubicBezTo>
+                    <a:pt x="6486" y="28975"/>
+                    <a:pt x="0" y="22489"/>
+                    <a:pt x="0" y="14487"/>
+                  </a:cubicBezTo>
+                  <a:lnTo>
+                    <a:pt x="0" y="14487"/>
+                  </a:lnTo>
+                  <a:cubicBezTo>
+                    <a:pt x="0" y="6486"/>
+                    <a:pt x="6486" y="0"/>
+                    <a:pt x="14487" y="0"/>
+                  </a:cubicBezTo>
+                  <a:close/>
+                </a:path>
+              </a:pathLst>
+            </a:custGeom>
+            <a:solidFill>
+              <a:srgbClr val="B58FFF"/>
+            </a:solidFill>
+          </p:spPr>
+        </p:sp>
+        <p:sp>
+          <p:nvSpPr>
+            <p:cNvPr name="TextBox 25" id="25"/>
+            <p:cNvSpPr txBox="true"/>
+            <p:nvPr/>
+          </p:nvSpPr>
+          <p:spPr>
+            <a:xfrm>
+              <a:off x="0" y="-57150"/>
+              <a:ext cx="304470" cy="86125"/>
+            </a:xfrm>
+            <a:prstGeom prst="rect">
+              <a:avLst/>
+            </a:prstGeom>
+          </p:spPr>
+          <p:txBody>
+            <a:bodyPr anchor="ctr" rtlCol="false" tIns="50800" lIns="50800" bIns="50800" rIns="50800"/>
+            <a:lstStyle/>
+            <a:p>
+              <a:pPr algn="ctr">
+                <a:lnSpc>
+                  <a:spcPts val="3122"/>
+                </a:lnSpc>
+              </a:pPr>
+            </a:p>
+          </p:txBody>
+        </p:sp>
+      </p:grpSp>
+      <p:grpSp>
+        <p:nvGrpSpPr>
+          <p:cNvPr name="Group 26" id="26"/>
+          <p:cNvGrpSpPr/>
+          <p:nvPr/>
+        </p:nvGrpSpPr>
+        <p:grpSpPr>
+          <a:xfrm rot="0">
+            <a:off x="1028661" y="1883704"/>
+            <a:ext cx="1156034" cy="110014"/>
+            <a:chOff x="0" y="0"/>
+            <a:chExt cx="304470" cy="28975"/>
+          </a:xfrm>
+        </p:grpSpPr>
+        <p:sp>
+          <p:nvSpPr>
+            <p:cNvPr name="Freeform 27" id="27"/>
+            <p:cNvSpPr/>
+            <p:nvPr/>
+          </p:nvSpPr>
+          <p:spPr>
+            <a:xfrm flipH="false" flipV="false" rot="0">
+              <a:off x="0" y="0"/>
+              <a:ext cx="304470" cy="28975"/>
+            </a:xfrm>
+            <a:custGeom>
+              <a:avLst/>
+              <a:gdLst/>
+              <a:ahLst/>
+              <a:cxnLst/>
+              <a:rect r="r" b="b" t="t" l="l"/>
+              <a:pathLst>
+                <a:path h="28975" w="304470">
+                  <a:moveTo>
+                    <a:pt x="14487" y="0"/>
+                  </a:moveTo>
+                  <a:lnTo>
+                    <a:pt x="289982" y="0"/>
+                  </a:lnTo>
+                  <a:cubicBezTo>
+                    <a:pt x="297984" y="0"/>
+                    <a:pt x="304470" y="6486"/>
+                    <a:pt x="304470" y="14487"/>
+                  </a:cubicBezTo>
+                  <a:lnTo>
+                    <a:pt x="304470" y="14487"/>
+                  </a:lnTo>
+                  <a:cubicBezTo>
+                    <a:pt x="304470" y="22489"/>
+                    <a:pt x="297984" y="28975"/>
+                    <a:pt x="289982" y="28975"/>
+                  </a:cubicBezTo>
+                  <a:lnTo>
+                    <a:pt x="14487" y="28975"/>
+                  </a:lnTo>
+                  <a:cubicBezTo>
+                    <a:pt x="6486" y="28975"/>
+                    <a:pt x="0" y="22489"/>
+                    <a:pt x="0" y="14487"/>
+                  </a:cubicBezTo>
+                  <a:lnTo>
+                    <a:pt x="0" y="14487"/>
+                  </a:lnTo>
+                  <a:cubicBezTo>
+                    <a:pt x="0" y="6486"/>
+                    <a:pt x="6486" y="0"/>
+                    <a:pt x="14487" y="0"/>
+                  </a:cubicBezTo>
+                  <a:close/>
+                </a:path>
+              </a:pathLst>
+            </a:custGeom>
+            <a:solidFill>
+              <a:srgbClr val="B58FFF"/>
+            </a:solidFill>
+          </p:spPr>
+        </p:sp>
+        <p:sp>
+          <p:nvSpPr>
+            <p:cNvPr name="TextBox 28" id="28"/>
+            <p:cNvSpPr txBox="true"/>
+            <p:nvPr/>
+          </p:nvSpPr>
+          <p:spPr>
+            <a:xfrm>
+              <a:off x="0" y="-57150"/>
+              <a:ext cx="304470" cy="86125"/>
+            </a:xfrm>
+            <a:prstGeom prst="rect">
+              <a:avLst/>
+            </a:prstGeom>
+          </p:spPr>
+          <p:txBody>
+            <a:bodyPr anchor="ctr" rtlCol="false" tIns="50800" lIns="50800" bIns="50800" rIns="50800"/>
+            <a:lstStyle/>
+            <a:p>
+              <a:pPr algn="ctr">
+                <a:lnSpc>
+                  <a:spcPts val="3122"/>
+                </a:lnSpc>
+              </a:pPr>
+            </a:p>
+          </p:txBody>
+        </p:sp>
+      </p:grpSp>
+    </p:spTree>
+  </p:cSld>
+  <p:clrMapOvr>
+    <a:masterClrMapping/>
+  </p:clrMapOvr>
+</p:sld>
+</file>
+
+<file path=ppt/slides/slide6.xml><?xml version="1.0" encoding="utf-8"?>
+<p:sld xmlns:p="http://schemas.openxmlformats.org/presentationml/2006/main" xmlns:a="http://schemas.openxmlformats.org/drawingml/2006/main" xmlns:r="http://schemas.openxmlformats.org/officeDocument/2006/relationships">
+  <p:cSld>
+    <p:bg>
+      <p:bgPr>
+        <a:solidFill>
+          <a:srgbClr val="F7F7FD"/>
+        </a:solidFill>
+      </p:bgPr>
+    </p:bg>
+    <p:spTree>
+      <p:nvGrpSpPr>
+        <p:cNvPr id="1" name=""/>
+        <p:cNvGrpSpPr/>
+        <p:nvPr/>
+      </p:nvGrpSpPr>
+      <p:grpSpPr>
+        <a:xfrm>
+          <a:off x="0" y="0"/>
+          <a:ext cx="0" cy="0"/>
+          <a:chOff x="0" y="0"/>
+          <a:chExt cx="0" cy="0"/>
+        </a:xfrm>
+      </p:grpSpPr>
+      <p:sp>
+        <p:nvSpPr>
+          <p:cNvPr name="Freeform 2" id="2"/>
+          <p:cNvSpPr/>
+          <p:nvPr/>
+        </p:nvSpPr>
+        <p:spPr>
+          <a:xfrm flipH="false" flipV="false" rot="0">
+            <a:off x="-393678" y="-11430"/>
+            <a:ext cx="18681678" cy="10531796"/>
+          </a:xfrm>
+          <a:custGeom>
+            <a:avLst/>
+            <a:gdLst/>
+            <a:ahLst/>
+            <a:cxnLst/>
+            <a:rect r="r" b="b" t="t" l="l"/>
+            <a:pathLst>
+              <a:path h="10531796" w="18681678">
+                <a:moveTo>
+                  <a:pt x="0" y="0"/>
+                </a:moveTo>
+                <a:lnTo>
+                  <a:pt x="18681678" y="0"/>
+                </a:lnTo>
+                <a:lnTo>
+                  <a:pt x="18681678" y="10531796"/>
+                </a:lnTo>
+                <a:lnTo>
+                  <a:pt x="0" y="10531796"/>
+                </a:lnTo>
+                <a:lnTo>
+                  <a:pt x="0" y="0"/>
+                </a:lnTo>
+                <a:close/>
+              </a:path>
+            </a:pathLst>
+          </a:custGeom>
+          <a:blipFill>
+            <a:blip r:embed="rId2"/>
+            <a:stretch>
+              <a:fillRect l="0" t="0" r="0" b="0"/>
+            </a:stretch>
+          </a:blipFill>
+        </p:spPr>
+      </p:sp>
+      <p:sp>
+        <p:nvSpPr>
+          <p:cNvPr name="TextBox 3" id="3"/>
+          <p:cNvSpPr txBox="true"/>
+          <p:nvPr/>
+        </p:nvSpPr>
+        <p:spPr>
+          <a:xfrm rot="0">
+            <a:off x="1350077" y="413530"/>
+            <a:ext cx="16367640" cy="771525"/>
+          </a:xfrm>
+          <a:prstGeom prst="rect">
+            <a:avLst/>
+          </a:prstGeom>
+        </p:spPr>
+        <p:txBody>
+          <a:bodyPr anchor="t" rtlCol="false" tIns="0" lIns="0" bIns="0" rIns="0">
+            <a:spAutoFit/>
+          </a:bodyPr>
+          <a:lstStyle/>
+          <a:p>
+            <a:pPr algn="l">
+              <a:lnSpc>
+                <a:spcPts val="6299"/>
+              </a:lnSpc>
+            </a:pPr>
+            <a:r>
+              <a:rPr lang="en-US" sz="4500">
+                <a:solidFill>
+                  <a:srgbClr val="632EC9"/>
+                </a:solidFill>
+                <a:latin typeface="League Spartan"/>
+                <a:ea typeface="League Spartan"/>
+                <a:cs typeface="League Spartan"/>
+                <a:sym typeface="League Spartan"/>
+              </a:rPr>
+              <a:t>Impact and Benefits</a:t>
+            </a:r>
+          </a:p>
+        </p:txBody>
+      </p:sp>
+      <p:sp>
+        <p:nvSpPr>
+          <p:cNvPr name="Freeform 4" id="4"/>
+          <p:cNvSpPr/>
+          <p:nvPr/>
+        </p:nvSpPr>
+        <p:spPr>
+          <a:xfrm flipH="false" flipV="false" rot="0">
+            <a:off x="17034205" y="297395"/>
+            <a:ext cx="925524" cy="963762"/>
+          </a:xfrm>
+          <a:custGeom>
+            <a:avLst/>
+            <a:gdLst/>
+            <a:ahLst/>
+            <a:cxnLst/>
+            <a:rect r="r" b="b" t="t" l="l"/>
+            <a:pathLst>
+              <a:path h="963762" w="925524">
+                <a:moveTo>
+                  <a:pt x="0" y="0"/>
+                </a:moveTo>
+                <a:lnTo>
+                  <a:pt x="925524" y="0"/>
+                </a:lnTo>
+                <a:lnTo>
+                  <a:pt x="925524" y="963763"/>
+                </a:lnTo>
+                <a:lnTo>
+                  <a:pt x="0" y="963763"/>
+                </a:lnTo>
+                <a:lnTo>
+                  <a:pt x="0" y="0"/>
+                </a:lnTo>
+                <a:close/>
+              </a:path>
+            </a:pathLst>
+          </a:custGeom>
+          <a:blipFill>
+            <a:blip r:embed="rId3"/>
+            <a:stretch>
+              <a:fillRect l="-8247" t="-5733" r="-147202" b="0"/>
+            </a:stretch>
+          </a:blipFill>
+        </p:spPr>
+      </p:sp>
+      <p:grpSp>
+        <p:nvGrpSpPr>
+          <p:cNvPr name="Group 5" id="5"/>
+          <p:cNvGrpSpPr/>
+          <p:nvPr/>
+        </p:nvGrpSpPr>
+        <p:grpSpPr>
+          <a:xfrm rot="0">
+            <a:off x="1028661" y="1321157"/>
+            <a:ext cx="16903200" cy="672561"/>
+            <a:chOff x="0" y="0"/>
+            <a:chExt cx="22537600" cy="896747"/>
+          </a:xfrm>
+        </p:grpSpPr>
+        <p:sp>
+          <p:nvSpPr>
+            <p:cNvPr name="AutoShape 6" id="6"/>
+            <p:cNvSpPr/>
+            <p:nvPr/>
+          </p:nvSpPr>
+          <p:spPr>
+            <a:xfrm>
+              <a:off x="49" y="411875"/>
+              <a:ext cx="22290554" cy="42849"/>
             </a:xfrm>
             <a:prstGeom prst="line">
               <a:avLst/>
             </a:prstGeom>
             <a:ln cap="flat" w="50800">
               <a:solidFill>
-                <a:srgbClr val="B58FFF"/>
+                <a:srgbClr val="6E2AF5"/>
               </a:solidFill>
               <a:prstDash val="solid"/>
               <a:headEnd type="none" len="sm" w="sm"/>
@@ -5013,14 +9822,14 @@
         </p:sp>
         <p:sp>
           <p:nvSpPr>
-            <p:cNvPr name="Freeform 53" id="53"/>
+            <p:cNvPr name="Freeform 7" id="7"/>
             <p:cNvSpPr/>
             <p:nvPr/>
           </p:nvSpPr>
           <p:spPr>
             <a:xfrm flipH="false" flipV="false" rot="0">
-              <a:off x="13431975" y="800398"/>
-              <a:ext cx="780983" cy="780983"/>
+              <a:off x="21640852" y="0"/>
+              <a:ext cx="896747" cy="896747"/>
             </a:xfrm>
             <a:custGeom>
               <a:avLst/>
@@ -5029,18 +9838,18 @@
               <a:cxnLst/>
               <a:rect r="r" b="b" t="t" l="l"/>
               <a:pathLst>
-                <a:path h="780983" w="780983">
+                <a:path h="896747" w="896747">
                   <a:moveTo>
                     <a:pt x="0" y="0"/>
                   </a:moveTo>
                   <a:lnTo>
-                    <a:pt x="780983" y="0"/>
-                  </a:lnTo>
-                  <a:lnTo>
-                    <a:pt x="780983" y="780983"/>
-                  </a:lnTo>
-                  <a:lnTo>
-                    <a:pt x="0" y="780983"/>
+                    <a:pt x="896748" y="0"/>
+                  </a:lnTo>
+                  <a:lnTo>
+                    <a:pt x="896748" y="896747"/>
+                  </a:lnTo>
+                  <a:lnTo>
+                    <a:pt x="0" y="896747"/>
                   </a:lnTo>
                   <a:lnTo>
                     <a:pt x="0" y="0"/>
@@ -5050,35 +9859,509 @@
               </a:pathLst>
             </a:custGeom>
             <a:blipFill>
-              <a:blip r:embed="rId14"/>
+              <a:blip r:embed="rId4">
+                <a:extLst>
+                  <a:ext uri="{96DAC541-7B7A-43D3-8B79-37D633B846F1}">
+                    <asvg:svgBlip xmlns:asvg="http://schemas.microsoft.com/office/drawing/2016/SVG/main" r:embed="rId5"/>
+                  </a:ext>
+                </a:extLst>
+              </a:blip>
               <a:stretch>
                 <a:fillRect l="0" t="0" r="0" b="0"/>
               </a:stretch>
             </a:blipFill>
-            <a:ln cap="sq">
-              <a:noFill/>
-              <a:prstDash val="solid"/>
-              <a:miter/>
-            </a:ln>
+          </p:spPr>
+        </p:sp>
+      </p:grpSp>
+      <p:grpSp>
+        <p:nvGrpSpPr>
+          <p:cNvPr name="Group 8" id="8"/>
+          <p:cNvGrpSpPr/>
+          <p:nvPr/>
+        </p:nvGrpSpPr>
+        <p:grpSpPr>
+          <a:xfrm rot="0">
+            <a:off x="474391" y="2127068"/>
+            <a:ext cx="14016061" cy="1495332"/>
+            <a:chOff x="0" y="0"/>
+            <a:chExt cx="18688081" cy="1993776"/>
+          </a:xfrm>
+        </p:grpSpPr>
+        <p:sp>
+          <p:nvSpPr>
+            <p:cNvPr name="Freeform 9" id="9"/>
+            <p:cNvSpPr/>
+            <p:nvPr/>
+          </p:nvSpPr>
+          <p:spPr>
+            <a:xfrm flipH="false" flipV="false" rot="0">
+              <a:off x="18146878" y="954776"/>
+              <a:ext cx="541203" cy="541203"/>
+            </a:xfrm>
+            <a:custGeom>
+              <a:avLst/>
+              <a:gdLst/>
+              <a:ahLst/>
+              <a:cxnLst/>
+              <a:rect r="r" b="b" t="t" l="l"/>
+              <a:pathLst>
+                <a:path h="541203" w="541203">
+                  <a:moveTo>
+                    <a:pt x="0" y="0"/>
+                  </a:moveTo>
+                  <a:lnTo>
+                    <a:pt x="541203" y="0"/>
+                  </a:lnTo>
+                  <a:lnTo>
+                    <a:pt x="541203" y="541204"/>
+                  </a:lnTo>
+                  <a:lnTo>
+                    <a:pt x="0" y="541204"/>
+                  </a:lnTo>
+                  <a:lnTo>
+                    <a:pt x="0" y="0"/>
+                  </a:lnTo>
+                  <a:close/>
+                </a:path>
+              </a:pathLst>
+            </a:custGeom>
+            <a:blipFill>
+              <a:blip r:embed="rId6">
+                <a:extLst>
+                  <a:ext uri="{96DAC541-7B7A-43D3-8B79-37D633B846F1}">
+                    <asvg:svgBlip xmlns:asvg="http://schemas.microsoft.com/office/drawing/2016/SVG/main" r:embed="rId7"/>
+                  </a:ext>
+                </a:extLst>
+              </a:blip>
+              <a:stretch>
+                <a:fillRect l="0" t="0" r="0" b="0"/>
+              </a:stretch>
+            </a:blipFill>
           </p:spPr>
         </p:sp>
         <p:sp>
           <p:nvSpPr>
-            <p:cNvPr name="AutoShape 54" id="54"/>
+            <p:cNvPr name="AutoShape 10" id="10"/>
             <p:cNvSpPr/>
             <p:nvPr/>
           </p:nvSpPr>
           <p:spPr>
-            <a:xfrm flipV="true">
-              <a:off x="12806875" y="747242"/>
-              <a:ext cx="0" cy="1014340"/>
+            <a:xfrm>
+              <a:off x="1194085" y="1217384"/>
+              <a:ext cx="17223395" cy="0"/>
             </a:xfrm>
             <a:prstGeom prst="line">
               <a:avLst/>
             </a:prstGeom>
             <a:ln cap="flat" w="50800">
               <a:solidFill>
-                <a:srgbClr val="B58FFF"/>
+                <a:srgbClr val="CABAE7"/>
+              </a:solidFill>
+              <a:prstDash val="solid"/>
+              <a:headEnd type="none" len="sm" w="sm"/>
+              <a:tailEnd type="none" len="sm" w="sm"/>
+            </a:ln>
+          </p:spPr>
+        </p:sp>
+        <p:grpSp>
+          <p:nvGrpSpPr>
+            <p:cNvPr name="Group 11" id="11"/>
+            <p:cNvGrpSpPr/>
+            <p:nvPr/>
+          </p:nvGrpSpPr>
+          <p:grpSpPr>
+            <a:xfrm rot="5400000">
+              <a:off x="546311" y="471378"/>
+              <a:ext cx="1225378" cy="282622"/>
+              <a:chOff x="0" y="0"/>
+              <a:chExt cx="170251" cy="39267"/>
+            </a:xfrm>
+          </p:grpSpPr>
+          <p:sp>
+            <p:nvSpPr>
+              <p:cNvPr name="Freeform 12" id="12"/>
+              <p:cNvSpPr/>
+              <p:nvPr/>
+            </p:nvSpPr>
+            <p:spPr>
+              <a:xfrm flipH="false" flipV="false" rot="0">
+                <a:off x="0" y="0"/>
+                <a:ext cx="170251" cy="39267"/>
+              </a:xfrm>
+              <a:custGeom>
+                <a:avLst/>
+                <a:gdLst/>
+                <a:ahLst/>
+                <a:cxnLst/>
+                <a:rect r="r" b="b" t="t" l="l"/>
+                <a:pathLst>
+                  <a:path h="39267" w="170251">
+                    <a:moveTo>
+                      <a:pt x="19633" y="0"/>
+                    </a:moveTo>
+                    <a:lnTo>
+                      <a:pt x="150617" y="0"/>
+                    </a:lnTo>
+                    <a:cubicBezTo>
+                      <a:pt x="155825" y="0"/>
+                      <a:pt x="160818" y="2069"/>
+                      <a:pt x="164500" y="5750"/>
+                    </a:cubicBezTo>
+                    <a:cubicBezTo>
+                      <a:pt x="168182" y="9432"/>
+                      <a:pt x="170251" y="14426"/>
+                      <a:pt x="170251" y="19633"/>
+                    </a:cubicBezTo>
+                    <a:lnTo>
+                      <a:pt x="170251" y="19633"/>
+                    </a:lnTo>
+                    <a:cubicBezTo>
+                      <a:pt x="170251" y="30477"/>
+                      <a:pt x="161461" y="39267"/>
+                      <a:pt x="150617" y="39267"/>
+                    </a:cubicBezTo>
+                    <a:lnTo>
+                      <a:pt x="19633" y="39267"/>
+                    </a:lnTo>
+                    <a:cubicBezTo>
+                      <a:pt x="14426" y="39267"/>
+                      <a:pt x="9432" y="37198"/>
+                      <a:pt x="5750" y="33516"/>
+                    </a:cubicBezTo>
+                    <a:cubicBezTo>
+                      <a:pt x="2069" y="29834"/>
+                      <a:pt x="0" y="24841"/>
+                      <a:pt x="0" y="19633"/>
+                    </a:cubicBezTo>
+                    <a:lnTo>
+                      <a:pt x="0" y="19633"/>
+                    </a:lnTo>
+                    <a:cubicBezTo>
+                      <a:pt x="0" y="14426"/>
+                      <a:pt x="2069" y="9432"/>
+                      <a:pt x="5750" y="5750"/>
+                    </a:cubicBezTo>
+                    <a:cubicBezTo>
+                      <a:pt x="9432" y="2069"/>
+                      <a:pt x="14426" y="0"/>
+                      <a:pt x="19633" y="0"/>
+                    </a:cubicBezTo>
+                    <a:close/>
+                  </a:path>
+                </a:pathLst>
+              </a:custGeom>
+              <a:solidFill>
+                <a:srgbClr val="6E2AF5"/>
+              </a:solidFill>
+            </p:spPr>
+          </p:sp>
+          <p:sp>
+            <p:nvSpPr>
+              <p:cNvPr name="TextBox 13" id="13"/>
+              <p:cNvSpPr txBox="true"/>
+              <p:nvPr/>
+            </p:nvSpPr>
+            <p:spPr>
+              <a:xfrm>
+                <a:off x="0" y="-57150"/>
+                <a:ext cx="170251" cy="96417"/>
+              </a:xfrm>
+              <a:prstGeom prst="rect">
+                <a:avLst/>
+              </a:prstGeom>
+            </p:spPr>
+            <p:txBody>
+              <a:bodyPr anchor="ctr" rtlCol="false" tIns="72224" lIns="72224" bIns="72224" rIns="72224"/>
+              <a:lstStyle/>
+              <a:p>
+                <a:pPr algn="ctr">
+                  <a:lnSpc>
+                    <a:spcPts val="3122"/>
+                  </a:lnSpc>
+                </a:pPr>
+              </a:p>
+            </p:txBody>
+          </p:sp>
+        </p:grpSp>
+        <p:sp>
+          <p:nvSpPr>
+            <p:cNvPr name="TextBox 14" id="14"/>
+            <p:cNvSpPr txBox="true"/>
+            <p:nvPr/>
+          </p:nvSpPr>
+          <p:spPr>
+            <a:xfrm rot="0">
+              <a:off x="0" y="234519"/>
+              <a:ext cx="13409621" cy="652665"/>
+            </a:xfrm>
+            <a:prstGeom prst="rect">
+              <a:avLst/>
+            </a:prstGeom>
+          </p:spPr>
+          <p:txBody>
+            <a:bodyPr anchor="t" rtlCol="false" tIns="0" lIns="0" bIns="0" rIns="0">
+              <a:spAutoFit/>
+            </a:bodyPr>
+            <a:lstStyle/>
+            <a:p>
+              <a:pPr algn="ctr">
+                <a:lnSpc>
+                  <a:spcPts val="3779"/>
+                </a:lnSpc>
+              </a:pPr>
+              <a:r>
+                <a:rPr lang="en-US" sz="2700" b="true">
+                  <a:solidFill>
+                    <a:srgbClr val="2F0D8D"/>
+                  </a:solidFill>
+                  <a:latin typeface="Helvetica World Bold"/>
+                  <a:ea typeface="Helvetica World Bold"/>
+                  <a:cs typeface="Helvetica World Bold"/>
+                  <a:sym typeface="Helvetica World Bold"/>
+                </a:rPr>
+                <a:t>Social / Environmental / Governmental</a:t>
+              </a:r>
+            </a:p>
+          </p:txBody>
+        </p:sp>
+        <p:sp>
+          <p:nvSpPr>
+            <p:cNvPr name="TextBox 15" id="15"/>
+            <p:cNvSpPr txBox="true"/>
+            <p:nvPr/>
+          </p:nvSpPr>
+          <p:spPr>
+            <a:xfrm rot="0">
+              <a:off x="2193348" y="1499959"/>
+              <a:ext cx="12436349" cy="493817"/>
+            </a:xfrm>
+            <a:prstGeom prst="rect">
+              <a:avLst/>
+            </a:prstGeom>
+          </p:spPr>
+          <p:txBody>
+            <a:bodyPr anchor="t" rtlCol="false" tIns="0" lIns="0" bIns="0" rIns="0">
+              <a:spAutoFit/>
+            </a:bodyPr>
+            <a:lstStyle/>
+            <a:p>
+              <a:pPr algn="ctr">
+                <a:lnSpc>
+                  <a:spcPts val="3080"/>
+                </a:lnSpc>
+              </a:pPr>
+              <a:r>
+                <a:rPr lang="en-US" sz="2200">
+                  <a:solidFill>
+                    <a:srgbClr val="484848"/>
+                  </a:solidFill>
+                  <a:latin typeface="Helvetica World"/>
+                  <a:ea typeface="Helvetica World"/>
+                  <a:cs typeface="Helvetica World"/>
+                  <a:sym typeface="Helvetica World"/>
+                </a:rPr>
+                <a:t>Explain the social / environmental/ governmental impact of your solution</a:t>
+              </a:r>
+            </a:p>
+          </p:txBody>
+        </p:sp>
+      </p:grpSp>
+    </p:spTree>
+  </p:cSld>
+  <p:clrMapOvr>
+    <a:masterClrMapping/>
+  </p:clrMapOvr>
+</p:sld>
+</file>
+
+<file path=ppt/slides/slide7.xml><?xml version="1.0" encoding="utf-8"?>
+<p:sld xmlns:p="http://schemas.openxmlformats.org/presentationml/2006/main" xmlns:a="http://schemas.openxmlformats.org/drawingml/2006/main" xmlns:r="http://schemas.openxmlformats.org/officeDocument/2006/relationships">
+  <p:cSld>
+    <p:bg>
+      <p:bgPr>
+        <a:solidFill>
+          <a:srgbClr val="F7F7FD"/>
+        </a:solidFill>
+      </p:bgPr>
+    </p:bg>
+    <p:spTree>
+      <p:nvGrpSpPr>
+        <p:cNvPr id="1" name=""/>
+        <p:cNvGrpSpPr/>
+        <p:nvPr/>
+      </p:nvGrpSpPr>
+      <p:grpSpPr>
+        <a:xfrm>
+          <a:off x="0" y="0"/>
+          <a:ext cx="0" cy="0"/>
+          <a:chOff x="0" y="0"/>
+          <a:chExt cx="0" cy="0"/>
+        </a:xfrm>
+      </p:grpSpPr>
+      <p:sp>
+        <p:nvSpPr>
+          <p:cNvPr name="Freeform 2" id="2"/>
+          <p:cNvSpPr/>
+          <p:nvPr/>
+        </p:nvSpPr>
+        <p:spPr>
+          <a:xfrm flipH="false" flipV="false" rot="0">
+            <a:off x="-393678" y="-11430"/>
+            <a:ext cx="18681678" cy="10531796"/>
+          </a:xfrm>
+          <a:custGeom>
+            <a:avLst/>
+            <a:gdLst/>
+            <a:ahLst/>
+            <a:cxnLst/>
+            <a:rect r="r" b="b" t="t" l="l"/>
+            <a:pathLst>
+              <a:path h="10531796" w="18681678">
+                <a:moveTo>
+                  <a:pt x="0" y="0"/>
+                </a:moveTo>
+                <a:lnTo>
+                  <a:pt x="18681678" y="0"/>
+                </a:lnTo>
+                <a:lnTo>
+                  <a:pt x="18681678" y="10531796"/>
+                </a:lnTo>
+                <a:lnTo>
+                  <a:pt x="0" y="10531796"/>
+                </a:lnTo>
+                <a:lnTo>
+                  <a:pt x="0" y="0"/>
+                </a:lnTo>
+                <a:close/>
+              </a:path>
+            </a:pathLst>
+          </a:custGeom>
+          <a:blipFill>
+            <a:blip r:embed="rId2"/>
+            <a:stretch>
+              <a:fillRect l="0" t="0" r="0" b="0"/>
+            </a:stretch>
+          </a:blipFill>
+        </p:spPr>
+      </p:sp>
+      <p:sp>
+        <p:nvSpPr>
+          <p:cNvPr name="TextBox 3" id="3"/>
+          <p:cNvSpPr txBox="true"/>
+          <p:nvPr/>
+        </p:nvSpPr>
+        <p:spPr>
+          <a:xfrm rot="0">
+            <a:off x="1350077" y="413530"/>
+            <a:ext cx="15684128" cy="771525"/>
+          </a:xfrm>
+          <a:prstGeom prst="rect">
+            <a:avLst/>
+          </a:prstGeom>
+        </p:spPr>
+        <p:txBody>
+          <a:bodyPr anchor="t" rtlCol="false" tIns="0" lIns="0" bIns="0" rIns="0">
+            <a:spAutoFit/>
+          </a:bodyPr>
+          <a:lstStyle/>
+          <a:p>
+            <a:pPr algn="l">
+              <a:lnSpc>
+                <a:spcPts val="6299"/>
+              </a:lnSpc>
+            </a:pPr>
+            <a:r>
+              <a:rPr lang="en-US" sz="4500">
+                <a:solidFill>
+                  <a:srgbClr val="632EC9"/>
+                </a:solidFill>
+                <a:latin typeface="League Spartan"/>
+                <a:ea typeface="League Spartan"/>
+                <a:cs typeface="League Spartan"/>
+                <a:sym typeface="League Spartan"/>
+              </a:rPr>
+              <a:t>Future Plan and Feasibility</a:t>
+            </a:r>
+          </a:p>
+        </p:txBody>
+      </p:sp>
+      <p:sp>
+        <p:nvSpPr>
+          <p:cNvPr name="Freeform 4" id="4"/>
+          <p:cNvSpPr/>
+          <p:nvPr/>
+        </p:nvSpPr>
+        <p:spPr>
+          <a:xfrm flipH="false" flipV="false" rot="0">
+            <a:off x="17034205" y="297395"/>
+            <a:ext cx="925524" cy="963762"/>
+          </a:xfrm>
+          <a:custGeom>
+            <a:avLst/>
+            <a:gdLst/>
+            <a:ahLst/>
+            <a:cxnLst/>
+            <a:rect r="r" b="b" t="t" l="l"/>
+            <a:pathLst>
+              <a:path h="963762" w="925524">
+                <a:moveTo>
+                  <a:pt x="0" y="0"/>
+                </a:moveTo>
+                <a:lnTo>
+                  <a:pt x="925524" y="0"/>
+                </a:lnTo>
+                <a:lnTo>
+                  <a:pt x="925524" y="963763"/>
+                </a:lnTo>
+                <a:lnTo>
+                  <a:pt x="0" y="963763"/>
+                </a:lnTo>
+                <a:lnTo>
+                  <a:pt x="0" y="0"/>
+                </a:lnTo>
+                <a:close/>
+              </a:path>
+            </a:pathLst>
+          </a:custGeom>
+          <a:blipFill>
+            <a:blip r:embed="rId3"/>
+            <a:stretch>
+              <a:fillRect l="-8247" t="-5733" r="-147202" b="0"/>
+            </a:stretch>
+          </a:blipFill>
+        </p:spPr>
+      </p:sp>
+      <p:grpSp>
+        <p:nvGrpSpPr>
+          <p:cNvPr name="Group 5" id="5"/>
+          <p:cNvGrpSpPr/>
+          <p:nvPr/>
+        </p:nvGrpSpPr>
+        <p:grpSpPr>
+          <a:xfrm rot="0">
+            <a:off x="1028661" y="1321157"/>
+            <a:ext cx="16903200" cy="672561"/>
+            <a:chOff x="0" y="0"/>
+            <a:chExt cx="22537600" cy="896747"/>
+          </a:xfrm>
+        </p:grpSpPr>
+        <p:sp>
+          <p:nvSpPr>
+            <p:cNvPr name="AutoShape 6" id="6"/>
+            <p:cNvSpPr/>
+            <p:nvPr/>
+          </p:nvSpPr>
+          <p:spPr>
+            <a:xfrm>
+              <a:off x="49" y="411875"/>
+              <a:ext cx="22290554" cy="42849"/>
+            </a:xfrm>
+            <a:prstGeom prst="line">
+              <a:avLst/>
+            </a:prstGeom>
+            <a:ln cap="flat" w="50800">
+              <a:solidFill>
+                <a:srgbClr val="6E2AF5"/>
               </a:solidFill>
               <a:prstDash val="solid"/>
               <a:headEnd type="none" len="sm" w="sm"/>
@@ -5088,14 +10371,14 @@
         </p:sp>
         <p:sp>
           <p:nvSpPr>
-            <p:cNvPr name="Freeform 55" id="55"/>
+            <p:cNvPr name="Freeform 7" id="7"/>
             <p:cNvSpPr/>
             <p:nvPr/>
           </p:nvSpPr>
           <p:spPr>
             <a:xfrm flipH="false" flipV="false" rot="0">
-              <a:off x="8952492" y="747242"/>
-              <a:ext cx="933948" cy="933948"/>
+              <a:off x="21640852" y="0"/>
+              <a:ext cx="896747" cy="896747"/>
             </a:xfrm>
             <a:custGeom>
               <a:avLst/>
@@ -5104,18 +10387,18 @@
               <a:cxnLst/>
               <a:rect r="r" b="b" t="t" l="l"/>
               <a:pathLst>
-                <a:path h="933948" w="933948">
+                <a:path h="896747" w="896747">
                   <a:moveTo>
                     <a:pt x="0" y="0"/>
                   </a:moveTo>
                   <a:lnTo>
-                    <a:pt x="933948" y="0"/>
-                  </a:lnTo>
-                  <a:lnTo>
-                    <a:pt x="933948" y="933948"/>
-                  </a:lnTo>
-                  <a:lnTo>
-                    <a:pt x="0" y="933948"/>
+                    <a:pt x="896748" y="0"/>
+                  </a:lnTo>
+                  <a:lnTo>
+                    <a:pt x="896748" y="896747"/>
+                  </a:lnTo>
+                  <a:lnTo>
+                    <a:pt x="0" y="896747"/>
                   </a:lnTo>
                   <a:lnTo>
                     <a:pt x="0" y="0"/>
@@ -5125,7 +10408,80 @@
               </a:pathLst>
             </a:custGeom>
             <a:blipFill>
-              <a:blip r:embed="rId15"/>
+              <a:blip r:embed="rId4">
+                <a:extLst>
+                  <a:ext uri="{96DAC541-7B7A-43D3-8B79-37D633B846F1}">
+                    <asvg:svgBlip xmlns:asvg="http://schemas.microsoft.com/office/drawing/2016/SVG/main" r:embed="rId5"/>
+                  </a:ext>
+                </a:extLst>
+              </a:blip>
+              <a:stretch>
+                <a:fillRect l="0" t="0" r="0" b="0"/>
+              </a:stretch>
+            </a:blipFill>
+          </p:spPr>
+        </p:sp>
+      </p:grpSp>
+      <p:grpSp>
+        <p:nvGrpSpPr>
+          <p:cNvPr name="Group 8" id="8"/>
+          <p:cNvGrpSpPr/>
+          <p:nvPr/>
+        </p:nvGrpSpPr>
+        <p:grpSpPr>
+          <a:xfrm rot="0">
+            <a:off x="1019136" y="6161923"/>
+            <a:ext cx="13415989" cy="1121985"/>
+            <a:chOff x="0" y="0"/>
+            <a:chExt cx="17887985" cy="1495980"/>
+          </a:xfrm>
+        </p:grpSpPr>
+        <p:sp>
+          <p:nvSpPr>
+            <p:cNvPr name="Freeform 9" id="9"/>
+            <p:cNvSpPr/>
+            <p:nvPr/>
+          </p:nvSpPr>
+          <p:spPr>
+            <a:xfrm flipH="false" flipV="false" rot="0">
+              <a:off x="17129189" y="954776"/>
+              <a:ext cx="541203" cy="541203"/>
+            </a:xfrm>
+            <a:custGeom>
+              <a:avLst/>
+              <a:gdLst/>
+              <a:ahLst/>
+              <a:cxnLst/>
+              <a:rect r="r" b="b" t="t" l="l"/>
+              <a:pathLst>
+                <a:path h="541203" w="541203">
+                  <a:moveTo>
+                    <a:pt x="0" y="0"/>
+                  </a:moveTo>
+                  <a:lnTo>
+                    <a:pt x="541203" y="0"/>
+                  </a:lnTo>
+                  <a:lnTo>
+                    <a:pt x="541203" y="541204"/>
+                  </a:lnTo>
+                  <a:lnTo>
+                    <a:pt x="0" y="541204"/>
+                  </a:lnTo>
+                  <a:lnTo>
+                    <a:pt x="0" y="0"/>
+                  </a:lnTo>
+                  <a:close/>
+                </a:path>
+              </a:pathLst>
+            </a:custGeom>
+            <a:blipFill>
+              <a:blip r:embed="rId6">
+                <a:extLst>
+                  <a:ext uri="{96DAC541-7B7A-43D3-8B79-37D633B846F1}">
+                    <asvg:svgBlip xmlns:asvg="http://schemas.microsoft.com/office/drawing/2016/SVG/main" r:embed="rId7"/>
+                  </a:ext>
+                </a:extLst>
+              </a:blip>
               <a:stretch>
                 <a:fillRect l="0" t="0" r="0" b="0"/>
               </a:stretch>
@@ -5134,21 +10490,623 @@
         </p:sp>
         <p:sp>
           <p:nvSpPr>
-            <p:cNvPr name="AutoShape 56" id="56"/>
+            <p:cNvPr name="AutoShape 10" id="10"/>
             <p:cNvSpPr/>
             <p:nvPr/>
           </p:nvSpPr>
           <p:spPr>
-            <a:xfrm flipV="true">
-              <a:off x="14835258" y="747242"/>
-              <a:ext cx="0" cy="1014340"/>
+            <a:xfrm>
+              <a:off x="176396" y="1217384"/>
+              <a:ext cx="17223395" cy="0"/>
             </a:xfrm>
             <a:prstGeom prst="line">
               <a:avLst/>
             </a:prstGeom>
             <a:ln cap="flat" w="50800">
               <a:solidFill>
-                <a:srgbClr val="B58FFF"/>
+                <a:srgbClr val="CABAE7"/>
+              </a:solidFill>
+              <a:prstDash val="solid"/>
+              <a:headEnd type="none" len="sm" w="sm"/>
+              <a:tailEnd type="none" len="sm" w="sm"/>
+            </a:ln>
+          </p:spPr>
+        </p:sp>
+        <p:grpSp>
+          <p:nvGrpSpPr>
+            <p:cNvPr name="Group 11" id="11"/>
+            <p:cNvGrpSpPr/>
+            <p:nvPr/>
+          </p:nvGrpSpPr>
+          <p:grpSpPr>
+            <a:xfrm rot="5400000">
+              <a:off x="-471378" y="471378"/>
+              <a:ext cx="1225378" cy="282622"/>
+              <a:chOff x="0" y="0"/>
+              <a:chExt cx="170251" cy="39267"/>
+            </a:xfrm>
+          </p:grpSpPr>
+          <p:sp>
+            <p:nvSpPr>
+              <p:cNvPr name="Freeform 12" id="12"/>
+              <p:cNvSpPr/>
+              <p:nvPr/>
+            </p:nvSpPr>
+            <p:spPr>
+              <a:xfrm flipH="false" flipV="false" rot="0">
+                <a:off x="0" y="0"/>
+                <a:ext cx="170251" cy="39267"/>
+              </a:xfrm>
+              <a:custGeom>
+                <a:avLst/>
+                <a:gdLst/>
+                <a:ahLst/>
+                <a:cxnLst/>
+                <a:rect r="r" b="b" t="t" l="l"/>
+                <a:pathLst>
+                  <a:path h="39267" w="170251">
+                    <a:moveTo>
+                      <a:pt x="19633" y="0"/>
+                    </a:moveTo>
+                    <a:lnTo>
+                      <a:pt x="150617" y="0"/>
+                    </a:lnTo>
+                    <a:cubicBezTo>
+                      <a:pt x="155825" y="0"/>
+                      <a:pt x="160818" y="2069"/>
+                      <a:pt x="164500" y="5750"/>
+                    </a:cubicBezTo>
+                    <a:cubicBezTo>
+                      <a:pt x="168182" y="9432"/>
+                      <a:pt x="170251" y="14426"/>
+                      <a:pt x="170251" y="19633"/>
+                    </a:cubicBezTo>
+                    <a:lnTo>
+                      <a:pt x="170251" y="19633"/>
+                    </a:lnTo>
+                    <a:cubicBezTo>
+                      <a:pt x="170251" y="30477"/>
+                      <a:pt x="161461" y="39267"/>
+                      <a:pt x="150617" y="39267"/>
+                    </a:cubicBezTo>
+                    <a:lnTo>
+                      <a:pt x="19633" y="39267"/>
+                    </a:lnTo>
+                    <a:cubicBezTo>
+                      <a:pt x="14426" y="39267"/>
+                      <a:pt x="9432" y="37198"/>
+                      <a:pt x="5750" y="33516"/>
+                    </a:cubicBezTo>
+                    <a:cubicBezTo>
+                      <a:pt x="2069" y="29834"/>
+                      <a:pt x="0" y="24841"/>
+                      <a:pt x="0" y="19633"/>
+                    </a:cubicBezTo>
+                    <a:lnTo>
+                      <a:pt x="0" y="19633"/>
+                    </a:lnTo>
+                    <a:cubicBezTo>
+                      <a:pt x="0" y="14426"/>
+                      <a:pt x="2069" y="9432"/>
+                      <a:pt x="5750" y="5750"/>
+                    </a:cubicBezTo>
+                    <a:cubicBezTo>
+                      <a:pt x="9432" y="2069"/>
+                      <a:pt x="14426" y="0"/>
+                      <a:pt x="19633" y="0"/>
+                    </a:cubicBezTo>
+                    <a:close/>
+                  </a:path>
+                </a:pathLst>
+              </a:custGeom>
+              <a:solidFill>
+                <a:srgbClr val="6E2AF5"/>
+              </a:solidFill>
+            </p:spPr>
+          </p:sp>
+          <p:sp>
+            <p:nvSpPr>
+              <p:cNvPr name="TextBox 13" id="13"/>
+              <p:cNvSpPr txBox="true"/>
+              <p:nvPr/>
+            </p:nvSpPr>
+            <p:spPr>
+              <a:xfrm>
+                <a:off x="0" y="-57150"/>
+                <a:ext cx="170251" cy="96417"/>
+              </a:xfrm>
+              <a:prstGeom prst="rect">
+                <a:avLst/>
+              </a:prstGeom>
+            </p:spPr>
+            <p:txBody>
+              <a:bodyPr anchor="ctr" rtlCol="false" tIns="72224" lIns="72224" bIns="72224" rIns="72224"/>
+              <a:lstStyle/>
+              <a:p>
+                <a:pPr algn="ctr">
+                  <a:lnSpc>
+                    <a:spcPts val="3122"/>
+                  </a:lnSpc>
+                </a:pPr>
+              </a:p>
+            </p:txBody>
+          </p:sp>
+        </p:grpSp>
+        <p:sp>
+          <p:nvSpPr>
+            <p:cNvPr name="TextBox 14" id="14"/>
+            <p:cNvSpPr txBox="true"/>
+            <p:nvPr/>
+          </p:nvSpPr>
+          <p:spPr>
+            <a:xfrm rot="0">
+              <a:off x="282622" y="44789"/>
+              <a:ext cx="17605363" cy="909988"/>
+            </a:xfrm>
+            <a:prstGeom prst="rect">
+              <a:avLst/>
+            </a:prstGeom>
+          </p:spPr>
+          <p:txBody>
+            <a:bodyPr anchor="t" rtlCol="false" tIns="0" lIns="0" bIns="0" rIns="0">
+              <a:spAutoFit/>
+            </a:bodyPr>
+            <a:lstStyle/>
+            <a:p>
+              <a:pPr algn="ctr">
+                <a:lnSpc>
+                  <a:spcPts val="5362"/>
+                </a:lnSpc>
+              </a:pPr>
+              <a:r>
+                <a:rPr lang="en-US" sz="3830" b="true">
+                  <a:solidFill>
+                    <a:srgbClr val="2F0D8D"/>
+                  </a:solidFill>
+                  <a:latin typeface="Helvetica World Bold"/>
+                  <a:ea typeface="Helvetica World Bold"/>
+                  <a:cs typeface="Helvetica World Bold"/>
+                  <a:sym typeface="Helvetica World Bold"/>
+                </a:rPr>
+                <a:t>Economic Viability and Commercialisation Scalability</a:t>
+              </a:r>
+            </a:p>
+          </p:txBody>
+        </p:sp>
+      </p:grpSp>
+      <p:sp>
+        <p:nvSpPr>
+          <p:cNvPr name="Freeform 15" id="15"/>
+          <p:cNvSpPr/>
+          <p:nvPr/>
+        </p:nvSpPr>
+        <p:spPr>
+          <a:xfrm flipH="false" flipV="false" rot="0">
+            <a:off x="8338307" y="2843150"/>
+            <a:ext cx="405903" cy="405903"/>
+          </a:xfrm>
+          <a:custGeom>
+            <a:avLst/>
+            <a:gdLst/>
+            <a:ahLst/>
+            <a:cxnLst/>
+            <a:rect r="r" b="b" t="t" l="l"/>
+            <a:pathLst>
+              <a:path h="405903" w="405903">
+                <a:moveTo>
+                  <a:pt x="0" y="0"/>
+                </a:moveTo>
+                <a:lnTo>
+                  <a:pt x="405903" y="0"/>
+                </a:lnTo>
+                <a:lnTo>
+                  <a:pt x="405903" y="405903"/>
+                </a:lnTo>
+                <a:lnTo>
+                  <a:pt x="0" y="405903"/>
+                </a:lnTo>
+                <a:lnTo>
+                  <a:pt x="0" y="0"/>
+                </a:lnTo>
+                <a:close/>
+              </a:path>
+            </a:pathLst>
+          </a:custGeom>
+          <a:blipFill>
+            <a:blip r:embed="rId6">
+              <a:extLst>
+                <a:ext uri="{96DAC541-7B7A-43D3-8B79-37D633B846F1}">
+                  <asvg:svgBlip xmlns:asvg="http://schemas.microsoft.com/office/drawing/2016/SVG/main" r:embed="rId7"/>
+                </a:ext>
+              </a:extLst>
+            </a:blip>
+            <a:stretch>
+              <a:fillRect l="0" t="0" r="0" b="0"/>
+            </a:stretch>
+          </a:blipFill>
+        </p:spPr>
+      </p:sp>
+      <p:sp>
+        <p:nvSpPr>
+          <p:cNvPr name="AutoShape 16" id="16"/>
+          <p:cNvSpPr/>
+          <p:nvPr/>
+        </p:nvSpPr>
+        <p:spPr>
+          <a:xfrm>
+            <a:off x="1369954" y="3040106"/>
+            <a:ext cx="6968353" cy="5826"/>
+          </a:xfrm>
+          <a:prstGeom prst="line">
+            <a:avLst/>
+          </a:prstGeom>
+          <a:ln cap="flat" w="38100">
+            <a:solidFill>
+              <a:srgbClr val="CABAE7"/>
+            </a:solidFill>
+            <a:prstDash val="solid"/>
+            <a:headEnd type="none" len="sm" w="sm"/>
+            <a:tailEnd type="none" len="sm" w="sm"/>
+          </a:ln>
+        </p:spPr>
+      </p:sp>
+      <p:grpSp>
+        <p:nvGrpSpPr>
+          <p:cNvPr name="Group 17" id="17"/>
+          <p:cNvGrpSpPr/>
+          <p:nvPr/>
+        </p:nvGrpSpPr>
+        <p:grpSpPr>
+          <a:xfrm rot="5400000">
+            <a:off x="884124" y="2480601"/>
+            <a:ext cx="919034" cy="211967"/>
+            <a:chOff x="0" y="0"/>
+            <a:chExt cx="170251" cy="39267"/>
+          </a:xfrm>
+        </p:grpSpPr>
+        <p:sp>
+          <p:nvSpPr>
+            <p:cNvPr name="Freeform 18" id="18"/>
+            <p:cNvSpPr/>
+            <p:nvPr/>
+          </p:nvSpPr>
+          <p:spPr>
+            <a:xfrm flipH="false" flipV="false" rot="0">
+              <a:off x="0" y="0"/>
+              <a:ext cx="170251" cy="39267"/>
+            </a:xfrm>
+            <a:custGeom>
+              <a:avLst/>
+              <a:gdLst/>
+              <a:ahLst/>
+              <a:cxnLst/>
+              <a:rect r="r" b="b" t="t" l="l"/>
+              <a:pathLst>
+                <a:path h="39267" w="170251">
+                  <a:moveTo>
+                    <a:pt x="19633" y="0"/>
+                  </a:moveTo>
+                  <a:lnTo>
+                    <a:pt x="150617" y="0"/>
+                  </a:lnTo>
+                  <a:cubicBezTo>
+                    <a:pt x="155825" y="0"/>
+                    <a:pt x="160818" y="2069"/>
+                    <a:pt x="164500" y="5750"/>
+                  </a:cubicBezTo>
+                  <a:cubicBezTo>
+                    <a:pt x="168182" y="9432"/>
+                    <a:pt x="170251" y="14426"/>
+                    <a:pt x="170251" y="19633"/>
+                  </a:cubicBezTo>
+                  <a:lnTo>
+                    <a:pt x="170251" y="19633"/>
+                  </a:lnTo>
+                  <a:cubicBezTo>
+                    <a:pt x="170251" y="30477"/>
+                    <a:pt x="161461" y="39267"/>
+                    <a:pt x="150617" y="39267"/>
+                  </a:cubicBezTo>
+                  <a:lnTo>
+                    <a:pt x="19633" y="39267"/>
+                  </a:lnTo>
+                  <a:cubicBezTo>
+                    <a:pt x="14426" y="39267"/>
+                    <a:pt x="9432" y="37198"/>
+                    <a:pt x="5750" y="33516"/>
+                  </a:cubicBezTo>
+                  <a:cubicBezTo>
+                    <a:pt x="2069" y="29834"/>
+                    <a:pt x="0" y="24841"/>
+                    <a:pt x="0" y="19633"/>
+                  </a:cubicBezTo>
+                  <a:lnTo>
+                    <a:pt x="0" y="19633"/>
+                  </a:lnTo>
+                  <a:cubicBezTo>
+                    <a:pt x="0" y="14426"/>
+                    <a:pt x="2069" y="9432"/>
+                    <a:pt x="5750" y="5750"/>
+                  </a:cubicBezTo>
+                  <a:cubicBezTo>
+                    <a:pt x="9432" y="2069"/>
+                    <a:pt x="14426" y="0"/>
+                    <a:pt x="19633" y="0"/>
+                  </a:cubicBezTo>
+                  <a:close/>
+                </a:path>
+              </a:pathLst>
+            </a:custGeom>
+            <a:solidFill>
+              <a:srgbClr val="6E2AF5"/>
+            </a:solidFill>
+          </p:spPr>
+        </p:sp>
+        <p:sp>
+          <p:nvSpPr>
+            <p:cNvPr name="TextBox 19" id="19"/>
+            <p:cNvSpPr txBox="true"/>
+            <p:nvPr/>
+          </p:nvSpPr>
+          <p:spPr>
+            <a:xfrm>
+              <a:off x="0" y="-57150"/>
+              <a:ext cx="170251" cy="96417"/>
+            </a:xfrm>
+            <a:prstGeom prst="rect">
+              <a:avLst/>
+            </a:prstGeom>
+          </p:spPr>
+          <p:txBody>
+            <a:bodyPr anchor="ctr" rtlCol="false" tIns="72224" lIns="72224" bIns="72224" rIns="72224"/>
+            <a:lstStyle/>
+            <a:p>
+              <a:pPr algn="ctr">
+                <a:lnSpc>
+                  <a:spcPts val="3122"/>
+                </a:lnSpc>
+              </a:pPr>
+            </a:p>
+          </p:txBody>
+        </p:sp>
+      </p:grpSp>
+      <p:sp>
+        <p:nvSpPr>
+          <p:cNvPr name="TextBox 20" id="20"/>
+          <p:cNvSpPr txBox="true"/>
+          <p:nvPr/>
+        </p:nvSpPr>
+        <p:spPr>
+          <a:xfrm rot="0">
+            <a:off x="1459149" y="2151134"/>
+            <a:ext cx="6955364" cy="701541"/>
+          </a:xfrm>
+          <a:prstGeom prst="rect">
+            <a:avLst/>
+          </a:prstGeom>
+        </p:spPr>
+        <p:txBody>
+          <a:bodyPr anchor="t" rtlCol="false" tIns="0" lIns="0" bIns="0" rIns="0">
+            <a:spAutoFit/>
+          </a:bodyPr>
+          <a:lstStyle/>
+          <a:p>
+            <a:pPr algn="ctr">
+              <a:lnSpc>
+                <a:spcPts val="5362"/>
+              </a:lnSpc>
+            </a:pPr>
+            <a:r>
+              <a:rPr lang="en-US" sz="3830" b="true">
+                <a:solidFill>
+                  <a:srgbClr val="2F0D8D"/>
+                </a:solidFill>
+                <a:latin typeface="Helvetica World Bold"/>
+                <a:ea typeface="Helvetica World Bold"/>
+                <a:cs typeface="Helvetica World Bold"/>
+                <a:sym typeface="Helvetica World Bold"/>
+              </a:rPr>
+              <a:t>Challenges and Mitigations</a:t>
+            </a:r>
+          </a:p>
+        </p:txBody>
+      </p:sp>
+    </p:spTree>
+  </p:cSld>
+  <p:clrMapOvr>
+    <a:masterClrMapping/>
+  </p:clrMapOvr>
+</p:sld>
+</file>
+
+<file path=ppt/slides/slide8.xml><?xml version="1.0" encoding="utf-8"?>
+<p:sld xmlns:p="http://schemas.openxmlformats.org/presentationml/2006/main" xmlns:a="http://schemas.openxmlformats.org/drawingml/2006/main" xmlns:r="http://schemas.openxmlformats.org/officeDocument/2006/relationships">
+  <p:cSld>
+    <p:bg>
+      <p:bgPr>
+        <a:solidFill>
+          <a:srgbClr val="F7F7FD"/>
+        </a:solidFill>
+      </p:bgPr>
+    </p:bg>
+    <p:spTree>
+      <p:nvGrpSpPr>
+        <p:cNvPr id="1" name=""/>
+        <p:cNvGrpSpPr/>
+        <p:nvPr/>
+      </p:nvGrpSpPr>
+      <p:grpSpPr>
+        <a:xfrm>
+          <a:off x="0" y="0"/>
+          <a:ext cx="0" cy="0"/>
+          <a:chOff x="0" y="0"/>
+          <a:chExt cx="0" cy="0"/>
+        </a:xfrm>
+      </p:grpSpPr>
+      <p:sp>
+        <p:nvSpPr>
+          <p:cNvPr name="Freeform 2" id="2"/>
+          <p:cNvSpPr/>
+          <p:nvPr/>
+        </p:nvSpPr>
+        <p:spPr>
+          <a:xfrm flipH="false" flipV="false" rot="0">
+            <a:off x="-393678" y="-11430"/>
+            <a:ext cx="18681678" cy="10531796"/>
+          </a:xfrm>
+          <a:custGeom>
+            <a:avLst/>
+            <a:gdLst/>
+            <a:ahLst/>
+            <a:cxnLst/>
+            <a:rect r="r" b="b" t="t" l="l"/>
+            <a:pathLst>
+              <a:path h="10531796" w="18681678">
+                <a:moveTo>
+                  <a:pt x="0" y="0"/>
+                </a:moveTo>
+                <a:lnTo>
+                  <a:pt x="18681678" y="0"/>
+                </a:lnTo>
+                <a:lnTo>
+                  <a:pt x="18681678" y="10531796"/>
+                </a:lnTo>
+                <a:lnTo>
+                  <a:pt x="0" y="10531796"/>
+                </a:lnTo>
+                <a:lnTo>
+                  <a:pt x="0" y="0"/>
+                </a:lnTo>
+                <a:close/>
+              </a:path>
+            </a:pathLst>
+          </a:custGeom>
+          <a:blipFill>
+            <a:blip r:embed="rId2"/>
+            <a:stretch>
+              <a:fillRect l="0" t="0" r="0" b="0"/>
+            </a:stretch>
+          </a:blipFill>
+        </p:spPr>
+      </p:sp>
+      <p:sp>
+        <p:nvSpPr>
+          <p:cNvPr name="TextBox 3" id="3"/>
+          <p:cNvSpPr txBox="true"/>
+          <p:nvPr/>
+        </p:nvSpPr>
+        <p:spPr>
+          <a:xfrm rot="0">
+            <a:off x="1331027" y="413530"/>
+            <a:ext cx="15064954" cy="771525"/>
+          </a:xfrm>
+          <a:prstGeom prst="rect">
+            <a:avLst/>
+          </a:prstGeom>
+        </p:spPr>
+        <p:txBody>
+          <a:bodyPr anchor="t" rtlCol="false" tIns="0" lIns="0" bIns="0" rIns="0">
+            <a:spAutoFit/>
+          </a:bodyPr>
+          <a:lstStyle/>
+          <a:p>
+            <a:pPr algn="l">
+              <a:lnSpc>
+                <a:spcPts val="6299"/>
+              </a:lnSpc>
+            </a:pPr>
+            <a:r>
+              <a:rPr lang="en-US" sz="4500">
+                <a:solidFill>
+                  <a:srgbClr val="632EC9"/>
+                </a:solidFill>
+                <a:latin typeface="League Spartan"/>
+                <a:ea typeface="League Spartan"/>
+                <a:cs typeface="League Spartan"/>
+                <a:sym typeface="League Spartan"/>
+              </a:rPr>
+              <a:t>Research and References</a:t>
+            </a:r>
+          </a:p>
+        </p:txBody>
+      </p:sp>
+      <p:sp>
+        <p:nvSpPr>
+          <p:cNvPr name="Freeform 4" id="4"/>
+          <p:cNvSpPr/>
+          <p:nvPr/>
+        </p:nvSpPr>
+        <p:spPr>
+          <a:xfrm flipH="false" flipV="false" rot="0">
+            <a:off x="17034205" y="297395"/>
+            <a:ext cx="925524" cy="963762"/>
+          </a:xfrm>
+          <a:custGeom>
+            <a:avLst/>
+            <a:gdLst/>
+            <a:ahLst/>
+            <a:cxnLst/>
+            <a:rect r="r" b="b" t="t" l="l"/>
+            <a:pathLst>
+              <a:path h="963762" w="925524">
+                <a:moveTo>
+                  <a:pt x="0" y="0"/>
+                </a:moveTo>
+                <a:lnTo>
+                  <a:pt x="925524" y="0"/>
+                </a:lnTo>
+                <a:lnTo>
+                  <a:pt x="925524" y="963763"/>
+                </a:lnTo>
+                <a:lnTo>
+                  <a:pt x="0" y="963763"/>
+                </a:lnTo>
+                <a:lnTo>
+                  <a:pt x="0" y="0"/>
+                </a:lnTo>
+                <a:close/>
+              </a:path>
+            </a:pathLst>
+          </a:custGeom>
+          <a:blipFill>
+            <a:blip r:embed="rId3"/>
+            <a:stretch>
+              <a:fillRect l="-8247" t="-5733" r="-147202" b="0"/>
+            </a:stretch>
+          </a:blipFill>
+        </p:spPr>
+      </p:sp>
+      <p:grpSp>
+        <p:nvGrpSpPr>
+          <p:cNvPr name="Group 5" id="5"/>
+          <p:cNvGrpSpPr/>
+          <p:nvPr/>
+        </p:nvGrpSpPr>
+        <p:grpSpPr>
+          <a:xfrm rot="0">
+            <a:off x="1028661" y="1321157"/>
+            <a:ext cx="16903200" cy="672561"/>
+            <a:chOff x="0" y="0"/>
+            <a:chExt cx="22537600" cy="896747"/>
+          </a:xfrm>
+        </p:grpSpPr>
+        <p:sp>
+          <p:nvSpPr>
+            <p:cNvPr name="AutoShape 6" id="6"/>
+            <p:cNvSpPr/>
+            <p:nvPr/>
+          </p:nvSpPr>
+          <p:spPr>
+            <a:xfrm>
+              <a:off x="49" y="411875"/>
+              <a:ext cx="22290554" cy="42849"/>
+            </a:xfrm>
+            <a:prstGeom prst="line">
+              <a:avLst/>
+            </a:prstGeom>
+            <a:ln cap="flat" w="50800">
+              <a:solidFill>
+                <a:srgbClr val="6E2AF5"/>
               </a:solidFill>
               <a:prstDash val="solid"/>
               <a:headEnd type="none" len="sm" w="sm"/>
@@ -5158,38 +11116,14 @@
         </p:sp>
         <p:sp>
           <p:nvSpPr>
-            <p:cNvPr name="AutoShape 57" id="57"/>
-            <p:cNvSpPr/>
-            <p:nvPr/>
-          </p:nvSpPr>
-          <p:spPr>
-            <a:xfrm flipV="true">
-              <a:off x="16863640" y="702921"/>
-              <a:ext cx="0" cy="1014340"/>
-            </a:xfrm>
-            <a:prstGeom prst="line">
-              <a:avLst/>
-            </a:prstGeom>
-            <a:ln cap="flat" w="50800">
-              <a:solidFill>
-                <a:srgbClr val="B58FFF"/>
-              </a:solidFill>
-              <a:prstDash val="solid"/>
-              <a:headEnd type="none" len="sm" w="sm"/>
-              <a:tailEnd type="none" len="sm" w="sm"/>
-            </a:ln>
-          </p:spPr>
-        </p:sp>
-        <p:sp>
-          <p:nvSpPr>
-            <p:cNvPr name="Freeform 58" id="58"/>
+            <p:cNvPr name="Freeform 7" id="7"/>
             <p:cNvSpPr/>
             <p:nvPr/>
           </p:nvSpPr>
           <p:spPr>
             <a:xfrm flipH="false" flipV="false" rot="0">
-              <a:off x="17106464" y="519332"/>
-              <a:ext cx="1207255" cy="1207255"/>
+              <a:off x="21640852" y="0"/>
+              <a:ext cx="896747" cy="896747"/>
             </a:xfrm>
             <a:custGeom>
               <a:avLst/>
@@ -5198,18 +11132,18 @@
               <a:cxnLst/>
               <a:rect r="r" b="b" t="t" l="l"/>
               <a:pathLst>
-                <a:path h="1207255" w="1207255">
+                <a:path h="896747" w="896747">
                   <a:moveTo>
                     <a:pt x="0" y="0"/>
                   </a:moveTo>
                   <a:lnTo>
-                    <a:pt x="1207255" y="0"/>
-                  </a:lnTo>
-                  <a:lnTo>
-                    <a:pt x="1207255" y="1207255"/>
-                  </a:lnTo>
-                  <a:lnTo>
-                    <a:pt x="0" y="1207255"/>
+                    <a:pt x="896748" y="0"/>
+                  </a:lnTo>
+                  <a:lnTo>
+                    <a:pt x="896748" y="896747"/>
+                  </a:lnTo>
+                  <a:lnTo>
+                    <a:pt x="0" y="896747"/>
                   </a:lnTo>
                   <a:lnTo>
                     <a:pt x="0" y="0"/>
@@ -5219,35 +11153,17 @@
               </a:pathLst>
             </a:custGeom>
             <a:blipFill>
-              <a:blip r:embed="rId16"/>
+              <a:blip r:embed="rId4">
+                <a:extLst>
+                  <a:ext uri="{96DAC541-7B7A-43D3-8B79-37D633B846F1}">
+                    <asvg:svgBlip xmlns:asvg="http://schemas.microsoft.com/office/drawing/2016/SVG/main" r:embed="rId5"/>
+                  </a:ext>
+                </a:extLst>
+              </a:blip>
               <a:stretch>
                 <a:fillRect l="0" t="0" r="0" b="0"/>
               </a:stretch>
             </a:blipFill>
-          </p:spPr>
-        </p:sp>
-        <p:sp>
-          <p:nvSpPr>
-            <p:cNvPr name="AutoShape 59" id="59"/>
-            <p:cNvSpPr/>
-            <p:nvPr/>
-          </p:nvSpPr>
-          <p:spPr>
-            <a:xfrm flipV="true">
-              <a:off x="18618519" y="676993"/>
-              <a:ext cx="0" cy="1014340"/>
-            </a:xfrm>
-            <a:prstGeom prst="line">
-              <a:avLst/>
-            </a:prstGeom>
-            <a:ln cap="flat" w="50800">
-              <a:solidFill>
-                <a:srgbClr val="B58FFF"/>
-              </a:solidFill>
-              <a:prstDash val="solid"/>
-              <a:headEnd type="none" len="sm" w="sm"/>
-              <a:tailEnd type="none" len="sm" w="sm"/>
-            </a:ln>
           </p:spPr>
         </p:sp>
       </p:grpSp>
